--- a/02-PROFESORADO/03-PRESENTACIONES/POR-SESION/h0/S205-transferencia-a-minijarvis-y-contrato-de-equipo-presentacion.pptx
+++ b/02-PROFESORADO/03-PRESENTACIONES/POR-SESION/h0/S205-transferencia-a-minijarvis-y-contrato-de-equipo-presentacion.pptx
@@ -11,6 +11,11 @@
     <p:sldId id="259" r:id="rId10"/>
     <p:sldId id="260" r:id="rId11"/>
     <p:sldId id="261" r:id="rId12"/>
+    <p:sldId id="262" r:id="rId13"/>
+    <p:sldId id="263" r:id="rId14"/>
+    <p:sldId id="264" r:id="rId15"/>
+    <p:sldId id="265" r:id="rId16"/>
+    <p:sldId id="266" r:id="rId17"/>
   </p:sldIdLst>
   <p:sldSz cx="12191695" cy="6858000" type="screen4x3"/>
   <p:notesSz cx="6858000" cy="9144000"/>
@@ -3145,7 +3150,7 @@
         <p:spPr>
           <a:xfrm>
             <a:off x="0" y="0"/>
-            <a:ext cx="228600" cy="6858000"/>
+            <a:ext cx="256032" cy="6858000"/>
           </a:xfrm>
           <a:prstGeom prst="rect">
             <a:avLst/>
@@ -3187,10 +3192,332 @@
         </p:nvSpPr>
         <p:spPr>
           <a:xfrm>
-            <a:off x="640080" y="566928"/>
-            <a:ext cx="1828800" cy="566928"/>
+            <a:off x="658368" y="566928"/>
+            <a:ext cx="1874519" cy="566928"/>
           </a:xfrm>
           <a:prstGeom prst="roundRect">
+            <a:avLst/>
+          </a:prstGeom>
+          <a:solidFill>
+            <a:srgbClr val="CC4F3E"/>
+          </a:solidFill>
+          <a:ln>
+            <a:solidFill>
+              <a:srgbClr val="CC4F3E"/>
+            </a:solidFill>
+          </a:ln>
+        </p:spPr>
+        <p:style>
+          <a:lnRef idx="1">
+            <a:schemeClr val="accent1"/>
+          </a:lnRef>
+          <a:fillRef idx="3">
+            <a:schemeClr val="accent1"/>
+          </a:fillRef>
+          <a:effectRef idx="2">
+            <a:schemeClr val="accent1"/>
+          </a:effectRef>
+          <a:fontRef idx="minor">
+            <a:schemeClr val="lt1"/>
+          </a:fontRef>
+        </p:style>
+        <p:txBody>
+          <a:bodyPr rtlCol="0" anchor="ctr"/>
+          <a:lstStyle/>
+          <a:p>
+            <a:pPr algn="ctr"/>
+          </a:p>
+        </p:txBody>
+      </p:sp>
+      <p:sp>
+        <p:nvSpPr>
+          <p:cNvPr id="5" name="TextBox 4"/>
+          <p:cNvSpPr txBox="1"/>
+          <p:nvPr/>
+        </p:nvSpPr>
+        <p:spPr>
+          <a:xfrm>
+            <a:off x="731520" y="685800"/>
+            <a:ext cx="1719072" cy="228600"/>
+          </a:xfrm>
+          <a:prstGeom prst="rect">
+            <a:avLst/>
+          </a:prstGeom>
+          <a:noFill/>
+        </p:spPr>
+        <p:txBody>
+          <a:bodyPr wrap="square" lIns="45720" rIns="45720" tIns="36576" bIns="36576" anchor="t">
+            <a:spAutoFit/>
+          </a:bodyPr>
+          <a:lstStyle/>
+          <a:p>
+            <a:pPr algn="ctr">
+              <a:defRPr sz="1400" b="1">
+                <a:solidFill>
+                  <a:srgbClr val="FFFFFF"/>
+                </a:solidFill>
+                <a:latin typeface="Aptos"/>
+              </a:defRPr>
+            </a:pPr>
+            <a:r>
+              <a:t>SESIÓN 205</a:t>
+            </a:r>
+          </a:p>
+        </p:txBody>
+      </p:sp>
+      <p:sp>
+        <p:nvSpPr>
+          <p:cNvPr id="6" name="TextBox 5"/>
+          <p:cNvSpPr txBox="1"/>
+          <p:nvPr/>
+        </p:nvSpPr>
+        <p:spPr>
+          <a:xfrm>
+            <a:off x="685800" y="1481328"/>
+            <a:ext cx="10789920" cy="1691640"/>
+          </a:xfrm>
+          <a:prstGeom prst="rect">
+            <a:avLst/>
+          </a:prstGeom>
+          <a:noFill/>
+        </p:spPr>
+        <p:txBody>
+          <a:bodyPr wrap="square" lIns="45720" rIns="45720" tIns="36576" bIns="36576" anchor="t">
+            <a:spAutoFit/>
+          </a:bodyPr>
+          <a:lstStyle/>
+          <a:p>
+            <a:pPr algn="l">
+              <a:defRPr sz="3200" b="1">
+                <a:solidFill>
+                  <a:srgbClr val="FFFFFF"/>
+                </a:solidFill>
+                <a:latin typeface="Aptos"/>
+              </a:defRPr>
+            </a:pPr>
+            <a:r>
+              <a:t>De la torre a MiniJarvis: revisión del equipo, contrato y rotación de funciones</a:t>
+            </a:r>
+          </a:p>
+        </p:txBody>
+      </p:sp>
+      <p:sp>
+        <p:nvSpPr>
+          <p:cNvPr id="7" name="TextBox 6"/>
+          <p:cNvSpPr txBox="1"/>
+          <p:nvPr/>
+        </p:nvSpPr>
+        <p:spPr>
+          <a:xfrm>
+            <a:off x="713232" y="3703320"/>
+            <a:ext cx="10424160" cy="411480"/>
+          </a:xfrm>
+          <a:prstGeom prst="rect">
+            <a:avLst/>
+          </a:prstGeom>
+          <a:noFill/>
+        </p:spPr>
+        <p:txBody>
+          <a:bodyPr wrap="square" lIns="45720" rIns="45720" tIns="36576" bIns="36576" anchor="t">
+            <a:spAutoFit/>
+          </a:bodyPr>
+          <a:lstStyle/>
+          <a:p>
+            <a:pPr algn="l">
+              <a:defRPr sz="1900" b="1">
+                <a:solidFill>
+                  <a:srgbClr val="BEC8D6"/>
+                </a:solidFill>
+                <a:latin typeface="Aptos"/>
+              </a:defRPr>
+            </a:pPr>
+            <a:r>
+              <a:t>H0 — Formación y prueba de equipos Scrum mediante la torre de papel · 45 minutos</a:t>
+            </a:r>
+          </a:p>
+        </p:txBody>
+      </p:sp>
+      <p:sp>
+        <p:nvSpPr>
+          <p:cNvPr id="8" name="TextBox 7"/>
+          <p:cNvSpPr txBox="1"/>
+          <p:nvPr/>
+        </p:nvSpPr>
+        <p:spPr>
+          <a:xfrm>
+            <a:off x="713232" y="4315968"/>
+            <a:ext cx="10241280" cy="502920"/>
+          </a:xfrm>
+          <a:prstGeom prst="rect">
+            <a:avLst/>
+          </a:prstGeom>
+          <a:noFill/>
+        </p:spPr>
+        <p:txBody>
+          <a:bodyPr wrap="square" lIns="45720" rIns="45720" tIns="36576" bIns="36576" anchor="t">
+            <a:spAutoFit/>
+          </a:bodyPr>
+          <a:lstStyle/>
+          <a:p>
+            <a:pPr algn="l">
+              <a:defRPr sz="1900" b="0">
+                <a:solidFill>
+                  <a:srgbClr val="FFFFFF"/>
+                </a:solidFill>
+                <a:latin typeface="Aptos"/>
+              </a:defRPr>
+            </a:pPr>
+            <a:r>
+              <a:t>Fase HEXA: Comunicar — evaluar y reflexionar</a:t>
+            </a:r>
+          </a:p>
+        </p:txBody>
+      </p:sp>
+      <p:sp>
+        <p:nvSpPr>
+          <p:cNvPr id="9" name="TextBox 8"/>
+          <p:cNvSpPr txBox="1"/>
+          <p:nvPr/>
+        </p:nvSpPr>
+        <p:spPr>
+          <a:xfrm>
+            <a:off x="713232" y="4965192"/>
+            <a:ext cx="10241280" cy="594360"/>
+          </a:xfrm>
+          <a:prstGeom prst="rect">
+            <a:avLst/>
+          </a:prstGeom>
+          <a:noFill/>
+        </p:spPr>
+        <p:txBody>
+          <a:bodyPr wrap="square" lIns="45720" rIns="45720" tIns="36576" bIns="36576" anchor="t">
+            <a:spAutoFit/>
+          </a:bodyPr>
+          <a:lstStyle/>
+          <a:p>
+            <a:pPr algn="l">
+              <a:defRPr sz="1700" b="0">
+                <a:solidFill>
+                  <a:srgbClr val="D2D9E4"/>
+                </a:solidFill>
+                <a:latin typeface="Aptos"/>
+              </a:defRPr>
+            </a:pPr>
+            <a:r>
+              <a:t>Equipos provisionales de la torre, con cierre individual</a:t>
+            </a:r>
+          </a:p>
+        </p:txBody>
+      </p:sp>
+      <p:sp>
+        <p:nvSpPr>
+          <p:cNvPr id="10" name="TextBox 9"/>
+          <p:cNvSpPr txBox="1"/>
+          <p:nvPr/>
+        </p:nvSpPr>
+        <p:spPr>
+          <a:xfrm>
+            <a:off x="713232" y="6272784"/>
+            <a:ext cx="10607040" cy="201168"/>
+          </a:xfrm>
+          <a:prstGeom prst="rect">
+            <a:avLst/>
+          </a:prstGeom>
+          <a:noFill/>
+        </p:spPr>
+        <p:txBody>
+          <a:bodyPr wrap="square" lIns="45720" rIns="45720" tIns="36576" bIns="36576" anchor="t">
+            <a:spAutoFit/>
+          </a:bodyPr>
+          <a:lstStyle/>
+          <a:p>
+            <a:pPr algn="l">
+              <a:defRPr sz="1000" b="1">
+                <a:solidFill>
+                  <a:srgbClr val="A0AAB9"/>
+                </a:solidFill>
+                <a:latin typeface="Aptos"/>
+              </a:defRPr>
+            </a:pPr>
+            <a:r>
+              <a:t>MINIJARVIS · PROGRAMACIÓN + ENTORNOS DE DESARROLLO</a:t>
+            </a:r>
+          </a:p>
+        </p:txBody>
+      </p:sp>
+    </p:spTree>
+  </p:cSld>
+  <p:clrMapOvr>
+    <a:masterClrMapping/>
+  </p:clrMapOvr>
+</p:sld>
+</file>
+
+<file path=ppt/slides/slide10.xml><?xml version="1.0" encoding="utf-8"?>
+<p:sld xmlns:a="http://schemas.openxmlformats.org/drawingml/2006/main" xmlns:p="http://schemas.openxmlformats.org/presentationml/2006/main" xmlns:r="http://schemas.openxmlformats.org/officeDocument/2006/relationships">
+  <p:cSld>
+    <p:spTree>
+      <p:nvGrpSpPr>
+        <p:cNvPr id="1" name=""/>
+        <p:cNvGrpSpPr/>
+        <p:nvPr/>
+      </p:nvGrpSpPr>
+      <p:grpSpPr/>
+      <p:sp>
+        <p:nvSpPr>
+          <p:cNvPr id="2" name="Rectangle 1"/>
+          <p:cNvSpPr/>
+          <p:nvPr/>
+        </p:nvSpPr>
+        <p:spPr>
+          <a:xfrm>
+            <a:off x="0" y="0"/>
+            <a:ext cx="12191695" cy="6858000"/>
+          </a:xfrm>
+          <a:prstGeom prst="rect">
+            <a:avLst/>
+          </a:prstGeom>
+          <a:solidFill>
+            <a:srgbClr val="F9F7F2"/>
+          </a:solidFill>
+          <a:ln>
+            <a:noFill/>
+          </a:ln>
+        </p:spPr>
+        <p:style>
+          <a:lnRef idx="1">
+            <a:schemeClr val="accent1"/>
+          </a:lnRef>
+          <a:fillRef idx="3">
+            <a:schemeClr val="accent1"/>
+          </a:fillRef>
+          <a:effectRef idx="2">
+            <a:schemeClr val="accent1"/>
+          </a:effectRef>
+          <a:fontRef idx="minor">
+            <a:schemeClr val="lt1"/>
+          </a:fontRef>
+        </p:style>
+        <p:txBody>
+          <a:bodyPr rtlCol="0" anchor="ctr"/>
+          <a:lstStyle/>
+          <a:p>
+            <a:pPr algn="ctr"/>
+          </a:p>
+        </p:txBody>
+      </p:sp>
+      <p:sp>
+        <p:nvSpPr>
+          <p:cNvPr id="3" name="Rectangle 2"/>
+          <p:cNvSpPr/>
+          <p:nvPr/>
+        </p:nvSpPr>
+        <p:spPr>
+          <a:xfrm>
+            <a:off x="0" y="0"/>
+            <a:ext cx="164592" cy="6858000"/>
+          </a:xfrm>
+          <a:prstGeom prst="rect">
             <a:avLst/>
           </a:prstGeom>
           <a:solidFill>
@@ -3224,14 +3551,50 @@
       </p:sp>
       <p:sp>
         <p:nvSpPr>
+          <p:cNvPr id="4" name="TextBox 3"/>
+          <p:cNvSpPr txBox="1"/>
+          <p:nvPr/>
+        </p:nvSpPr>
+        <p:spPr>
+          <a:xfrm>
+            <a:off x="502920" y="274320"/>
+            <a:ext cx="5486400" cy="256032"/>
+          </a:xfrm>
+          <a:prstGeom prst="rect">
+            <a:avLst/>
+          </a:prstGeom>
+          <a:noFill/>
+        </p:spPr>
+        <p:txBody>
+          <a:bodyPr wrap="square" lIns="45720" rIns="45720" tIns="36576" bIns="36576" anchor="t">
+            <a:spAutoFit/>
+          </a:bodyPr>
+          <a:lstStyle/>
+          <a:p>
+            <a:pPr algn="l">
+              <a:defRPr sz="1000" b="1">
+                <a:solidFill>
+                  <a:srgbClr val="CC4F3E"/>
+                </a:solidFill>
+                <a:latin typeface="Aptos"/>
+              </a:defRPr>
+            </a:pPr>
+            <a:r>
+              <a:t>COMPROBAR</a:t>
+            </a:r>
+          </a:p>
+        </p:txBody>
+      </p:sp>
+      <p:sp>
+        <p:nvSpPr>
           <p:cNvPr id="5" name="TextBox 4"/>
           <p:cNvSpPr txBox="1"/>
           <p:nvPr/>
         </p:nvSpPr>
         <p:spPr>
           <a:xfrm>
-            <a:off x="713232" y="676656"/>
-            <a:ext cx="1682496" cy="256032"/>
+            <a:off x="502920" y="603504"/>
+            <a:ext cx="11064240" cy="530352"/>
           </a:xfrm>
           <a:prstGeom prst="rect">
             <a:avLst/>
@@ -3239,58 +3602,65 @@
           <a:noFill/>
         </p:spPr>
         <p:txBody>
-          <a:bodyPr wrap="square" lIns="36576" rIns="36576" tIns="27432" bIns="27432">
+          <a:bodyPr wrap="square" lIns="45720" rIns="45720" tIns="36576" bIns="36576" anchor="t">
             <a:spAutoFit/>
           </a:bodyPr>
           <a:lstStyle/>
           <a:p>
-            <a:pPr algn="ctr">
-              <a:defRPr sz="1400" b="1">
-                <a:solidFill>
-                  <a:srgbClr val="FFFFFF"/>
+            <a:pPr algn="l">
+              <a:defRPr sz="2800" b="1">
+                <a:solidFill>
+                  <a:srgbClr val="1C2330"/>
                 </a:solidFill>
                 <a:latin typeface="Aptos"/>
               </a:defRPr>
             </a:pPr>
             <a:r>
-              <a:t>SESIÓN 205</a:t>
-            </a:r>
-          </a:p>
-        </p:txBody>
-      </p:sp>
-      <p:sp>
-        <p:nvSpPr>
-          <p:cNvPr id="6" name="TextBox 5"/>
-          <p:cNvSpPr txBox="1"/>
-          <p:nvPr/>
-        </p:nvSpPr>
-        <p:spPr>
-          <a:xfrm>
-            <a:off x="658368" y="1536192"/>
-            <a:ext cx="10789920" cy="1645920"/>
-          </a:xfrm>
-          <a:prstGeom prst="rect">
-            <a:avLst/>
-          </a:prstGeom>
-          <a:noFill/>
-        </p:spPr>
-        <p:txBody>
-          <a:bodyPr wrap="square" lIns="36576" rIns="36576" tIns="27432" bIns="27432">
-            <a:spAutoFit/>
-          </a:bodyPr>
-          <a:lstStyle/>
-          <a:p>
-            <a:pPr algn="l">
-              <a:defRPr sz="3800" b="1">
-                <a:solidFill>
-                  <a:srgbClr val="FFFFFF"/>
-                </a:solidFill>
-                <a:latin typeface="Aptos"/>
-              </a:defRPr>
-            </a:pPr>
-            <a:r>
-              <a:t>De la torre a MiniJarvis: equipo, contrato y rotación</a:t>
-            </a:r>
+              <a:t>Evidencia y comprobación · 2</a:t>
+            </a:r>
+          </a:p>
+        </p:txBody>
+      </p:sp>
+      <p:sp>
+        <p:nvSpPr>
+          <p:cNvPr id="6" name="Rectangle 5"/>
+          <p:cNvSpPr/>
+          <p:nvPr/>
+        </p:nvSpPr>
+        <p:spPr>
+          <a:xfrm>
+            <a:off x="0" y="6601968"/>
+            <a:ext cx="12191695" cy="256032"/>
+          </a:xfrm>
+          <a:prstGeom prst="rect">
+            <a:avLst/>
+          </a:prstGeom>
+          <a:solidFill>
+            <a:srgbClr val="CC4F3E"/>
+          </a:solidFill>
+          <a:ln>
+            <a:noFill/>
+          </a:ln>
+        </p:spPr>
+        <p:style>
+          <a:lnRef idx="1">
+            <a:schemeClr val="accent1"/>
+          </a:lnRef>
+          <a:fillRef idx="3">
+            <a:schemeClr val="accent1"/>
+          </a:fillRef>
+          <a:effectRef idx="2">
+            <a:schemeClr val="accent1"/>
+          </a:effectRef>
+          <a:fontRef idx="minor">
+            <a:schemeClr val="lt1"/>
+          </a:fontRef>
+        </p:style>
+        <p:txBody>
+          <a:bodyPr rtlCol="0" anchor="ctr"/>
+          <a:lstStyle/>
+          <a:p>
+            <a:pPr algn="ctr"/>
           </a:p>
         </p:txBody>
       </p:sp>
@@ -3302,8 +3672,8 @@
         </p:nvSpPr>
         <p:spPr>
           <a:xfrm>
-            <a:off x="685800" y="3822191"/>
-            <a:ext cx="6766560" cy="384048"/>
+            <a:off x="411480" y="6629400"/>
+            <a:ext cx="11247120" cy="164592"/>
           </a:xfrm>
           <a:prstGeom prst="rect">
             <a:avLst/>
@@ -3311,58 +3681,67 @@
           <a:noFill/>
         </p:spPr>
         <p:txBody>
-          <a:bodyPr wrap="square" lIns="36576" rIns="36576" tIns="27432" bIns="27432">
+          <a:bodyPr wrap="square" lIns="45720" rIns="45720" tIns="36576" bIns="36576" anchor="t">
             <a:spAutoFit/>
           </a:bodyPr>
           <a:lstStyle/>
           <a:p>
             <a:pPr algn="l">
-              <a:defRPr sz="1900" b="1">
-                <a:solidFill>
-                  <a:srgbClr val="BEC8D6"/>
+              <a:defRPr sz="900" b="0">
+                <a:solidFill>
+                  <a:srgbClr val="FFFFFF"/>
                 </a:solidFill>
                 <a:latin typeface="Aptos"/>
               </a:defRPr>
             </a:pPr>
             <a:r>
-              <a:t>H0  ·  45 minutos</a:t>
-            </a:r>
-          </a:p>
-        </p:txBody>
-      </p:sp>
-      <p:sp>
-        <p:nvSpPr>
-          <p:cNvPr id="8" name="TextBox 7"/>
-          <p:cNvSpPr txBox="1"/>
-          <p:nvPr/>
-        </p:nvSpPr>
-        <p:spPr>
-          <a:xfrm>
-            <a:off x="685800" y="5074920"/>
-            <a:ext cx="10241280" cy="640080"/>
-          </a:xfrm>
-          <a:prstGeom prst="rect">
-            <a:avLst/>
-          </a:prstGeom>
-          <a:noFill/>
-        </p:spPr>
-        <p:txBody>
-          <a:bodyPr wrap="square" lIns="36576" rIns="36576" tIns="27432" bIns="27432">
-            <a:spAutoFit/>
-          </a:bodyPr>
-          <a:lstStyle/>
-          <a:p>
-            <a:pPr algn="l">
-              <a:defRPr sz="2400" b="0">
-                <a:solidFill>
-                  <a:srgbClr val="FFFFFF"/>
-                </a:solidFill>
-                <a:latin typeface="Aptos"/>
-              </a:defRPr>
-            </a:pPr>
-            <a:r>
-              <a:t>Hoy construiremos una evidencia que puedas comprobar y explicar.</a:t>
-            </a:r>
+              <a:t>MiniJarvis · 1.º DAW · Sesión 205 · H0 — Formación y prueba de equipos Scrum mediante la torre de papel</a:t>
+            </a:r>
+          </a:p>
+        </p:txBody>
+      </p:sp>
+      <p:sp>
+        <p:nvSpPr>
+          <p:cNvPr id="8" name="Rounded Rectangle 7"/>
+          <p:cNvSpPr/>
+          <p:nvPr/>
+        </p:nvSpPr>
+        <p:spPr>
+          <a:xfrm>
+            <a:off x="713232" y="1298448"/>
+            <a:ext cx="420624" cy="420624"/>
+          </a:xfrm>
+          <a:prstGeom prst="roundRect">
+            <a:avLst/>
+          </a:prstGeom>
+          <a:solidFill>
+            <a:srgbClr val="FFFFFF"/>
+          </a:solidFill>
+          <a:ln>
+            <a:solidFill>
+              <a:srgbClr val="CC4F3E"/>
+            </a:solidFill>
+          </a:ln>
+        </p:spPr>
+        <p:style>
+          <a:lnRef idx="1">
+            <a:schemeClr val="accent1"/>
+          </a:lnRef>
+          <a:fillRef idx="3">
+            <a:schemeClr val="accent1"/>
+          </a:fillRef>
+          <a:effectRef idx="2">
+            <a:schemeClr val="accent1"/>
+          </a:effectRef>
+          <a:fontRef idx="minor">
+            <a:schemeClr val="lt1"/>
+          </a:fontRef>
+        </p:style>
+        <p:txBody>
+          <a:bodyPr rtlCol="0" anchor="ctr"/>
+          <a:lstStyle/>
+          <a:p>
+            <a:pPr algn="ctr"/>
           </a:p>
         </p:txBody>
       </p:sp>
@@ -3374,8 +3753,8 @@
         </p:nvSpPr>
         <p:spPr>
           <a:xfrm>
-            <a:off x="685800" y="6272784"/>
-            <a:ext cx="10607040" cy="201168"/>
+            <a:off x="1389888" y="1280160"/>
+            <a:ext cx="9829800" cy="1624584"/>
           </a:xfrm>
           <a:prstGeom prst="rect">
             <a:avLst/>
@@ -3383,7 +3762,309 @@
           <a:noFill/>
         </p:spPr>
         <p:txBody>
-          <a:bodyPr wrap="square" lIns="36576" rIns="36576" tIns="27432" bIns="27432">
+          <a:bodyPr wrap="square" lIns="45720" rIns="45720" tIns="36576" bIns="36576" anchor="t">
+            <a:spAutoFit/>
+          </a:bodyPr>
+          <a:lstStyle/>
+          <a:p>
+            <a:pPr algn="l">
+              <a:defRPr sz="1900" b="0">
+                <a:solidFill>
+                  <a:srgbClr val="1C2330"/>
+                </a:solidFill>
+                <a:latin typeface="Aptos"/>
+              </a:defRPr>
+            </a:pPr>
+            <a:r>
+              <a:t>existe un backlog inicial de MiniJarvis;</a:t>
+            </a:r>
+          </a:p>
+        </p:txBody>
+      </p:sp>
+      <p:sp>
+        <p:nvSpPr>
+          <p:cNvPr id="10" name="Rounded Rectangle 9"/>
+          <p:cNvSpPr/>
+          <p:nvPr/>
+        </p:nvSpPr>
+        <p:spPr>
+          <a:xfrm>
+            <a:off x="713232" y="2959607"/>
+            <a:ext cx="420624" cy="420624"/>
+          </a:xfrm>
+          <a:prstGeom prst="roundRect">
+            <a:avLst/>
+          </a:prstGeom>
+          <a:solidFill>
+            <a:srgbClr val="FFFFFF"/>
+          </a:solidFill>
+          <a:ln>
+            <a:solidFill>
+              <a:srgbClr val="CC4F3E"/>
+            </a:solidFill>
+          </a:ln>
+        </p:spPr>
+        <p:style>
+          <a:lnRef idx="1">
+            <a:schemeClr val="accent1"/>
+          </a:lnRef>
+          <a:fillRef idx="3">
+            <a:schemeClr val="accent1"/>
+          </a:fillRef>
+          <a:effectRef idx="2">
+            <a:schemeClr val="accent1"/>
+          </a:effectRef>
+          <a:fontRef idx="minor">
+            <a:schemeClr val="lt1"/>
+          </a:fontRef>
+        </p:style>
+        <p:txBody>
+          <a:bodyPr rtlCol="0" anchor="ctr"/>
+          <a:lstStyle/>
+          <a:p>
+            <a:pPr algn="ctr"/>
+          </a:p>
+        </p:txBody>
+      </p:sp>
+      <p:sp>
+        <p:nvSpPr>
+          <p:cNvPr id="11" name="TextBox 10"/>
+          <p:cNvSpPr txBox="1"/>
+          <p:nvPr/>
+        </p:nvSpPr>
+        <p:spPr>
+          <a:xfrm>
+            <a:off x="1389888" y="2941319"/>
+            <a:ext cx="9829800" cy="1624584"/>
+          </a:xfrm>
+          <a:prstGeom prst="rect">
+            <a:avLst/>
+          </a:prstGeom>
+          <a:noFill/>
+        </p:spPr>
+        <p:txBody>
+          <a:bodyPr wrap="square" lIns="45720" rIns="45720" tIns="36576" bIns="36576" anchor="t">
+            <a:spAutoFit/>
+          </a:bodyPr>
+          <a:lstStyle/>
+          <a:p>
+            <a:pPr algn="l">
+              <a:defRPr sz="1900" b="0">
+                <a:solidFill>
+                  <a:srgbClr val="1C2330"/>
+                </a:solidFill>
+                <a:latin typeface="Aptos"/>
+              </a:defRPr>
+            </a:pPr>
+            <a:r>
+              <a:t>cada tarea tiene un criterio comprobable;</a:t>
+            </a:r>
+          </a:p>
+        </p:txBody>
+      </p:sp>
+      <p:sp>
+        <p:nvSpPr>
+          <p:cNvPr id="12" name="Rounded Rectangle 11"/>
+          <p:cNvSpPr/>
+          <p:nvPr/>
+        </p:nvSpPr>
+        <p:spPr>
+          <a:xfrm>
+            <a:off x="713232" y="4620767"/>
+            <a:ext cx="420624" cy="420624"/>
+          </a:xfrm>
+          <a:prstGeom prst="roundRect">
+            <a:avLst/>
+          </a:prstGeom>
+          <a:solidFill>
+            <a:srgbClr val="FFFFFF"/>
+          </a:solidFill>
+          <a:ln>
+            <a:solidFill>
+              <a:srgbClr val="CC4F3E"/>
+            </a:solidFill>
+          </a:ln>
+        </p:spPr>
+        <p:style>
+          <a:lnRef idx="1">
+            <a:schemeClr val="accent1"/>
+          </a:lnRef>
+          <a:fillRef idx="3">
+            <a:schemeClr val="accent1"/>
+          </a:fillRef>
+          <a:effectRef idx="2">
+            <a:schemeClr val="accent1"/>
+          </a:effectRef>
+          <a:fontRef idx="minor">
+            <a:schemeClr val="lt1"/>
+          </a:fontRef>
+        </p:style>
+        <p:txBody>
+          <a:bodyPr rtlCol="0" anchor="ctr"/>
+          <a:lstStyle/>
+          <a:p>
+            <a:pPr algn="ctr"/>
+          </a:p>
+        </p:txBody>
+      </p:sp>
+      <p:sp>
+        <p:nvSpPr>
+          <p:cNvPr id="13" name="TextBox 12"/>
+          <p:cNvSpPr txBox="1"/>
+          <p:nvPr/>
+        </p:nvSpPr>
+        <p:spPr>
+          <a:xfrm>
+            <a:off x="1389888" y="4602480"/>
+            <a:ext cx="9829800" cy="1624584"/>
+          </a:xfrm>
+          <a:prstGeom prst="rect">
+            <a:avLst/>
+          </a:prstGeom>
+          <a:noFill/>
+        </p:spPr>
+        <p:txBody>
+          <a:bodyPr wrap="square" lIns="45720" rIns="45720" tIns="36576" bIns="36576" anchor="t">
+            <a:spAutoFit/>
+          </a:bodyPr>
+          <a:lstStyle/>
+          <a:p>
+            <a:pPr algn="l">
+              <a:defRPr sz="1900" b="0">
+                <a:solidFill>
+                  <a:srgbClr val="1C2330"/>
+                </a:solidFill>
+                <a:latin typeface="Aptos"/>
+              </a:defRPr>
+            </a:pPr>
+            <a:r>
+              <a:t>cada estudiante identifica una aportación y un aprendizaje siguiente.</a:t>
+            </a:r>
+          </a:p>
+        </p:txBody>
+      </p:sp>
+    </p:spTree>
+  </p:cSld>
+  <p:clrMapOvr>
+    <a:masterClrMapping/>
+  </p:clrMapOvr>
+</p:sld>
+</file>
+
+<file path=ppt/slides/slide11.xml><?xml version="1.0" encoding="utf-8"?>
+<p:sld xmlns:a="http://schemas.openxmlformats.org/drawingml/2006/main" xmlns:p="http://schemas.openxmlformats.org/presentationml/2006/main" xmlns:r="http://schemas.openxmlformats.org/officeDocument/2006/relationships">
+  <p:cSld>
+    <p:spTree>
+      <p:nvGrpSpPr>
+        <p:cNvPr id="1" name=""/>
+        <p:cNvGrpSpPr/>
+        <p:nvPr/>
+      </p:nvGrpSpPr>
+      <p:grpSpPr/>
+      <p:sp>
+        <p:nvSpPr>
+          <p:cNvPr id="2" name="Rectangle 1"/>
+          <p:cNvSpPr/>
+          <p:nvPr/>
+        </p:nvSpPr>
+        <p:spPr>
+          <a:xfrm>
+            <a:off x="0" y="0"/>
+            <a:ext cx="12191695" cy="6858000"/>
+          </a:xfrm>
+          <a:prstGeom prst="rect">
+            <a:avLst/>
+          </a:prstGeom>
+          <a:solidFill>
+            <a:srgbClr val="F9F7F2"/>
+          </a:solidFill>
+          <a:ln>
+            <a:noFill/>
+          </a:ln>
+        </p:spPr>
+        <p:style>
+          <a:lnRef idx="1">
+            <a:schemeClr val="accent1"/>
+          </a:lnRef>
+          <a:fillRef idx="3">
+            <a:schemeClr val="accent1"/>
+          </a:fillRef>
+          <a:effectRef idx="2">
+            <a:schemeClr val="accent1"/>
+          </a:effectRef>
+          <a:fontRef idx="minor">
+            <a:schemeClr val="lt1"/>
+          </a:fontRef>
+        </p:style>
+        <p:txBody>
+          <a:bodyPr rtlCol="0" anchor="ctr"/>
+          <a:lstStyle/>
+          <a:p>
+            <a:pPr algn="ctr"/>
+          </a:p>
+        </p:txBody>
+      </p:sp>
+      <p:sp>
+        <p:nvSpPr>
+          <p:cNvPr id="3" name="Rectangle 2"/>
+          <p:cNvSpPr/>
+          <p:nvPr/>
+        </p:nvSpPr>
+        <p:spPr>
+          <a:xfrm>
+            <a:off x="0" y="0"/>
+            <a:ext cx="164592" cy="6858000"/>
+          </a:xfrm>
+          <a:prstGeom prst="rect">
+            <a:avLst/>
+          </a:prstGeom>
+          <a:solidFill>
+            <a:srgbClr val="CC4F3E"/>
+          </a:solidFill>
+          <a:ln>
+            <a:noFill/>
+          </a:ln>
+        </p:spPr>
+        <p:style>
+          <a:lnRef idx="1">
+            <a:schemeClr val="accent1"/>
+          </a:lnRef>
+          <a:fillRef idx="3">
+            <a:schemeClr val="accent1"/>
+          </a:fillRef>
+          <a:effectRef idx="2">
+            <a:schemeClr val="accent1"/>
+          </a:effectRef>
+          <a:fontRef idx="minor">
+            <a:schemeClr val="lt1"/>
+          </a:fontRef>
+        </p:style>
+        <p:txBody>
+          <a:bodyPr rtlCol="0" anchor="ctr"/>
+          <a:lstStyle/>
+          <a:p>
+            <a:pPr algn="ctr"/>
+          </a:p>
+        </p:txBody>
+      </p:sp>
+      <p:sp>
+        <p:nvSpPr>
+          <p:cNvPr id="4" name="TextBox 3"/>
+          <p:cNvSpPr txBox="1"/>
+          <p:nvPr/>
+        </p:nvSpPr>
+        <p:spPr>
+          <a:xfrm>
+            <a:off x="502920" y="274320"/>
+            <a:ext cx="5486400" cy="256032"/>
+          </a:xfrm>
+          <a:prstGeom prst="rect">
+            <a:avLst/>
+          </a:prstGeom>
+          <a:noFill/>
+        </p:spPr>
+        <p:txBody>
+          <a:bodyPr wrap="square" lIns="45720" rIns="45720" tIns="36576" bIns="36576" anchor="t">
             <a:spAutoFit/>
           </a:bodyPr>
           <a:lstStyle/>
@@ -3391,13 +4072,281 @@
             <a:pPr algn="l">
               <a:defRPr sz="1000" b="1">
                 <a:solidFill>
-                  <a:srgbClr val="A0AAB9"/>
+                  <a:srgbClr val="CC4F3E"/>
                 </a:solidFill>
                 <a:latin typeface="Aptos"/>
               </a:defRPr>
             </a:pPr>
             <a:r>
-              <a:t>MINIJARVIS · PROGRAMACIÓN + ENTORNOS DE DESARROLLO</a:t>
+              <a:t>EXPLICAR Y DEFENDER</a:t>
+            </a:r>
+          </a:p>
+        </p:txBody>
+      </p:sp>
+      <p:sp>
+        <p:nvSpPr>
+          <p:cNvPr id="5" name="TextBox 4"/>
+          <p:cNvSpPr txBox="1"/>
+          <p:nvPr/>
+        </p:nvSpPr>
+        <p:spPr>
+          <a:xfrm>
+            <a:off x="502920" y="603504"/>
+            <a:ext cx="11064240" cy="530352"/>
+          </a:xfrm>
+          <a:prstGeom prst="rect">
+            <a:avLst/>
+          </a:prstGeom>
+          <a:noFill/>
+        </p:spPr>
+        <p:txBody>
+          <a:bodyPr wrap="square" lIns="45720" rIns="45720" tIns="36576" bIns="36576" anchor="t">
+            <a:spAutoFit/>
+          </a:bodyPr>
+          <a:lstStyle/>
+          <a:p>
+            <a:pPr algn="l">
+              <a:defRPr sz="2800" b="1">
+                <a:solidFill>
+                  <a:srgbClr val="1C2330"/>
+                </a:solidFill>
+                <a:latin typeface="Aptos"/>
+              </a:defRPr>
+            </a:pPr>
+            <a:r>
+              <a:t>Cierre y defensa</a:t>
+            </a:r>
+          </a:p>
+        </p:txBody>
+      </p:sp>
+      <p:sp>
+        <p:nvSpPr>
+          <p:cNvPr id="6" name="Rectangle 5"/>
+          <p:cNvSpPr/>
+          <p:nvPr/>
+        </p:nvSpPr>
+        <p:spPr>
+          <a:xfrm>
+            <a:off x="0" y="6601968"/>
+            <a:ext cx="12191695" cy="256032"/>
+          </a:xfrm>
+          <a:prstGeom prst="rect">
+            <a:avLst/>
+          </a:prstGeom>
+          <a:solidFill>
+            <a:srgbClr val="CC4F3E"/>
+          </a:solidFill>
+          <a:ln>
+            <a:noFill/>
+          </a:ln>
+        </p:spPr>
+        <p:style>
+          <a:lnRef idx="1">
+            <a:schemeClr val="accent1"/>
+          </a:lnRef>
+          <a:fillRef idx="3">
+            <a:schemeClr val="accent1"/>
+          </a:fillRef>
+          <a:effectRef idx="2">
+            <a:schemeClr val="accent1"/>
+          </a:effectRef>
+          <a:fontRef idx="minor">
+            <a:schemeClr val="lt1"/>
+          </a:fontRef>
+        </p:style>
+        <p:txBody>
+          <a:bodyPr rtlCol="0" anchor="ctr"/>
+          <a:lstStyle/>
+          <a:p>
+            <a:pPr algn="ctr"/>
+          </a:p>
+        </p:txBody>
+      </p:sp>
+      <p:sp>
+        <p:nvSpPr>
+          <p:cNvPr id="7" name="TextBox 6"/>
+          <p:cNvSpPr txBox="1"/>
+          <p:nvPr/>
+        </p:nvSpPr>
+        <p:spPr>
+          <a:xfrm>
+            <a:off x="411480" y="6629400"/>
+            <a:ext cx="11247120" cy="164592"/>
+          </a:xfrm>
+          <a:prstGeom prst="rect">
+            <a:avLst/>
+          </a:prstGeom>
+          <a:noFill/>
+        </p:spPr>
+        <p:txBody>
+          <a:bodyPr wrap="square" lIns="45720" rIns="45720" tIns="36576" bIns="36576" anchor="t">
+            <a:spAutoFit/>
+          </a:bodyPr>
+          <a:lstStyle/>
+          <a:p>
+            <a:pPr algn="l">
+              <a:defRPr sz="900" b="0">
+                <a:solidFill>
+                  <a:srgbClr val="FFFFFF"/>
+                </a:solidFill>
+                <a:latin typeface="Aptos"/>
+              </a:defRPr>
+            </a:pPr>
+            <a:r>
+              <a:t>MiniJarvis · 1.º DAW · Sesión 205 · H0 — Formación y prueba de equipos Scrum mediante la torre de papel</a:t>
+            </a:r>
+          </a:p>
+        </p:txBody>
+      </p:sp>
+      <p:sp>
+        <p:nvSpPr>
+          <p:cNvPr id="8" name="Rounded Rectangle 7"/>
+          <p:cNvSpPr/>
+          <p:nvPr/>
+        </p:nvSpPr>
+        <p:spPr>
+          <a:xfrm>
+            <a:off x="621792" y="1298448"/>
+            <a:ext cx="10927080" cy="1828800"/>
+          </a:xfrm>
+          <a:prstGeom prst="roundRect">
+            <a:avLst/>
+          </a:prstGeom>
+          <a:solidFill>
+            <a:srgbClr val="CC4F3E"/>
+          </a:solidFill>
+          <a:ln>
+            <a:solidFill>
+              <a:srgbClr val="CC4F3E"/>
+            </a:solidFill>
+          </a:ln>
+        </p:spPr>
+        <p:style>
+          <a:lnRef idx="1">
+            <a:schemeClr val="accent1"/>
+          </a:lnRef>
+          <a:fillRef idx="3">
+            <a:schemeClr val="accent1"/>
+          </a:fillRef>
+          <a:effectRef idx="2">
+            <a:schemeClr val="accent1"/>
+          </a:effectRef>
+          <a:fontRef idx="minor">
+            <a:schemeClr val="lt1"/>
+          </a:fontRef>
+        </p:style>
+        <p:txBody>
+          <a:bodyPr rtlCol="0" anchor="ctr"/>
+          <a:lstStyle/>
+          <a:p>
+            <a:pPr algn="ctr"/>
+          </a:p>
+        </p:txBody>
+      </p:sp>
+      <p:sp>
+        <p:nvSpPr>
+          <p:cNvPr id="9" name="TextBox 8"/>
+          <p:cNvSpPr txBox="1"/>
+          <p:nvPr/>
+        </p:nvSpPr>
+        <p:spPr>
+          <a:xfrm>
+            <a:off x="932688" y="1591056"/>
+            <a:ext cx="10241280" cy="256032"/>
+          </a:xfrm>
+          <a:prstGeom prst="rect">
+            <a:avLst/>
+          </a:prstGeom>
+          <a:noFill/>
+        </p:spPr>
+        <p:txBody>
+          <a:bodyPr wrap="square" lIns="45720" rIns="45720" tIns="36576" bIns="36576" anchor="t">
+            <a:spAutoFit/>
+          </a:bodyPr>
+          <a:lstStyle/>
+          <a:p>
+            <a:pPr algn="l">
+              <a:defRPr sz="1300" b="1">
+                <a:solidFill>
+                  <a:srgbClr val="FFFFFF"/>
+                </a:solidFill>
+                <a:latin typeface="Aptos"/>
+              </a:defRPr>
+            </a:pPr>
+            <a:r>
+              <a:t>PREGUNTA O DECISIÓN DE SALIDA</a:t>
+            </a:r>
+          </a:p>
+        </p:txBody>
+      </p:sp>
+      <p:sp>
+        <p:nvSpPr>
+          <p:cNvPr id="10" name="TextBox 9"/>
+          <p:cNvSpPr txBox="1"/>
+          <p:nvPr/>
+        </p:nvSpPr>
+        <p:spPr>
+          <a:xfrm>
+            <a:off x="932688" y="1975104"/>
+            <a:ext cx="10058400" cy="822960"/>
+          </a:xfrm>
+          <a:prstGeom prst="rect">
+            <a:avLst/>
+          </a:prstGeom>
+          <a:noFill/>
+        </p:spPr>
+        <p:txBody>
+          <a:bodyPr wrap="square" lIns="45720" rIns="45720" tIns="36576" bIns="36576" anchor="t">
+            <a:spAutoFit/>
+          </a:bodyPr>
+          <a:lstStyle/>
+          <a:p>
+            <a:pPr algn="l">
+              <a:defRPr sz="2500" b="1">
+                <a:solidFill>
+                  <a:srgbClr val="FFFFFF"/>
+                </a:solidFill>
+                <a:latin typeface="Aptos"/>
+              </a:defRPr>
+            </a:pPr>
+            <a:r>
+              <a:t>Conducta de la torre que quiero mantener:</a:t>
+            </a:r>
+          </a:p>
+        </p:txBody>
+      </p:sp>
+      <p:sp>
+        <p:nvSpPr>
+          <p:cNvPr id="11" name="TextBox 10"/>
+          <p:cNvSpPr txBox="1"/>
+          <p:nvPr/>
+        </p:nvSpPr>
+        <p:spPr>
+          <a:xfrm>
+            <a:off x="749808" y="3886200"/>
+            <a:ext cx="10607040" cy="1280160"/>
+          </a:xfrm>
+          <a:prstGeom prst="rect">
+            <a:avLst/>
+          </a:prstGeom>
+          <a:noFill/>
+        </p:spPr>
+        <p:txBody>
+          <a:bodyPr wrap="square" lIns="45720" rIns="45720" tIns="36576" bIns="36576" anchor="ctr">
+            <a:spAutoFit/>
+          </a:bodyPr>
+          <a:lstStyle/>
+          <a:p>
+            <a:pPr algn="ctr">
+              <a:defRPr sz="2300" b="1">
+                <a:solidFill>
+                  <a:srgbClr val="247E5C"/>
+                </a:solidFill>
+                <a:latin typeface="Aptos"/>
+              </a:defRPr>
+            </a:pPr>
+            <a:r>
+              <a:t>La sesión termina cuando la evidencia existe, está comprobada y puede defenderse.</a:t>
             </a:r>
           </a:p>
         </p:txBody>
@@ -3514,8 +4463,8 @@
         </p:nvSpPr>
         <p:spPr>
           <a:xfrm>
-            <a:off x="502920" y="310896"/>
-            <a:ext cx="5029200" cy="256032"/>
+            <a:off x="502920" y="274320"/>
+            <a:ext cx="5486400" cy="256032"/>
           </a:xfrm>
           <a:prstGeom prst="rect">
             <a:avLst/>
@@ -3523,7 +4472,7 @@
           <a:noFill/>
         </p:spPr>
         <p:txBody>
-          <a:bodyPr wrap="square" lIns="36576" rIns="36576" tIns="27432" bIns="27432">
+          <a:bodyPr wrap="square" lIns="45720" rIns="45720" tIns="36576" bIns="36576" anchor="t">
             <a:spAutoFit/>
           </a:bodyPr>
           <a:lstStyle/>
@@ -3550,7 +4499,7 @@
         </p:nvSpPr>
         <p:spPr>
           <a:xfrm>
-            <a:off x="502920" y="621792"/>
+            <a:off x="502920" y="603504"/>
             <a:ext cx="11064240" cy="530352"/>
           </a:xfrm>
           <a:prstGeom prst="rect">
@@ -3559,7 +4508,7 @@
           <a:noFill/>
         </p:spPr>
         <p:txBody>
-          <a:bodyPr wrap="square" lIns="36576" rIns="36576" tIns="27432" bIns="27432">
+          <a:bodyPr wrap="square" lIns="45720" rIns="45720" tIns="36576" bIns="36576" anchor="t">
             <a:spAutoFit/>
           </a:bodyPr>
           <a:lstStyle/>
@@ -3573,7 +4522,7 @@
               </a:defRPr>
             </a:pPr>
             <a:r>
-              <a:t>Qué vamos a conseguir</a:t>
+              <a:t>Qué debe conseguirse</a:t>
             </a:r>
           </a:p>
         </p:txBody>
@@ -3638,7 +4587,7 @@
           <a:noFill/>
         </p:spPr>
         <p:txBody>
-          <a:bodyPr wrap="square" lIns="36576" rIns="36576" tIns="27432" bIns="27432">
+          <a:bodyPr wrap="square" lIns="45720" rIns="45720" tIns="36576" bIns="36576" anchor="t">
             <a:spAutoFit/>
           </a:bodyPr>
           <a:lstStyle/>
@@ -3652,7 +4601,7 @@
               </a:defRPr>
             </a:pPr>
             <a:r>
-              <a:t>MiniJarvis · 1.º DAW · Sesión 205 · H0</a:t>
+              <a:t>MiniJarvis · 1.º DAW · Sesión 205 · H0 — Formación y prueba de equipos Scrum mediante la torre de papel</a:t>
             </a:r>
           </a:p>
         </p:txBody>
@@ -3665,8 +4614,8 @@
         </p:nvSpPr>
         <p:spPr>
           <a:xfrm>
-            <a:off x="594360" y="1417320"/>
-            <a:ext cx="5349240" cy="4343400"/>
+            <a:off x="594360" y="1389888"/>
+            <a:ext cx="5184648" cy="4297680"/>
           </a:xfrm>
           <a:prstGeom prst="roundRect">
             <a:avLst/>
@@ -3676,7 +4625,7 @@
           </a:solidFill>
           <a:ln>
             <a:solidFill>
-              <a:srgbClr val="EBEEF2"/>
+              <a:srgbClr val="E5E9EF"/>
             </a:solidFill>
           </a:ln>
         </p:spPr>
@@ -3711,7 +4660,7 @@
         <p:spPr>
           <a:xfrm>
             <a:off x="822960" y="1618488"/>
-            <a:ext cx="438912" cy="411480"/>
+            <a:ext cx="4727448" cy="3840480"/>
           </a:xfrm>
           <a:prstGeom prst="rect">
             <a:avLst/>
@@ -3719,107 +4668,35 @@
           <a:noFill/>
         </p:spPr>
         <p:txBody>
-          <a:bodyPr wrap="square" lIns="36576" rIns="36576" tIns="27432" bIns="27432">
+          <a:bodyPr wrap="square" lIns="45720" rIns="45720" tIns="36576" bIns="36576" anchor="t">
             <a:spAutoFit/>
           </a:bodyPr>
           <a:lstStyle/>
           <a:p>
-            <a:pPr algn="ctr">
-              <a:defRPr sz="2400" b="1">
-                <a:solidFill>
-                  <a:srgbClr val="CC4F3E"/>
+            <a:pPr algn="l">
+              <a:defRPr sz="2100" b="1">
+                <a:solidFill>
+                  <a:srgbClr val="1C2330"/>
                 </a:solidFill>
                 <a:latin typeface="Aptos"/>
               </a:defRPr>
             </a:pPr>
             <a:r>
-              <a:t>01</a:t>
-            </a:r>
-          </a:p>
-        </p:txBody>
-      </p:sp>
-      <p:sp>
-        <p:nvSpPr>
-          <p:cNvPr id="10" name="TextBox 9"/>
-          <p:cNvSpPr txBox="1"/>
-          <p:nvPr/>
-        </p:nvSpPr>
-        <p:spPr>
-          <a:xfrm>
-            <a:off x="1344168" y="1645920"/>
-            <a:ext cx="4389120" cy="365760"/>
-          </a:xfrm>
-          <a:prstGeom prst="rect">
-            <a:avLst/>
-          </a:prstGeom>
-          <a:noFill/>
-        </p:spPr>
-        <p:txBody>
-          <a:bodyPr wrap="square" lIns="36576" rIns="36576" tIns="27432" bIns="27432">
-            <a:spAutoFit/>
-          </a:bodyPr>
-          <a:lstStyle/>
-          <a:p>
-            <a:pPr algn="l">
-              <a:defRPr sz="1700" b="1">
-                <a:solidFill>
-                  <a:srgbClr val="CC4F3E"/>
-                </a:solidFill>
-                <a:latin typeface="Aptos"/>
-              </a:defRPr>
-            </a:pPr>
-            <a:r>
-              <a:t>Hoy vas a…</a:t>
-            </a:r>
-          </a:p>
-        </p:txBody>
-      </p:sp>
-      <p:sp>
-        <p:nvSpPr>
-          <p:cNvPr id="11" name="TextBox 10"/>
-          <p:cNvSpPr txBox="1"/>
-          <p:nvPr/>
-        </p:nvSpPr>
-        <p:spPr>
-          <a:xfrm>
-            <a:off x="868680" y="2286000"/>
-            <a:ext cx="4800600" cy="3246120"/>
-          </a:xfrm>
-          <a:prstGeom prst="rect">
-            <a:avLst/>
-          </a:prstGeom>
-          <a:noFill/>
-        </p:spPr>
-        <p:txBody>
-          <a:bodyPr wrap="square" lIns="36576" rIns="36576" tIns="27432" bIns="27432">
-            <a:spAutoFit/>
-          </a:bodyPr>
-          <a:lstStyle/>
-          <a:p>
-            <a:pPr algn="l">
-              <a:defRPr sz="2200" b="0">
-                <a:solidFill>
-                  <a:srgbClr val="1C2330"/>
-                </a:solidFill>
-                <a:latin typeface="Aptos"/>
-              </a:defRPr>
-            </a:pPr>
-            <a:r>
-              <a:t>Comprender y aplicar el objetivo de la sesión.</a:t>
-            </a:r>
-          </a:p>
-        </p:txBody>
-      </p:sp>
-      <p:sp>
-        <p:nvSpPr>
-          <p:cNvPr id="12" name="Rounded Rectangle 11"/>
+              <a:t>Objetivo: Utilizar las evidencias de la torre para revisar el equipo y convertir lo aprendido en acuerdos de trabajo para MiniJarvis.</a:t>
+            </a:r>
+          </a:p>
+        </p:txBody>
+      </p:sp>
+      <p:sp>
+        <p:nvSpPr>
+          <p:cNvPr id="10" name="Rounded Rectangle 9"/>
           <p:cNvSpPr/>
           <p:nvPr/>
         </p:nvSpPr>
         <p:spPr>
           <a:xfrm>
-            <a:off x="6236208" y="1417320"/>
-            <a:ext cx="5349240" cy="4343400"/>
+            <a:off x="6035040" y="1389888"/>
+            <a:ext cx="5184648" cy="4297680"/>
           </a:xfrm>
           <a:prstGeom prst="roundRect">
             <a:avLst/>
@@ -3829,7 +4706,7 @@
           </a:solidFill>
           <a:ln>
             <a:solidFill>
-              <a:srgbClr val="EBEEF2"/>
+              <a:srgbClr val="E5E9EF"/>
             </a:solidFill>
           </a:ln>
         </p:spPr>
@@ -3857,14 +4734,14 @@
       </p:sp>
       <p:sp>
         <p:nvSpPr>
-          <p:cNvPr id="13" name="TextBox 12"/>
+          <p:cNvPr id="11" name="TextBox 10"/>
           <p:cNvSpPr txBox="1"/>
           <p:nvPr/>
         </p:nvSpPr>
         <p:spPr>
           <a:xfrm>
-            <a:off x="6464808" y="1618488"/>
-            <a:ext cx="438912" cy="411480"/>
+            <a:off x="6263640" y="1618488"/>
+            <a:ext cx="4727448" cy="3840480"/>
           </a:xfrm>
           <a:prstGeom prst="rect">
             <a:avLst/>
@@ -3872,93 +4749,21 @@
           <a:noFill/>
         </p:spPr>
         <p:txBody>
-          <a:bodyPr wrap="square" lIns="36576" rIns="36576" tIns="27432" bIns="27432">
+          <a:bodyPr wrap="square" lIns="45720" rIns="45720" tIns="36576" bIns="36576" anchor="t">
             <a:spAutoFit/>
           </a:bodyPr>
           <a:lstStyle/>
           <a:p>
-            <a:pPr algn="ctr">
-              <a:defRPr sz="2400" b="1">
-                <a:solidFill>
-                  <a:srgbClr val="CC4F3E"/>
+            <a:pPr algn="l">
+              <a:defRPr sz="2100" b="1">
+                <a:solidFill>
+                  <a:srgbClr val="1C2330"/>
                 </a:solidFill>
                 <a:latin typeface="Aptos"/>
               </a:defRPr>
             </a:pPr>
             <a:r>
-              <a:t>02</a:t>
-            </a:r>
-          </a:p>
-        </p:txBody>
-      </p:sp>
-      <p:sp>
-        <p:nvSpPr>
-          <p:cNvPr id="14" name="TextBox 13"/>
-          <p:cNvSpPr txBox="1"/>
-          <p:nvPr/>
-        </p:nvSpPr>
-        <p:spPr>
-          <a:xfrm>
-            <a:off x="6986016" y="1645920"/>
-            <a:ext cx="4389120" cy="365760"/>
-          </a:xfrm>
-          <a:prstGeom prst="rect">
-            <a:avLst/>
-          </a:prstGeom>
-          <a:noFill/>
-        </p:spPr>
-        <p:txBody>
-          <a:bodyPr wrap="square" lIns="36576" rIns="36576" tIns="27432" bIns="27432">
-            <a:spAutoFit/>
-          </a:bodyPr>
-          <a:lstStyle/>
-          <a:p>
-            <a:pPr algn="l">
-              <a:defRPr sz="1700" b="1">
-                <a:solidFill>
-                  <a:srgbClr val="CC4F3E"/>
-                </a:solidFill>
-                <a:latin typeface="Aptos"/>
-              </a:defRPr>
-            </a:pPr>
-            <a:r>
-              <a:t>Debe quedar…</a:t>
-            </a:r>
-          </a:p>
-        </p:txBody>
-      </p:sp>
-      <p:sp>
-        <p:nvSpPr>
-          <p:cNvPr id="15" name="TextBox 14"/>
-          <p:cNvSpPr txBox="1"/>
-          <p:nvPr/>
-        </p:nvSpPr>
-        <p:spPr>
-          <a:xfrm>
-            <a:off x="6510528" y="2286000"/>
-            <a:ext cx="4800600" cy="3246120"/>
-          </a:xfrm>
-          <a:prstGeom prst="rect">
-            <a:avLst/>
-          </a:prstGeom>
-          <a:noFill/>
-        </p:spPr>
-        <p:txBody>
-          <a:bodyPr wrap="square" lIns="36576" rIns="36576" tIns="27432" bIns="27432">
-            <a:spAutoFit/>
-          </a:bodyPr>
-          <a:lstStyle/>
-          <a:p>
-            <a:pPr algn="l">
-              <a:defRPr sz="2200" b="0">
-                <a:solidFill>
-                  <a:srgbClr val="1C2330"/>
-                </a:solidFill>
-                <a:latin typeface="Aptos"/>
-              </a:defRPr>
-            </a:pPr>
-            <a:r>
-              <a:t>Una evidencia comprobable y defendible.</a:t>
+              <a:t>Evidencia: Decisión razonada, contrato observable, funciones de H1, rotación y primer backlog verificable.</a:t>
             </a:r>
           </a:p>
         </p:txBody>
@@ -4075,8 +4880,8 @@
         </p:nvSpPr>
         <p:spPr>
           <a:xfrm>
-            <a:off x="502920" y="310896"/>
-            <a:ext cx="5029200" cy="256032"/>
+            <a:off x="502920" y="274320"/>
+            <a:ext cx="5486400" cy="256032"/>
           </a:xfrm>
           <a:prstGeom prst="rect">
             <a:avLst/>
@@ -4084,7 +4889,7 @@
           <a:noFill/>
         </p:spPr>
         <p:txBody>
-          <a:bodyPr wrap="square" lIns="36576" rIns="36576" tIns="27432" bIns="27432">
+          <a:bodyPr wrap="square" lIns="45720" rIns="45720" tIns="36576" bIns="36576" anchor="t">
             <a:spAutoFit/>
           </a:bodyPr>
           <a:lstStyle/>
@@ -4098,7 +4903,7 @@
               </a:defRPr>
             </a:pPr>
             <a:r>
-              <a:t>PASO A PASO</a:t>
+              <a:t>RITMO DE LA SESIÓN</a:t>
             </a:r>
           </a:p>
         </p:txBody>
@@ -4111,7 +4916,7 @@
         </p:nvSpPr>
         <p:spPr>
           <a:xfrm>
-            <a:off x="502920" y="621792"/>
+            <a:off x="502920" y="603504"/>
             <a:ext cx="11064240" cy="530352"/>
           </a:xfrm>
           <a:prstGeom prst="rect">
@@ -4120,7 +4925,7 @@
           <a:noFill/>
         </p:spPr>
         <p:txBody>
-          <a:bodyPr wrap="square" lIns="36576" rIns="36576" tIns="27432" bIns="27432">
+          <a:bodyPr wrap="square" lIns="45720" rIns="45720" tIns="36576" bIns="36576" anchor="t">
             <a:spAutoFit/>
           </a:bodyPr>
           <a:lstStyle/>
@@ -4134,7 +4939,7 @@
               </a:defRPr>
             </a:pPr>
             <a:r>
-              <a:t>Ruta de trabajo</a:t>
+              <a:t>Secuencia de aula · tramo 1</a:t>
             </a:r>
           </a:p>
         </p:txBody>
@@ -4199,7 +5004,7 @@
           <a:noFill/>
         </p:spPr>
         <p:txBody>
-          <a:bodyPr wrap="square" lIns="36576" rIns="36576" tIns="27432" bIns="27432">
+          <a:bodyPr wrap="square" lIns="45720" rIns="45720" tIns="36576" bIns="36576" anchor="t">
             <a:spAutoFit/>
           </a:bodyPr>
           <a:lstStyle/>
@@ -4213,7 +5018,7 @@
               </a:defRPr>
             </a:pPr>
             <a:r>
-              <a:t>MiniJarvis · 1.º DAW · Sesión 205 · H0</a:t>
+              <a:t>MiniJarvis · 1.º DAW · Sesión 205 · H0 — Formación y prueba de equipos Scrum mediante la torre de papel</a:t>
             </a:r>
           </a:p>
         </p:txBody>
@@ -4226,8 +5031,8 @@
         </p:nvSpPr>
         <p:spPr>
           <a:xfrm>
-            <a:off x="685800" y="1325880"/>
-            <a:ext cx="502920" cy="502920"/>
+            <a:off x="658368" y="1280160"/>
+            <a:ext cx="475488" cy="475488"/>
           </a:xfrm>
           <a:prstGeom prst="ellipse">
             <a:avLst/>
@@ -4269,8 +5074,8 @@
         </p:nvSpPr>
         <p:spPr>
           <a:xfrm>
-            <a:off x="685800" y="1435607"/>
-            <a:ext cx="502920" cy="201168"/>
+            <a:off x="658368" y="1380744"/>
+            <a:ext cx="475488" cy="201168"/>
           </a:xfrm>
           <a:prstGeom prst="rect">
             <a:avLst/>
@@ -4278,13 +5083,13 @@
           <a:noFill/>
         </p:spPr>
         <p:txBody>
-          <a:bodyPr wrap="square" lIns="36576" rIns="36576" tIns="27432" bIns="27432">
+          <a:bodyPr wrap="square" lIns="45720" rIns="45720" tIns="36576" bIns="36576" anchor="t">
             <a:spAutoFit/>
           </a:bodyPr>
           <a:lstStyle/>
           <a:p>
             <a:pPr algn="ctr">
-              <a:defRPr sz="1400" b="1">
+              <a:defRPr sz="1300" b="1">
                 <a:solidFill>
                   <a:srgbClr val="FFFFFF"/>
                 </a:solidFill>
@@ -4305,8 +5110,8 @@
         </p:nvSpPr>
         <p:spPr>
           <a:xfrm>
-            <a:off x="1417320" y="1344168"/>
-            <a:ext cx="9875520" cy="548640"/>
+            <a:off x="1389888" y="1261872"/>
+            <a:ext cx="10058400" cy="772668"/>
           </a:xfrm>
           <a:prstGeom prst="rect">
             <a:avLst/>
@@ -4314,13 +5119,13 @@
           <a:noFill/>
         </p:spPr>
         <p:txBody>
-          <a:bodyPr wrap="square" lIns="36576" rIns="36576" tIns="27432" bIns="27432">
+          <a:bodyPr wrap="square" lIns="45720" rIns="45720" tIns="36576" bIns="36576" anchor="t">
             <a:spAutoFit/>
           </a:bodyPr>
           <a:lstStyle/>
           <a:p>
             <a:pPr algn="l">
-              <a:defRPr sz="2000" b="0">
+              <a:defRPr sz="1400" b="0">
                 <a:solidFill>
                   <a:srgbClr val="1C2330"/>
                 </a:solidFill>
@@ -4328,7 +5133,7 @@
               </a:defRPr>
             </a:pPr>
             <a:r>
-              <a:t>Comprender y aplicar el objetivo de la sesión.</a:t>
+              <a:t>0–5 min — Recuperar evidencias: Entrega o pide abrir las evidencias de S202–S204.</a:t>
             </a:r>
           </a:p>
         </p:txBody>
@@ -4341,8 +5146,8 @@
         </p:nvSpPr>
         <p:spPr>
           <a:xfrm>
-            <a:off x="685800" y="2258568"/>
-            <a:ext cx="502920" cy="502920"/>
+            <a:off x="658368" y="2125979"/>
+            <a:ext cx="475488" cy="475488"/>
           </a:xfrm>
           <a:prstGeom prst="ellipse">
             <a:avLst/>
@@ -4384,8 +5189,8 @@
         </p:nvSpPr>
         <p:spPr>
           <a:xfrm>
-            <a:off x="685800" y="2368296"/>
-            <a:ext cx="502920" cy="201168"/>
+            <a:off x="658368" y="2226563"/>
+            <a:ext cx="475488" cy="201168"/>
           </a:xfrm>
           <a:prstGeom prst="rect">
             <a:avLst/>
@@ -4393,13 +5198,13 @@
           <a:noFill/>
         </p:spPr>
         <p:txBody>
-          <a:bodyPr wrap="square" lIns="36576" rIns="36576" tIns="27432" bIns="27432">
+          <a:bodyPr wrap="square" lIns="45720" rIns="45720" tIns="36576" bIns="36576" anchor="t">
             <a:spAutoFit/>
           </a:bodyPr>
           <a:lstStyle/>
           <a:p>
             <a:pPr algn="ctr">
-              <a:defRPr sz="1400" b="1">
+              <a:defRPr sz="1300" b="1">
                 <a:solidFill>
                   <a:srgbClr val="FFFFFF"/>
                 </a:solidFill>
@@ -4420,8 +5225,8 @@
         </p:nvSpPr>
         <p:spPr>
           <a:xfrm>
-            <a:off x="1417320" y="2276856"/>
-            <a:ext cx="9875520" cy="548640"/>
+            <a:off x="1389888" y="2107691"/>
+            <a:ext cx="10058400" cy="772668"/>
           </a:xfrm>
           <a:prstGeom prst="rect">
             <a:avLst/>
@@ -4429,13 +5234,13 @@
           <a:noFill/>
         </p:spPr>
         <p:txBody>
-          <a:bodyPr wrap="square" lIns="36576" rIns="36576" tIns="27432" bIns="27432">
+          <a:bodyPr wrap="square" lIns="45720" rIns="45720" tIns="36576" bIns="36576" anchor="t">
             <a:spAutoFit/>
           </a:bodyPr>
           <a:lstStyle/>
           <a:p>
             <a:pPr algn="l">
-              <a:defRPr sz="2000" b="0">
+              <a:defRPr sz="1400" b="0">
                 <a:solidFill>
                   <a:srgbClr val="1C2330"/>
                 </a:solidFill>
@@ -4443,7 +5248,7 @@
               </a:defRPr>
             </a:pPr>
             <a:r>
-              <a:t>Realiza una prueba observable.</a:t>
+              <a:t>5–13 min — Comparar HADA y conducta: Cada persona completa primero en silencio: Una preferencia HADA que pude mostrar fue...</a:t>
             </a:r>
           </a:p>
         </p:txBody>
@@ -4456,8 +5261,8 @@
         </p:nvSpPr>
         <p:spPr>
           <a:xfrm>
-            <a:off x="685800" y="3191256"/>
-            <a:ext cx="502920" cy="502920"/>
+            <a:off x="658368" y="2971799"/>
+            <a:ext cx="475488" cy="475488"/>
           </a:xfrm>
           <a:prstGeom prst="ellipse">
             <a:avLst/>
@@ -4499,8 +5304,8 @@
         </p:nvSpPr>
         <p:spPr>
           <a:xfrm>
-            <a:off x="685800" y="3300984"/>
-            <a:ext cx="502920" cy="201168"/>
+            <a:off x="658368" y="3072383"/>
+            <a:ext cx="475488" cy="201168"/>
           </a:xfrm>
           <a:prstGeom prst="rect">
             <a:avLst/>
@@ -4508,13 +5313,13 @@
           <a:noFill/>
         </p:spPr>
         <p:txBody>
-          <a:bodyPr wrap="square" lIns="36576" rIns="36576" tIns="27432" bIns="27432">
+          <a:bodyPr wrap="square" lIns="45720" rIns="45720" tIns="36576" bIns="36576" anchor="t">
             <a:spAutoFit/>
           </a:bodyPr>
           <a:lstStyle/>
           <a:p>
             <a:pPr algn="ctr">
-              <a:defRPr sz="1400" b="1">
+              <a:defRPr sz="1300" b="1">
                 <a:solidFill>
                   <a:srgbClr val="FFFFFF"/>
                 </a:solidFill>
@@ -4535,8 +5340,8 @@
         </p:nvSpPr>
         <p:spPr>
           <a:xfrm>
-            <a:off x="1417320" y="3209544"/>
-            <a:ext cx="9875520" cy="548640"/>
+            <a:off x="1389888" y="2953511"/>
+            <a:ext cx="10058400" cy="772668"/>
           </a:xfrm>
           <a:prstGeom prst="rect">
             <a:avLst/>
@@ -4544,13 +5349,13 @@
           <a:noFill/>
         </p:spPr>
         <p:txBody>
-          <a:bodyPr wrap="square" lIns="36576" rIns="36576" tIns="27432" bIns="27432">
+          <a:bodyPr wrap="square" lIns="45720" rIns="45720" tIns="36576" bIns="36576" anchor="t">
             <a:spAutoFit/>
           </a:bodyPr>
           <a:lstStyle/>
           <a:p>
             <a:pPr algn="l">
-              <a:defRPr sz="2000" b="0">
+              <a:defRPr sz="1400" b="0">
                 <a:solidFill>
                   <a:srgbClr val="1C2330"/>
                 </a:solidFill>
@@ -4558,7 +5363,352 @@
               </a:defRPr>
             </a:pPr>
             <a:r>
-              <a:t>Guarda la evidencia y prepárate para explicarla.</a:t>
+              <a:t>13–19 min — Decidir sobre composición y funciones: El equipo marca una opción: mantener composición y funciones hasta la primera revisión, mantener composición y rotar o redefinir funciones, solicitar revisión docente con una razón pedagógica concreta.</a:t>
+            </a:r>
+          </a:p>
+        </p:txBody>
+      </p:sp>
+      <p:sp>
+        <p:nvSpPr>
+          <p:cNvPr id="17" name="Oval 16"/>
+          <p:cNvSpPr/>
+          <p:nvPr/>
+        </p:nvSpPr>
+        <p:spPr>
+          <a:xfrm>
+            <a:off x="658368" y="3817620"/>
+            <a:ext cx="475488" cy="475488"/>
+          </a:xfrm>
+          <a:prstGeom prst="ellipse">
+            <a:avLst/>
+          </a:prstGeom>
+          <a:solidFill>
+            <a:srgbClr val="CC4F3E"/>
+          </a:solidFill>
+          <a:ln>
+            <a:noFill/>
+          </a:ln>
+        </p:spPr>
+        <p:style>
+          <a:lnRef idx="1">
+            <a:schemeClr val="accent1"/>
+          </a:lnRef>
+          <a:fillRef idx="3">
+            <a:schemeClr val="accent1"/>
+          </a:fillRef>
+          <a:effectRef idx="2">
+            <a:schemeClr val="accent1"/>
+          </a:effectRef>
+          <a:fontRef idx="minor">
+            <a:schemeClr val="lt1"/>
+          </a:fontRef>
+        </p:style>
+        <p:txBody>
+          <a:bodyPr rtlCol="0" anchor="ctr"/>
+          <a:lstStyle/>
+          <a:p>
+            <a:pPr algn="ctr"/>
+          </a:p>
+        </p:txBody>
+      </p:sp>
+      <p:sp>
+        <p:nvSpPr>
+          <p:cNvPr id="18" name="TextBox 17"/>
+          <p:cNvSpPr txBox="1"/>
+          <p:nvPr/>
+        </p:nvSpPr>
+        <p:spPr>
+          <a:xfrm>
+            <a:off x="658368" y="3918204"/>
+            <a:ext cx="475488" cy="201168"/>
+          </a:xfrm>
+          <a:prstGeom prst="rect">
+            <a:avLst/>
+          </a:prstGeom>
+          <a:noFill/>
+        </p:spPr>
+        <p:txBody>
+          <a:bodyPr wrap="square" lIns="45720" rIns="45720" tIns="36576" bIns="36576" anchor="t">
+            <a:spAutoFit/>
+          </a:bodyPr>
+          <a:lstStyle/>
+          <a:p>
+            <a:pPr algn="ctr">
+              <a:defRPr sz="1300" b="1">
+                <a:solidFill>
+                  <a:srgbClr val="FFFFFF"/>
+                </a:solidFill>
+                <a:latin typeface="Aptos"/>
+              </a:defRPr>
+            </a:pPr>
+            <a:r>
+              <a:t>4</a:t>
+            </a:r>
+          </a:p>
+        </p:txBody>
+      </p:sp>
+      <p:sp>
+        <p:nvSpPr>
+          <p:cNvPr id="19" name="TextBox 18"/>
+          <p:cNvSpPr txBox="1"/>
+          <p:nvPr/>
+        </p:nvSpPr>
+        <p:spPr>
+          <a:xfrm>
+            <a:off x="1389888" y="3799332"/>
+            <a:ext cx="10058400" cy="772668"/>
+          </a:xfrm>
+          <a:prstGeom prst="rect">
+            <a:avLst/>
+          </a:prstGeom>
+          <a:noFill/>
+        </p:spPr>
+        <p:txBody>
+          <a:bodyPr wrap="square" lIns="45720" rIns="45720" tIns="36576" bIns="36576" anchor="t">
+            <a:spAutoFit/>
+          </a:bodyPr>
+          <a:lstStyle/>
+          <a:p>
+            <a:pPr algn="l">
+              <a:defRPr sz="1400" b="0">
+                <a:solidFill>
+                  <a:srgbClr val="1C2330"/>
+                </a:solidFill>
+                <a:latin typeface="Aptos"/>
+              </a:defRPr>
+            </a:pPr>
+            <a:r>
+              <a:t>19–29 min — Elaborar el contrato observable: Explica que un contrato útil no contiene valores vagos.</a:t>
+            </a:r>
+          </a:p>
+        </p:txBody>
+      </p:sp>
+      <p:sp>
+        <p:nvSpPr>
+          <p:cNvPr id="20" name="Oval 19"/>
+          <p:cNvSpPr/>
+          <p:nvPr/>
+        </p:nvSpPr>
+        <p:spPr>
+          <a:xfrm>
+            <a:off x="658368" y="4663440"/>
+            <a:ext cx="475488" cy="475488"/>
+          </a:xfrm>
+          <a:prstGeom prst="ellipse">
+            <a:avLst/>
+          </a:prstGeom>
+          <a:solidFill>
+            <a:srgbClr val="CC4F3E"/>
+          </a:solidFill>
+          <a:ln>
+            <a:noFill/>
+          </a:ln>
+        </p:spPr>
+        <p:style>
+          <a:lnRef idx="1">
+            <a:schemeClr val="accent1"/>
+          </a:lnRef>
+          <a:fillRef idx="3">
+            <a:schemeClr val="accent1"/>
+          </a:fillRef>
+          <a:effectRef idx="2">
+            <a:schemeClr val="accent1"/>
+          </a:effectRef>
+          <a:fontRef idx="minor">
+            <a:schemeClr val="lt1"/>
+          </a:fontRef>
+        </p:style>
+        <p:txBody>
+          <a:bodyPr rtlCol="0" anchor="ctr"/>
+          <a:lstStyle/>
+          <a:p>
+            <a:pPr algn="ctr"/>
+          </a:p>
+        </p:txBody>
+      </p:sp>
+      <p:sp>
+        <p:nvSpPr>
+          <p:cNvPr id="21" name="TextBox 20"/>
+          <p:cNvSpPr txBox="1"/>
+          <p:nvPr/>
+        </p:nvSpPr>
+        <p:spPr>
+          <a:xfrm>
+            <a:off x="658368" y="4764024"/>
+            <a:ext cx="475488" cy="201168"/>
+          </a:xfrm>
+          <a:prstGeom prst="rect">
+            <a:avLst/>
+          </a:prstGeom>
+          <a:noFill/>
+        </p:spPr>
+        <p:txBody>
+          <a:bodyPr wrap="square" lIns="45720" rIns="45720" tIns="36576" bIns="36576" anchor="t">
+            <a:spAutoFit/>
+          </a:bodyPr>
+          <a:lstStyle/>
+          <a:p>
+            <a:pPr algn="ctr">
+              <a:defRPr sz="1300" b="1">
+                <a:solidFill>
+                  <a:srgbClr val="FFFFFF"/>
+                </a:solidFill>
+                <a:latin typeface="Aptos"/>
+              </a:defRPr>
+            </a:pPr>
+            <a:r>
+              <a:t>5</a:t>
+            </a:r>
+          </a:p>
+        </p:txBody>
+      </p:sp>
+      <p:sp>
+        <p:nvSpPr>
+          <p:cNvPr id="22" name="TextBox 21"/>
+          <p:cNvSpPr txBox="1"/>
+          <p:nvPr/>
+        </p:nvSpPr>
+        <p:spPr>
+          <a:xfrm>
+            <a:off x="1389888" y="4645152"/>
+            <a:ext cx="10058400" cy="772668"/>
+          </a:xfrm>
+          <a:prstGeom prst="rect">
+            <a:avLst/>
+          </a:prstGeom>
+          <a:noFill/>
+        </p:spPr>
+        <p:txBody>
+          <a:bodyPr wrap="square" lIns="45720" rIns="45720" tIns="36576" bIns="36576" anchor="t">
+            <a:spAutoFit/>
+          </a:bodyPr>
+          <a:lstStyle/>
+          <a:p>
+            <a:pPr algn="l">
+              <a:defRPr sz="1400" b="0">
+                <a:solidFill>
+                  <a:srgbClr val="1C2330"/>
+                </a:solidFill>
+                <a:latin typeface="Aptos"/>
+              </a:defRPr>
+            </a:pPr>
+            <a:r>
+              <a:t>29–34 min — Rotación razonada: Cada equipo registra: Foco — Responsable inicial H1 — Sustituto — Momento de rotación — Capacidad que practicará</a:t>
+            </a:r>
+          </a:p>
+        </p:txBody>
+      </p:sp>
+      <p:sp>
+        <p:nvSpPr>
+          <p:cNvPr id="23" name="Oval 22"/>
+          <p:cNvSpPr/>
+          <p:nvPr/>
+        </p:nvSpPr>
+        <p:spPr>
+          <a:xfrm>
+            <a:off x="658368" y="5509259"/>
+            <a:ext cx="475488" cy="475488"/>
+          </a:xfrm>
+          <a:prstGeom prst="ellipse">
+            <a:avLst/>
+          </a:prstGeom>
+          <a:solidFill>
+            <a:srgbClr val="CC4F3E"/>
+          </a:solidFill>
+          <a:ln>
+            <a:noFill/>
+          </a:ln>
+        </p:spPr>
+        <p:style>
+          <a:lnRef idx="1">
+            <a:schemeClr val="accent1"/>
+          </a:lnRef>
+          <a:fillRef idx="3">
+            <a:schemeClr val="accent1"/>
+          </a:fillRef>
+          <a:effectRef idx="2">
+            <a:schemeClr val="accent1"/>
+          </a:effectRef>
+          <a:fontRef idx="minor">
+            <a:schemeClr val="lt1"/>
+          </a:fontRef>
+        </p:style>
+        <p:txBody>
+          <a:bodyPr rtlCol="0" anchor="ctr"/>
+          <a:lstStyle/>
+          <a:p>
+            <a:pPr algn="ctr"/>
+          </a:p>
+        </p:txBody>
+      </p:sp>
+      <p:sp>
+        <p:nvSpPr>
+          <p:cNvPr id="24" name="TextBox 23"/>
+          <p:cNvSpPr txBox="1"/>
+          <p:nvPr/>
+        </p:nvSpPr>
+        <p:spPr>
+          <a:xfrm>
+            <a:off x="658368" y="5609844"/>
+            <a:ext cx="475488" cy="201168"/>
+          </a:xfrm>
+          <a:prstGeom prst="rect">
+            <a:avLst/>
+          </a:prstGeom>
+          <a:noFill/>
+        </p:spPr>
+        <p:txBody>
+          <a:bodyPr wrap="square" lIns="45720" rIns="45720" tIns="36576" bIns="36576" anchor="t">
+            <a:spAutoFit/>
+          </a:bodyPr>
+          <a:lstStyle/>
+          <a:p>
+            <a:pPr algn="ctr">
+              <a:defRPr sz="1300" b="1">
+                <a:solidFill>
+                  <a:srgbClr val="FFFFFF"/>
+                </a:solidFill>
+                <a:latin typeface="Aptos"/>
+              </a:defRPr>
+            </a:pPr>
+            <a:r>
+              <a:t>6</a:t>
+            </a:r>
+          </a:p>
+        </p:txBody>
+      </p:sp>
+      <p:sp>
+        <p:nvSpPr>
+          <p:cNvPr id="25" name="TextBox 24"/>
+          <p:cNvSpPr txBox="1"/>
+          <p:nvPr/>
+        </p:nvSpPr>
+        <p:spPr>
+          <a:xfrm>
+            <a:off x="1389888" y="5490972"/>
+            <a:ext cx="10058400" cy="772668"/>
+          </a:xfrm>
+          <a:prstGeom prst="rect">
+            <a:avLst/>
+          </a:prstGeom>
+          <a:noFill/>
+        </p:spPr>
+        <p:txBody>
+          <a:bodyPr wrap="square" lIns="45720" rIns="45720" tIns="36576" bIns="36576" anchor="t">
+            <a:spAutoFit/>
+          </a:bodyPr>
+          <a:lstStyle/>
+          <a:p>
+            <a:pPr algn="l">
+              <a:defRPr sz="1400" b="0">
+                <a:solidFill>
+                  <a:srgbClr val="1C2330"/>
+                </a:solidFill>
+                <a:latin typeface="Aptos"/>
+              </a:defRPr>
+            </a:pPr>
+            <a:r>
+              <a:t>34–41 min — Transferir la torre a un backlog de software: Modela una transformación: Torre: crear una base.</a:t>
             </a:r>
           </a:p>
         </p:txBody>
@@ -4675,8 +5825,8 @@
         </p:nvSpPr>
         <p:spPr>
           <a:xfrm>
-            <a:off x="502920" y="310896"/>
-            <a:ext cx="5029200" cy="256032"/>
+            <a:off x="502920" y="274320"/>
+            <a:ext cx="5486400" cy="256032"/>
           </a:xfrm>
           <a:prstGeom prst="rect">
             <a:avLst/>
@@ -4684,7 +5834,7 @@
           <a:noFill/>
         </p:spPr>
         <p:txBody>
-          <a:bodyPr wrap="square" lIns="36576" rIns="36576" tIns="27432" bIns="27432">
+          <a:bodyPr wrap="square" lIns="45720" rIns="45720" tIns="36576" bIns="36576" anchor="t">
             <a:spAutoFit/>
           </a:bodyPr>
           <a:lstStyle/>
@@ -4698,7 +5848,7 @@
               </a:defRPr>
             </a:pPr>
             <a:r>
-              <a:t>COMPRENDER Y APLICAR</a:t>
+              <a:t>RITMO DE LA SESIÓN</a:t>
             </a:r>
           </a:p>
         </p:txBody>
@@ -4711,7 +5861,7 @@
         </p:nvSpPr>
         <p:spPr>
           <a:xfrm>
-            <a:off x="502920" y="621792"/>
+            <a:off x="502920" y="603504"/>
             <a:ext cx="11064240" cy="530352"/>
           </a:xfrm>
           <a:prstGeom prst="rect">
@@ -4720,7 +5870,7 @@
           <a:noFill/>
         </p:spPr>
         <p:txBody>
-          <a:bodyPr wrap="square" lIns="36576" rIns="36576" tIns="27432" bIns="27432">
+          <a:bodyPr wrap="square" lIns="45720" rIns="45720" tIns="36576" bIns="36576" anchor="t">
             <a:spAutoFit/>
           </a:bodyPr>
           <a:lstStyle/>
@@ -4734,7 +5884,7 @@
               </a:defRPr>
             </a:pPr>
             <a:r>
-              <a:t>Claves para avanzar</a:t>
+              <a:t>Secuencia de aula · tramo 2</a:t>
             </a:r>
           </a:p>
         </p:txBody>
@@ -4799,7 +5949,7 @@
           <a:noFill/>
         </p:spPr>
         <p:txBody>
-          <a:bodyPr wrap="square" lIns="36576" rIns="36576" tIns="27432" bIns="27432">
+          <a:bodyPr wrap="square" lIns="45720" rIns="45720" tIns="36576" bIns="36576" anchor="t">
             <a:spAutoFit/>
           </a:bodyPr>
           <a:lstStyle/>
@@ -4813,32 +5963,30 @@
               </a:defRPr>
             </a:pPr>
             <a:r>
-              <a:t>MiniJarvis · 1.º DAW · Sesión 205 · H0</a:t>
-            </a:r>
-          </a:p>
-        </p:txBody>
-      </p:sp>
-      <p:sp>
-        <p:nvSpPr>
-          <p:cNvPr id="8" name="Rounded Rectangle 7"/>
+              <a:t>MiniJarvis · 1.º DAW · Sesión 205 · H0 — Formación y prueba de equipos Scrum mediante la torre de papel</a:t>
+            </a:r>
+          </a:p>
+        </p:txBody>
+      </p:sp>
+      <p:sp>
+        <p:nvSpPr>
+          <p:cNvPr id="8" name="Oval 7"/>
           <p:cNvSpPr/>
           <p:nvPr/>
         </p:nvSpPr>
         <p:spPr>
           <a:xfrm>
-            <a:off x="594360" y="1325880"/>
-            <a:ext cx="5257800" cy="4526280"/>
-          </a:xfrm>
-          <a:prstGeom prst="roundRect">
+            <a:off x="658368" y="1280160"/>
+            <a:ext cx="475488" cy="475488"/>
+          </a:xfrm>
+          <a:prstGeom prst="ellipse">
             <a:avLst/>
           </a:prstGeom>
           <a:solidFill>
-            <a:srgbClr val="FFFFFF"/>
+            <a:srgbClr val="CC4F3E"/>
           </a:solidFill>
           <a:ln>
-            <a:solidFill>
-              <a:srgbClr val="EBEEF2"/>
-            </a:solidFill>
+            <a:noFill/>
           </a:ln>
         </p:spPr>
         <p:style>
@@ -4865,25 +6013,95 @@
       </p:sp>
       <p:sp>
         <p:nvSpPr>
-          <p:cNvPr id="9" name="Rounded Rectangle 8"/>
+          <p:cNvPr id="9" name="TextBox 8"/>
+          <p:cNvSpPr txBox="1"/>
+          <p:nvPr/>
+        </p:nvSpPr>
+        <p:spPr>
+          <a:xfrm>
+            <a:off x="658368" y="1380744"/>
+            <a:ext cx="475488" cy="201168"/>
+          </a:xfrm>
+          <a:prstGeom prst="rect">
+            <a:avLst/>
+          </a:prstGeom>
+          <a:noFill/>
+        </p:spPr>
+        <p:txBody>
+          <a:bodyPr wrap="square" lIns="45720" rIns="45720" tIns="36576" bIns="36576" anchor="t">
+            <a:spAutoFit/>
+          </a:bodyPr>
+          <a:lstStyle/>
+          <a:p>
+            <a:pPr algn="ctr">
+              <a:defRPr sz="1300" b="1">
+                <a:solidFill>
+                  <a:srgbClr val="FFFFFF"/>
+                </a:solidFill>
+                <a:latin typeface="Aptos"/>
+              </a:defRPr>
+            </a:pPr>
+            <a:r>
+              <a:t>1</a:t>
+            </a:r>
+          </a:p>
+        </p:txBody>
+      </p:sp>
+      <p:sp>
+        <p:nvSpPr>
+          <p:cNvPr id="10" name="TextBox 9"/>
+          <p:cNvSpPr txBox="1"/>
+          <p:nvPr/>
+        </p:nvSpPr>
+        <p:spPr>
+          <a:xfrm>
+            <a:off x="1389888" y="1261872"/>
+            <a:ext cx="10058400" cy="859536"/>
+          </a:xfrm>
+          <a:prstGeom prst="rect">
+            <a:avLst/>
+          </a:prstGeom>
+          <a:noFill/>
+        </p:spPr>
+        <p:txBody>
+          <a:bodyPr wrap="square" lIns="45720" rIns="45720" tIns="36576" bIns="36576" anchor="t">
+            <a:spAutoFit/>
+          </a:bodyPr>
+          <a:lstStyle/>
+          <a:p>
+            <a:pPr algn="l">
+              <a:defRPr sz="1900" b="0">
+                <a:solidFill>
+                  <a:srgbClr val="1C2330"/>
+                </a:solidFill>
+                <a:latin typeface="Aptos"/>
+              </a:defRPr>
+            </a:pPr>
+            <a:r>
+              <a:t>41–44 min — Comprobación cruzada: Intercambia contratos entre dos equipos o realiza revisión oral.</a:t>
+            </a:r>
+          </a:p>
+        </p:txBody>
+      </p:sp>
+      <p:sp>
+        <p:nvSpPr>
+          <p:cNvPr id="11" name="Oval 10"/>
           <p:cNvSpPr/>
           <p:nvPr/>
         </p:nvSpPr>
         <p:spPr>
           <a:xfrm>
-            <a:off x="6172200" y="1325880"/>
-            <a:ext cx="5413248" cy="4526280"/>
-          </a:xfrm>
-          <a:prstGeom prst="roundRect">
+            <a:off x="658368" y="2212848"/>
+            <a:ext cx="475488" cy="475488"/>
+          </a:xfrm>
+          <a:prstGeom prst="ellipse">
             <a:avLst/>
           </a:prstGeom>
           <a:solidFill>
-            <a:srgbClr val="FFFFFF"/>
+            <a:srgbClr val="CC4F3E"/>
           </a:solidFill>
           <a:ln>
-            <a:solidFill>
-              <a:srgbClr val="EBEEF2"/>
-            </a:solidFill>
+            <a:noFill/>
           </a:ln>
         </p:spPr>
         <p:style>
@@ -4910,121 +6128,14 @@
       </p:sp>
       <p:sp>
         <p:nvSpPr>
-          <p:cNvPr id="10" name="TextBox 9"/>
-          <p:cNvSpPr txBox="1"/>
-          <p:nvPr/>
-        </p:nvSpPr>
-        <p:spPr>
-          <a:xfrm>
-            <a:off x="868680" y="1600200"/>
-            <a:ext cx="4663440" cy="365760"/>
-          </a:xfrm>
-          <a:prstGeom prst="rect">
-            <a:avLst/>
-          </a:prstGeom>
-          <a:noFill/>
-        </p:spPr>
-        <p:txBody>
-          <a:bodyPr wrap="square" lIns="36576" rIns="36576" tIns="27432" bIns="27432">
-            <a:spAutoFit/>
-          </a:bodyPr>
-          <a:lstStyle/>
-          <a:p>
-            <a:pPr algn="l">
-              <a:defRPr sz="1600" b="1">
-                <a:solidFill>
-                  <a:srgbClr val="CC4F3E"/>
-                </a:solidFill>
-                <a:latin typeface="Aptos"/>
-              </a:defRPr>
-            </a:pPr>
-            <a:r>
-              <a:t>IDEAS CLAVE</a:t>
-            </a:r>
-          </a:p>
-        </p:txBody>
-      </p:sp>
-      <p:sp>
-        <p:nvSpPr>
-          <p:cNvPr id="11" name="TextBox 10"/>
-          <p:cNvSpPr txBox="1"/>
-          <p:nvPr/>
-        </p:nvSpPr>
-        <p:spPr>
-          <a:xfrm>
-            <a:off x="868680" y="2121408"/>
-            <a:ext cx="4572000" cy="3337560"/>
-          </a:xfrm>
-          <a:prstGeom prst="rect">
-            <a:avLst/>
-          </a:prstGeom>
-          <a:noFill/>
-        </p:spPr>
-        <p:txBody>
-          <a:bodyPr wrap="square" lIns="73152" rIns="45720" tIns="36576">
-            <a:spAutoFit/>
-          </a:bodyPr>
-          <a:lstStyle/>
-          <a:p>
-            <a:pPr>
-              <a:spcAft>
-                <a:spcPts val="1000"/>
-              </a:spcAft>
-              <a:defRPr sz="1800">
-                <a:solidFill>
-                  <a:srgbClr val="1C2330"/>
-                </a:solidFill>
-                <a:latin typeface="Aptos"/>
-              </a:defRPr>
-            </a:pPr>
-            <a:r>
-              <a:t>•  Comprender y aplicar el objetivo de la sesión.</a:t>
-            </a:r>
-          </a:p>
-          <a:p>
-            <a:pPr>
-              <a:spcAft>
-                <a:spcPts val="1000"/>
-              </a:spcAft>
-              <a:defRPr sz="1800">
-                <a:solidFill>
-                  <a:srgbClr val="1C2330"/>
-                </a:solidFill>
-                <a:latin typeface="Aptos"/>
-              </a:defRPr>
-            </a:pPr>
-            <a:r>
-              <a:t>•  Relaciona el producto con el proceso, la prueba y la explicación.</a:t>
-            </a:r>
-          </a:p>
-          <a:p>
-            <a:pPr>
-              <a:spcAft>
-                <a:spcPts val="1000"/>
-              </a:spcAft>
-              <a:defRPr sz="1800">
-                <a:solidFill>
-                  <a:srgbClr val="1C2330"/>
-                </a:solidFill>
-                <a:latin typeface="Aptos"/>
-              </a:defRPr>
-            </a:pPr>
-            <a:r>
-              <a:t>•  La evidencia esperada es: Una evidencia comprobable y defendible.</a:t>
-            </a:r>
-          </a:p>
-        </p:txBody>
-      </p:sp>
-      <p:sp>
-        <p:nvSpPr>
           <p:cNvPr id="12" name="TextBox 11"/>
           <p:cNvSpPr txBox="1"/>
           <p:nvPr/>
         </p:nvSpPr>
         <p:spPr>
           <a:xfrm>
-            <a:off x="6446520" y="1600200"/>
-            <a:ext cx="4572000" cy="365760"/>
+            <a:off x="658368" y="2313432"/>
+            <a:ext cx="475488" cy="201168"/>
           </a:xfrm>
           <a:prstGeom prst="rect">
             <a:avLst/>
@@ -5032,21 +6143,21 @@
           <a:noFill/>
         </p:spPr>
         <p:txBody>
-          <a:bodyPr wrap="square" lIns="36576" rIns="36576" tIns="27432" bIns="27432">
+          <a:bodyPr wrap="square" lIns="45720" rIns="45720" tIns="36576" bIns="36576" anchor="t">
             <a:spAutoFit/>
           </a:bodyPr>
           <a:lstStyle/>
           <a:p>
-            <a:pPr algn="l">
-              <a:defRPr sz="1600" b="1">
-                <a:solidFill>
-                  <a:srgbClr val="CC4F3E"/>
+            <a:pPr algn="ctr">
+              <a:defRPr sz="1300" b="1">
+                <a:solidFill>
+                  <a:srgbClr val="FFFFFF"/>
                 </a:solidFill>
                 <a:latin typeface="Aptos"/>
               </a:defRPr>
             </a:pPr>
             <a:r>
-              <a:t>ACTIVIDAD CENTRAL</a:t>
+              <a:t>2</a:t>
             </a:r>
           </a:p>
         </p:txBody>
@@ -5059,8 +6170,8 @@
         </p:nvSpPr>
         <p:spPr>
           <a:xfrm>
-            <a:off x="6446520" y="2121408"/>
-            <a:ext cx="4617720" cy="3337560"/>
+            <a:off x="1389888" y="2194560"/>
+            <a:ext cx="10058400" cy="859536"/>
           </a:xfrm>
           <a:prstGeom prst="rect">
             <a:avLst/>
@@ -5068,16 +6179,13 @@
           <a:noFill/>
         </p:spPr>
         <p:txBody>
-          <a:bodyPr wrap="square" lIns="73152" rIns="45720" tIns="36576">
+          <a:bodyPr wrap="square" lIns="45720" rIns="45720" tIns="36576" bIns="36576" anchor="t">
             <a:spAutoFit/>
           </a:bodyPr>
           <a:lstStyle/>
           <a:p>
-            <a:pPr>
-              <a:spcAft>
-                <a:spcPts val="1000"/>
-              </a:spcAft>
-              <a:defRPr sz="1800">
+            <a:pPr algn="l">
+              <a:defRPr sz="1900" b="0">
                 <a:solidFill>
                   <a:srgbClr val="1C2330"/>
                 </a:solidFill>
@@ -5085,7 +6193,7 @@
               </a:defRPr>
             </a:pPr>
             <a:r>
-              <a:t>•  Sigue la consigna indicada en clase.</a:t>
+              <a:t>44–45 min — Cierre individual: Cada persona responde: ¿Qué conducta de la torre mantendrás y qué función diferente practicarás en MiniJarvis?</a:t>
             </a:r>
           </a:p>
         </p:txBody>
@@ -5202,8 +6310,8 @@
         </p:nvSpPr>
         <p:spPr>
           <a:xfrm>
-            <a:off x="502920" y="310896"/>
-            <a:ext cx="5029200" cy="256032"/>
+            <a:off x="502920" y="274320"/>
+            <a:ext cx="5486400" cy="256032"/>
           </a:xfrm>
           <a:prstGeom prst="rect">
             <a:avLst/>
@@ -5211,7 +6319,7 @@
           <a:noFill/>
         </p:spPr>
         <p:txBody>
-          <a:bodyPr wrap="square" lIns="36576" rIns="36576" tIns="27432" bIns="27432">
+          <a:bodyPr wrap="square" lIns="45720" rIns="45720" tIns="36576" bIns="36576" anchor="t">
             <a:spAutoFit/>
           </a:bodyPr>
           <a:lstStyle/>
@@ -5225,7 +6333,7 @@
               </a:defRPr>
             </a:pPr>
             <a:r>
-              <a:t>EVIDENCIA MÍNIMA</a:t>
+              <a:t>COMPRENDER</a:t>
             </a:r>
           </a:p>
         </p:txBody>
@@ -5238,7 +6346,7 @@
         </p:nvSpPr>
         <p:spPr>
           <a:xfrm>
-            <a:off x="502920" y="621792"/>
+            <a:off x="502920" y="603504"/>
             <a:ext cx="11064240" cy="530352"/>
           </a:xfrm>
           <a:prstGeom prst="rect">
@@ -5247,7 +6355,7 @@
           <a:noFill/>
         </p:spPr>
         <p:txBody>
-          <a:bodyPr wrap="square" lIns="36576" rIns="36576" tIns="27432" bIns="27432">
+          <a:bodyPr wrap="square" lIns="45720" rIns="45720" tIns="36576" bIns="36576" anchor="t">
             <a:spAutoFit/>
           </a:bodyPr>
           <a:lstStyle/>
@@ -5261,7 +6369,7 @@
               </a:defRPr>
             </a:pPr>
             <a:r>
-              <a:t>Antes de salir, comprueba</a:t>
+              <a:t>Claves para explicar · 1</a:t>
             </a:r>
           </a:p>
         </p:txBody>
@@ -5326,7 +6434,7 @@
           <a:noFill/>
         </p:spPr>
         <p:txBody>
-          <a:bodyPr wrap="square" lIns="36576" rIns="36576" tIns="27432" bIns="27432">
+          <a:bodyPr wrap="square" lIns="45720" rIns="45720" tIns="36576" bIns="36576" anchor="t">
             <a:spAutoFit/>
           </a:bodyPr>
           <a:lstStyle/>
@@ -5340,7 +6448,7 @@
               </a:defRPr>
             </a:pPr>
             <a:r>
-              <a:t>MiniJarvis · 1.º DAW · Sesión 205 · H0</a:t>
+              <a:t>MiniJarvis · 1.º DAW · Sesión 205 · H0 — Formación y prueba de equipos Scrum mediante la torre de papel</a:t>
             </a:r>
           </a:p>
         </p:txBody>
@@ -5353,8 +6461,8 @@
         </p:nvSpPr>
         <p:spPr>
           <a:xfrm>
-            <a:off x="713232" y="1371600"/>
-            <a:ext cx="420624" cy="420624"/>
+            <a:off x="566928" y="1261872"/>
+            <a:ext cx="3398520" cy="1399032"/>
           </a:xfrm>
           <a:prstGeom prst="roundRect">
             <a:avLst/>
@@ -5364,7 +6472,7 @@
           </a:solidFill>
           <a:ln>
             <a:solidFill>
-              <a:srgbClr val="CC4F3E"/>
+              <a:srgbClr val="E5E9EF"/>
             </a:solidFill>
           </a:ln>
         </p:spPr>
@@ -5398,8 +6506,8 @@
         </p:nvSpPr>
         <p:spPr>
           <a:xfrm>
-            <a:off x="1389888" y="1362456"/>
-            <a:ext cx="9784080" cy="594360"/>
+            <a:off x="768096" y="1426463"/>
+            <a:ext cx="384048" cy="347472"/>
           </a:xfrm>
           <a:prstGeom prst="rect">
             <a:avLst/>
@@ -5407,13 +6515,49 @@
           <a:noFill/>
         </p:spPr>
         <p:txBody>
-          <a:bodyPr wrap="square" lIns="36576" rIns="36576" tIns="27432" bIns="27432">
+          <a:bodyPr wrap="square" lIns="45720" rIns="45720" tIns="36576" bIns="36576" anchor="t">
             <a:spAutoFit/>
           </a:bodyPr>
           <a:lstStyle/>
           <a:p>
             <a:pPr algn="l">
-              <a:defRPr sz="2000" b="0">
+              <a:defRPr sz="1500" b="1">
+                <a:solidFill>
+                  <a:srgbClr val="CC4F3E"/>
+                </a:solidFill>
+                <a:latin typeface="Aptos"/>
+              </a:defRPr>
+            </a:pPr>
+            <a:r>
+              <a:t>01</a:t>
+            </a:r>
+          </a:p>
+        </p:txBody>
+      </p:sp>
+      <p:sp>
+        <p:nvSpPr>
+          <p:cNvPr id="10" name="TextBox 9"/>
+          <p:cNvSpPr txBox="1"/>
+          <p:nvPr/>
+        </p:nvSpPr>
+        <p:spPr>
+          <a:xfrm>
+            <a:off x="1225295" y="1426463"/>
+            <a:ext cx="2621280" cy="1161288"/>
+          </a:xfrm>
+          <a:prstGeom prst="rect">
+            <a:avLst/>
+          </a:prstGeom>
+          <a:noFill/>
+        </p:spPr>
+        <p:txBody>
+          <a:bodyPr wrap="square" lIns="45720" rIns="45720" tIns="36576" bIns="36576" anchor="t">
+            <a:spAutoFit/>
+          </a:bodyPr>
+          <a:lstStyle/>
+          <a:p>
+            <a:pPr algn="l">
+              <a:defRPr sz="1300" b="0">
                 <a:solidFill>
                   <a:srgbClr val="1C2330"/>
                 </a:solidFill>
@@ -5421,21 +6565,21 @@
               </a:defRPr>
             </a:pPr>
             <a:r>
-              <a:t>He producido o actualizado: Una evidencia comprobable y defendible.</a:t>
-            </a:r>
-          </a:p>
-        </p:txBody>
-      </p:sp>
-      <p:sp>
-        <p:nvSpPr>
-          <p:cNvPr id="10" name="Rounded Rectangle 9"/>
+              <a:t>Mantener composición y funciones: Solo cuando las evidencias muestran: participación suficiente, comunicación de bloqueos, funciones entendidas, capacidad de adaptación, ausencia de riesgo o exclusión.</a:t>
+            </a:r>
+          </a:p>
+        </p:txBody>
+      </p:sp>
+      <p:sp>
+        <p:nvSpPr>
+          <p:cNvPr id="11" name="Rounded Rectangle 10"/>
           <p:cNvSpPr/>
           <p:nvPr/>
         </p:nvSpPr>
         <p:spPr>
           <a:xfrm>
-            <a:off x="713232" y="2267712"/>
-            <a:ext cx="420624" cy="420624"/>
+            <a:off x="4194048" y="1261872"/>
+            <a:ext cx="3398520" cy="1399032"/>
           </a:xfrm>
           <a:prstGeom prst="roundRect">
             <a:avLst/>
@@ -5445,7 +6589,7 @@
           </a:solidFill>
           <a:ln>
             <a:solidFill>
-              <a:srgbClr val="CC4F3E"/>
+              <a:srgbClr val="E5E9EF"/>
             </a:solidFill>
           </a:ln>
         </p:spPr>
@@ -5473,14 +6617,14 @@
       </p:sp>
       <p:sp>
         <p:nvSpPr>
-          <p:cNvPr id="11" name="TextBox 10"/>
+          <p:cNvPr id="12" name="TextBox 11"/>
           <p:cNvSpPr txBox="1"/>
           <p:nvPr/>
         </p:nvSpPr>
         <p:spPr>
           <a:xfrm>
-            <a:off x="1389888" y="2258568"/>
-            <a:ext cx="9784080" cy="594360"/>
+            <a:off x="4395216" y="1426463"/>
+            <a:ext cx="384048" cy="347472"/>
           </a:xfrm>
           <a:prstGeom prst="rect">
             <a:avLst/>
@@ -5488,13 +6632,49 @@
           <a:noFill/>
         </p:spPr>
         <p:txBody>
-          <a:bodyPr wrap="square" lIns="36576" rIns="36576" tIns="27432" bIns="27432">
+          <a:bodyPr wrap="square" lIns="45720" rIns="45720" tIns="36576" bIns="36576" anchor="t">
             <a:spAutoFit/>
           </a:bodyPr>
           <a:lstStyle/>
           <a:p>
             <a:pPr algn="l">
-              <a:defRPr sz="2000" b="0">
+              <a:defRPr sz="1500" b="1">
+                <a:solidFill>
+                  <a:srgbClr val="CC4F3E"/>
+                </a:solidFill>
+                <a:latin typeface="Aptos"/>
+              </a:defRPr>
+            </a:pPr>
+            <a:r>
+              <a:t>02</a:t>
+            </a:r>
+          </a:p>
+        </p:txBody>
+      </p:sp>
+      <p:sp>
+        <p:nvSpPr>
+          <p:cNvPr id="13" name="TextBox 12"/>
+          <p:cNvSpPr txBox="1"/>
+          <p:nvPr/>
+        </p:nvSpPr>
+        <p:spPr>
+          <a:xfrm>
+            <a:off x="4852416" y="1426463"/>
+            <a:ext cx="2621280" cy="1161288"/>
+          </a:xfrm>
+          <a:prstGeom prst="rect">
+            <a:avLst/>
+          </a:prstGeom>
+          <a:noFill/>
+        </p:spPr>
+        <p:txBody>
+          <a:bodyPr wrap="square" lIns="45720" rIns="45720" tIns="36576" bIns="36576" anchor="t">
+            <a:spAutoFit/>
+          </a:bodyPr>
+          <a:lstStyle/>
+          <a:p>
+            <a:pPr algn="l">
+              <a:defRPr sz="1300" b="0">
                 <a:solidFill>
                   <a:srgbClr val="1C2330"/>
                 </a:solidFill>
@@ -5502,21 +6682,21 @@
               </a:defRPr>
             </a:pPr>
             <a:r>
-              <a:t>Puedo señalar dónde está.</a:t>
-            </a:r>
-          </a:p>
-        </p:txBody>
-      </p:sp>
-      <p:sp>
-        <p:nvSpPr>
-          <p:cNvPr id="12" name="Rounded Rectangle 11"/>
+              <a:t>Aun así, debe existir rotación futura.</a:t>
+            </a:r>
+          </a:p>
+        </p:txBody>
+      </p:sp>
+      <p:sp>
+        <p:nvSpPr>
+          <p:cNvPr id="14" name="Rounded Rectangle 13"/>
           <p:cNvSpPr/>
           <p:nvPr/>
         </p:nvSpPr>
         <p:spPr>
           <a:xfrm>
-            <a:off x="713232" y="3163824"/>
-            <a:ext cx="420624" cy="420624"/>
+            <a:off x="7821167" y="1261872"/>
+            <a:ext cx="3398520" cy="1399032"/>
           </a:xfrm>
           <a:prstGeom prst="roundRect">
             <a:avLst/>
@@ -5526,7 +6706,7 @@
           </a:solidFill>
           <a:ln>
             <a:solidFill>
-              <a:srgbClr val="CC4F3E"/>
+              <a:srgbClr val="E5E9EF"/>
             </a:solidFill>
           </a:ln>
         </p:spPr>
@@ -5554,14 +6734,14 @@
       </p:sp>
       <p:sp>
         <p:nvSpPr>
-          <p:cNvPr id="13" name="TextBox 12"/>
+          <p:cNvPr id="15" name="TextBox 14"/>
           <p:cNvSpPr txBox="1"/>
           <p:nvPr/>
         </p:nvSpPr>
         <p:spPr>
           <a:xfrm>
-            <a:off x="1389888" y="3154680"/>
-            <a:ext cx="9784080" cy="594360"/>
+            <a:off x="8022336" y="1426463"/>
+            <a:ext cx="384048" cy="347472"/>
           </a:xfrm>
           <a:prstGeom prst="rect">
             <a:avLst/>
@@ -5569,13 +6749,49 @@
           <a:noFill/>
         </p:spPr>
         <p:txBody>
-          <a:bodyPr wrap="square" lIns="36576" rIns="36576" tIns="27432" bIns="27432">
+          <a:bodyPr wrap="square" lIns="45720" rIns="45720" tIns="36576" bIns="36576" anchor="t">
             <a:spAutoFit/>
           </a:bodyPr>
           <a:lstStyle/>
           <a:p>
             <a:pPr algn="l">
-              <a:defRPr sz="2000" b="0">
+              <a:defRPr sz="1500" b="1">
+                <a:solidFill>
+                  <a:srgbClr val="CC4F3E"/>
+                </a:solidFill>
+                <a:latin typeface="Aptos"/>
+              </a:defRPr>
+            </a:pPr>
+            <a:r>
+              <a:t>03</a:t>
+            </a:r>
+          </a:p>
+        </p:txBody>
+      </p:sp>
+      <p:sp>
+        <p:nvSpPr>
+          <p:cNvPr id="16" name="TextBox 15"/>
+          <p:cNvSpPr txBox="1"/>
+          <p:nvPr/>
+        </p:nvSpPr>
+        <p:spPr>
+          <a:xfrm>
+            <a:off x="8479536" y="1426463"/>
+            <a:ext cx="2621280" cy="1161288"/>
+          </a:xfrm>
+          <a:prstGeom prst="rect">
+            <a:avLst/>
+          </a:prstGeom>
+          <a:noFill/>
+        </p:spPr>
+        <p:txBody>
+          <a:bodyPr wrap="square" lIns="45720" rIns="45720" tIns="36576" bIns="36576" anchor="t">
+            <a:spAutoFit/>
+          </a:bodyPr>
+          <a:lstStyle/>
+          <a:p>
+            <a:pPr algn="l">
+              <a:defRPr sz="1300" b="0">
                 <a:solidFill>
                   <a:srgbClr val="1C2330"/>
                 </a:solidFill>
@@ -5583,21 +6799,21 @@
               </a:defRPr>
             </a:pPr>
             <a:r>
-              <a:t>Puedo explicar una decisión.</a:t>
-            </a:r>
-          </a:p>
-        </p:txBody>
-      </p:sp>
-      <p:sp>
-        <p:nvSpPr>
-          <p:cNvPr id="14" name="Rounded Rectangle 13"/>
+              <a:t>Mantener composición y ajustar funciones o normas: Es la opción preferente cuando el problema puede abordarse mediante:</a:t>
+            </a:r>
+          </a:p>
+        </p:txBody>
+      </p:sp>
+      <p:sp>
+        <p:nvSpPr>
+          <p:cNvPr id="17" name="Rounded Rectangle 16"/>
           <p:cNvSpPr/>
           <p:nvPr/>
         </p:nvSpPr>
         <p:spPr>
           <a:xfrm>
-            <a:off x="713232" y="4059935"/>
-            <a:ext cx="420624" cy="420624"/>
+            <a:off x="566928" y="2862072"/>
+            <a:ext cx="3398520" cy="1399032"/>
           </a:xfrm>
           <a:prstGeom prst="roundRect">
             <a:avLst/>
@@ -5607,7 +6823,7 @@
           </a:solidFill>
           <a:ln>
             <a:solidFill>
-              <a:srgbClr val="CC4F3E"/>
+              <a:srgbClr val="E5E9EF"/>
             </a:solidFill>
           </a:ln>
         </p:spPr>
@@ -5635,14 +6851,14 @@
       </p:sp>
       <p:sp>
         <p:nvSpPr>
-          <p:cNvPr id="15" name="TextBox 14"/>
+          <p:cNvPr id="18" name="TextBox 17"/>
           <p:cNvSpPr txBox="1"/>
           <p:nvPr/>
         </p:nvSpPr>
         <p:spPr>
           <a:xfrm>
-            <a:off x="1389888" y="4050791"/>
-            <a:ext cx="9784080" cy="594360"/>
+            <a:off x="768096" y="3026664"/>
+            <a:ext cx="384048" cy="347472"/>
           </a:xfrm>
           <a:prstGeom prst="rect">
             <a:avLst/>
@@ -5650,13 +6866,49 @@
           <a:noFill/>
         </p:spPr>
         <p:txBody>
-          <a:bodyPr wrap="square" lIns="36576" rIns="36576" tIns="27432" bIns="27432">
+          <a:bodyPr wrap="square" lIns="45720" rIns="45720" tIns="36576" bIns="36576" anchor="t">
             <a:spAutoFit/>
           </a:bodyPr>
           <a:lstStyle/>
           <a:p>
             <a:pPr algn="l">
-              <a:defRPr sz="2000" b="0">
+              <a:defRPr sz="1500" b="1">
+                <a:solidFill>
+                  <a:srgbClr val="CC4F3E"/>
+                </a:solidFill>
+                <a:latin typeface="Aptos"/>
+              </a:defRPr>
+            </a:pPr>
+            <a:r>
+              <a:t>04</a:t>
+            </a:r>
+          </a:p>
+        </p:txBody>
+      </p:sp>
+      <p:sp>
+        <p:nvSpPr>
+          <p:cNvPr id="19" name="TextBox 18"/>
+          <p:cNvSpPr txBox="1"/>
+          <p:nvPr/>
+        </p:nvSpPr>
+        <p:spPr>
+          <a:xfrm>
+            <a:off x="1225295" y="3026664"/>
+            <a:ext cx="2621280" cy="1161288"/>
+          </a:xfrm>
+          <a:prstGeom prst="rect">
+            <a:avLst/>
+          </a:prstGeom>
+          <a:noFill/>
+        </p:spPr>
+        <p:txBody>
+          <a:bodyPr wrap="square" lIns="45720" rIns="45720" tIns="36576" bIns="36576" anchor="t">
+            <a:spAutoFit/>
+          </a:bodyPr>
+          <a:lstStyle/>
+          <a:p>
+            <a:pPr algn="l">
+              <a:defRPr sz="1300" b="0">
                 <a:solidFill>
                   <a:srgbClr val="1C2330"/>
                 </a:solidFill>
@@ -5664,7 +6916,358 @@
               </a:defRPr>
             </a:pPr>
             <a:r>
-              <a:t>Puedo mostrar una prueba.</a:t>
+              <a:t>redefinir una responsabilidad, hacer visible una capacidad ausente, introducir turnos o límites de trabajo en curso, rotar funciones;</a:t>
+            </a:r>
+          </a:p>
+        </p:txBody>
+      </p:sp>
+      <p:sp>
+        <p:nvSpPr>
+          <p:cNvPr id="20" name="Rounded Rectangle 19"/>
+          <p:cNvSpPr/>
+          <p:nvPr/>
+        </p:nvSpPr>
+        <p:spPr>
+          <a:xfrm>
+            <a:off x="4194048" y="2862072"/>
+            <a:ext cx="3398520" cy="1399032"/>
+          </a:xfrm>
+          <a:prstGeom prst="roundRect">
+            <a:avLst/>
+          </a:prstGeom>
+          <a:solidFill>
+            <a:srgbClr val="FFFFFF"/>
+          </a:solidFill>
+          <a:ln>
+            <a:solidFill>
+              <a:srgbClr val="E5E9EF"/>
+            </a:solidFill>
+          </a:ln>
+        </p:spPr>
+        <p:style>
+          <a:lnRef idx="1">
+            <a:schemeClr val="accent1"/>
+          </a:lnRef>
+          <a:fillRef idx="3">
+            <a:schemeClr val="accent1"/>
+          </a:fillRef>
+          <a:effectRef idx="2">
+            <a:schemeClr val="accent1"/>
+          </a:effectRef>
+          <a:fontRef idx="minor">
+            <a:schemeClr val="lt1"/>
+          </a:fontRef>
+        </p:style>
+        <p:txBody>
+          <a:bodyPr rtlCol="0" anchor="ctr"/>
+          <a:lstStyle/>
+          <a:p>
+            <a:pPr algn="ctr"/>
+          </a:p>
+        </p:txBody>
+      </p:sp>
+      <p:sp>
+        <p:nvSpPr>
+          <p:cNvPr id="21" name="TextBox 20"/>
+          <p:cNvSpPr txBox="1"/>
+          <p:nvPr/>
+        </p:nvSpPr>
+        <p:spPr>
+          <a:xfrm>
+            <a:off x="4395216" y="3026664"/>
+            <a:ext cx="384048" cy="347472"/>
+          </a:xfrm>
+          <a:prstGeom prst="rect">
+            <a:avLst/>
+          </a:prstGeom>
+          <a:noFill/>
+        </p:spPr>
+        <p:txBody>
+          <a:bodyPr wrap="square" lIns="45720" rIns="45720" tIns="36576" bIns="36576" anchor="t">
+            <a:spAutoFit/>
+          </a:bodyPr>
+          <a:lstStyle/>
+          <a:p>
+            <a:pPr algn="l">
+              <a:defRPr sz="1500" b="1">
+                <a:solidFill>
+                  <a:srgbClr val="CC4F3E"/>
+                </a:solidFill>
+                <a:latin typeface="Aptos"/>
+              </a:defRPr>
+            </a:pPr>
+            <a:r>
+              <a:t>05</a:t>
+            </a:r>
+          </a:p>
+        </p:txBody>
+      </p:sp>
+      <p:sp>
+        <p:nvSpPr>
+          <p:cNvPr id="22" name="TextBox 21"/>
+          <p:cNvSpPr txBox="1"/>
+          <p:nvPr/>
+        </p:nvSpPr>
+        <p:spPr>
+          <a:xfrm>
+            <a:off x="4852416" y="3026664"/>
+            <a:ext cx="2621280" cy="1161288"/>
+          </a:xfrm>
+          <a:prstGeom prst="rect">
+            <a:avLst/>
+          </a:prstGeom>
+          <a:noFill/>
+        </p:spPr>
+        <p:txBody>
+          <a:bodyPr wrap="square" lIns="45720" rIns="45720" tIns="36576" bIns="36576" anchor="t">
+            <a:spAutoFit/>
+          </a:bodyPr>
+          <a:lstStyle/>
+          <a:p>
+            <a:pPr algn="l">
+              <a:defRPr sz="1300" b="0">
+                <a:solidFill>
+                  <a:srgbClr val="1C2330"/>
+                </a:solidFill>
+                <a:latin typeface="Aptos"/>
+              </a:defRPr>
+            </a:pPr>
+            <a:r>
+              <a:t>mejorar criterios de aceptación;</a:t>
+            </a:r>
+          </a:p>
+        </p:txBody>
+      </p:sp>
+      <p:sp>
+        <p:nvSpPr>
+          <p:cNvPr id="23" name="Rounded Rectangle 22"/>
+          <p:cNvSpPr/>
+          <p:nvPr/>
+        </p:nvSpPr>
+        <p:spPr>
+          <a:xfrm>
+            <a:off x="7821167" y="2862072"/>
+            <a:ext cx="3398520" cy="1399032"/>
+          </a:xfrm>
+          <a:prstGeom prst="roundRect">
+            <a:avLst/>
+          </a:prstGeom>
+          <a:solidFill>
+            <a:srgbClr val="FFFFFF"/>
+          </a:solidFill>
+          <a:ln>
+            <a:solidFill>
+              <a:srgbClr val="E5E9EF"/>
+            </a:solidFill>
+          </a:ln>
+        </p:spPr>
+        <p:style>
+          <a:lnRef idx="1">
+            <a:schemeClr val="accent1"/>
+          </a:lnRef>
+          <a:fillRef idx="3">
+            <a:schemeClr val="accent1"/>
+          </a:fillRef>
+          <a:effectRef idx="2">
+            <a:schemeClr val="accent1"/>
+          </a:effectRef>
+          <a:fontRef idx="minor">
+            <a:schemeClr val="lt1"/>
+          </a:fontRef>
+        </p:style>
+        <p:txBody>
+          <a:bodyPr rtlCol="0" anchor="ctr"/>
+          <a:lstStyle/>
+          <a:p>
+            <a:pPr algn="ctr"/>
+          </a:p>
+        </p:txBody>
+      </p:sp>
+      <p:sp>
+        <p:nvSpPr>
+          <p:cNvPr id="24" name="TextBox 23"/>
+          <p:cNvSpPr txBox="1"/>
+          <p:nvPr/>
+        </p:nvSpPr>
+        <p:spPr>
+          <a:xfrm>
+            <a:off x="8022336" y="3026664"/>
+            <a:ext cx="384048" cy="347472"/>
+          </a:xfrm>
+          <a:prstGeom prst="rect">
+            <a:avLst/>
+          </a:prstGeom>
+          <a:noFill/>
+        </p:spPr>
+        <p:txBody>
+          <a:bodyPr wrap="square" lIns="45720" rIns="45720" tIns="36576" bIns="36576" anchor="t">
+            <a:spAutoFit/>
+          </a:bodyPr>
+          <a:lstStyle/>
+          <a:p>
+            <a:pPr algn="l">
+              <a:defRPr sz="1500" b="1">
+                <a:solidFill>
+                  <a:srgbClr val="CC4F3E"/>
+                </a:solidFill>
+                <a:latin typeface="Aptos"/>
+              </a:defRPr>
+            </a:pPr>
+            <a:r>
+              <a:t>06</a:t>
+            </a:r>
+          </a:p>
+        </p:txBody>
+      </p:sp>
+      <p:sp>
+        <p:nvSpPr>
+          <p:cNvPr id="25" name="TextBox 24"/>
+          <p:cNvSpPr txBox="1"/>
+          <p:nvPr/>
+        </p:nvSpPr>
+        <p:spPr>
+          <a:xfrm>
+            <a:off x="8479536" y="3026664"/>
+            <a:ext cx="2621280" cy="1161288"/>
+          </a:xfrm>
+          <a:prstGeom prst="rect">
+            <a:avLst/>
+          </a:prstGeom>
+          <a:noFill/>
+        </p:spPr>
+        <p:txBody>
+          <a:bodyPr wrap="square" lIns="45720" rIns="45720" tIns="36576" bIns="36576" anchor="t">
+            <a:spAutoFit/>
+          </a:bodyPr>
+          <a:lstStyle/>
+          <a:p>
+            <a:pPr algn="l">
+              <a:defRPr sz="1300" b="0">
+                <a:solidFill>
+                  <a:srgbClr val="1C2330"/>
+                </a:solidFill>
+                <a:latin typeface="Aptos"/>
+              </a:defRPr>
+            </a:pPr>
+            <a:r>
+              <a:t>concretar cuándo pedir ayuda.</a:t>
+            </a:r>
+          </a:p>
+        </p:txBody>
+      </p:sp>
+      <p:sp>
+        <p:nvSpPr>
+          <p:cNvPr id="26" name="Rounded Rectangle 25"/>
+          <p:cNvSpPr/>
+          <p:nvPr/>
+        </p:nvSpPr>
+        <p:spPr>
+          <a:xfrm>
+            <a:off x="566928" y="4462272"/>
+            <a:ext cx="3398520" cy="1399032"/>
+          </a:xfrm>
+          <a:prstGeom prst="roundRect">
+            <a:avLst/>
+          </a:prstGeom>
+          <a:solidFill>
+            <a:srgbClr val="FFFFFF"/>
+          </a:solidFill>
+          <a:ln>
+            <a:solidFill>
+              <a:srgbClr val="E5E9EF"/>
+            </a:solidFill>
+          </a:ln>
+        </p:spPr>
+        <p:style>
+          <a:lnRef idx="1">
+            <a:schemeClr val="accent1"/>
+          </a:lnRef>
+          <a:fillRef idx="3">
+            <a:schemeClr val="accent1"/>
+          </a:fillRef>
+          <a:effectRef idx="2">
+            <a:schemeClr val="accent1"/>
+          </a:effectRef>
+          <a:fontRef idx="minor">
+            <a:schemeClr val="lt1"/>
+          </a:fontRef>
+        </p:style>
+        <p:txBody>
+          <a:bodyPr rtlCol="0" anchor="ctr"/>
+          <a:lstStyle/>
+          <a:p>
+            <a:pPr algn="ctr"/>
+          </a:p>
+        </p:txBody>
+      </p:sp>
+      <p:sp>
+        <p:nvSpPr>
+          <p:cNvPr id="27" name="TextBox 26"/>
+          <p:cNvSpPr txBox="1"/>
+          <p:nvPr/>
+        </p:nvSpPr>
+        <p:spPr>
+          <a:xfrm>
+            <a:off x="768096" y="4626864"/>
+            <a:ext cx="384048" cy="347472"/>
+          </a:xfrm>
+          <a:prstGeom prst="rect">
+            <a:avLst/>
+          </a:prstGeom>
+          <a:noFill/>
+        </p:spPr>
+        <p:txBody>
+          <a:bodyPr wrap="square" lIns="45720" rIns="45720" tIns="36576" bIns="36576" anchor="t">
+            <a:spAutoFit/>
+          </a:bodyPr>
+          <a:lstStyle/>
+          <a:p>
+            <a:pPr algn="l">
+              <a:defRPr sz="1500" b="1">
+                <a:solidFill>
+                  <a:srgbClr val="CC4F3E"/>
+                </a:solidFill>
+                <a:latin typeface="Aptos"/>
+              </a:defRPr>
+            </a:pPr>
+            <a:r>
+              <a:t>07</a:t>
+            </a:r>
+          </a:p>
+        </p:txBody>
+      </p:sp>
+      <p:sp>
+        <p:nvSpPr>
+          <p:cNvPr id="28" name="TextBox 27"/>
+          <p:cNvSpPr txBox="1"/>
+          <p:nvPr/>
+        </p:nvSpPr>
+        <p:spPr>
+          <a:xfrm>
+            <a:off x="1225295" y="4626864"/>
+            <a:ext cx="2621280" cy="1161288"/>
+          </a:xfrm>
+          <a:prstGeom prst="rect">
+            <a:avLst/>
+          </a:prstGeom>
+          <a:noFill/>
+        </p:spPr>
+        <p:txBody>
+          <a:bodyPr wrap="square" lIns="45720" rIns="45720" tIns="36576" bIns="36576" anchor="t">
+            <a:spAutoFit/>
+          </a:bodyPr>
+          <a:lstStyle/>
+          <a:p>
+            <a:pPr algn="l">
+              <a:defRPr sz="1300" b="0">
+                <a:solidFill>
+                  <a:srgbClr val="1C2330"/>
+                </a:solidFill>
+                <a:latin typeface="Aptos"/>
+              </a:defRPr>
+            </a:pPr>
+            <a:r>
+              <a:t>Solicitar revisión docente de la composición: Está justificada cuando hay evidencias de:</a:t>
             </a:r>
           </a:p>
         </p:txBody>
@@ -5781,8 +7384,8 @@
         </p:nvSpPr>
         <p:spPr>
           <a:xfrm>
-            <a:off x="502920" y="310896"/>
-            <a:ext cx="5029200" cy="256032"/>
+            <a:off x="502920" y="274320"/>
+            <a:ext cx="5486400" cy="256032"/>
           </a:xfrm>
           <a:prstGeom prst="rect">
             <a:avLst/>
@@ -5790,7 +7393,7 @@
           <a:noFill/>
         </p:spPr>
         <p:txBody>
-          <a:bodyPr wrap="square" lIns="36576" rIns="36576" tIns="27432" bIns="27432">
+          <a:bodyPr wrap="square" lIns="45720" rIns="45720" tIns="36576" bIns="36576" anchor="t">
             <a:spAutoFit/>
           </a:bodyPr>
           <a:lstStyle/>
@@ -5804,7 +7407,7 @@
               </a:defRPr>
             </a:pPr>
             <a:r>
-              <a:t>COMPRUEBA Y EXPLICA</a:t>
+              <a:t>COMPRENDER</a:t>
             </a:r>
           </a:p>
         </p:txBody>
@@ -5817,7 +7420,7 @@
         </p:nvSpPr>
         <p:spPr>
           <a:xfrm>
-            <a:off x="502920" y="621792"/>
+            <a:off x="502920" y="603504"/>
             <a:ext cx="11064240" cy="530352"/>
           </a:xfrm>
           <a:prstGeom prst="rect">
@@ -5826,7 +7429,7 @@
           <a:noFill/>
         </p:spPr>
         <p:txBody>
-          <a:bodyPr wrap="square" lIns="36576" rIns="36576" tIns="27432" bIns="27432">
+          <a:bodyPr wrap="square" lIns="45720" rIns="45720" tIns="36576" bIns="36576" anchor="t">
             <a:spAutoFit/>
           </a:bodyPr>
           <a:lstStyle/>
@@ -5840,7 +7443,7 @@
               </a:defRPr>
             </a:pPr>
             <a:r>
-              <a:t>Cierre de la sesión</a:t>
+              <a:t>Claves para explicar · 2</a:t>
             </a:r>
           </a:p>
         </p:txBody>
@@ -5905,7 +7508,7 @@
           <a:noFill/>
         </p:spPr>
         <p:txBody>
-          <a:bodyPr wrap="square" lIns="36576" rIns="36576" tIns="27432" bIns="27432">
+          <a:bodyPr wrap="square" lIns="45720" rIns="45720" tIns="36576" bIns="36576" anchor="t">
             <a:spAutoFit/>
           </a:bodyPr>
           <a:lstStyle/>
@@ -5919,7 +7522,7 @@
               </a:defRPr>
             </a:pPr>
             <a:r>
-              <a:t>MiniJarvis · 1.º DAW · Sesión 205 · H0</a:t>
+              <a:t>MiniJarvis · 1.º DAW · Sesión 205 · H0 — Formación y prueba de equipos Scrum mediante la torre de papel</a:t>
             </a:r>
           </a:p>
         </p:txBody>
@@ -5932,10 +7535,539 @@
         </p:nvSpPr>
         <p:spPr>
           <a:xfrm>
-            <a:off x="621792" y="1298448"/>
-            <a:ext cx="10927080" cy="1965960"/>
+            <a:off x="566928" y="1261872"/>
+            <a:ext cx="5212080" cy="2199132"/>
           </a:xfrm>
           <a:prstGeom prst="roundRect">
+            <a:avLst/>
+          </a:prstGeom>
+          <a:solidFill>
+            <a:srgbClr val="FFFFFF"/>
+          </a:solidFill>
+          <a:ln>
+            <a:solidFill>
+              <a:srgbClr val="E5E9EF"/>
+            </a:solidFill>
+          </a:ln>
+        </p:spPr>
+        <p:style>
+          <a:lnRef idx="1">
+            <a:schemeClr val="accent1"/>
+          </a:lnRef>
+          <a:fillRef idx="3">
+            <a:schemeClr val="accent1"/>
+          </a:fillRef>
+          <a:effectRef idx="2">
+            <a:schemeClr val="accent1"/>
+          </a:effectRef>
+          <a:fontRef idx="minor">
+            <a:schemeClr val="lt1"/>
+          </a:fontRef>
+        </p:style>
+        <p:txBody>
+          <a:bodyPr rtlCol="0" anchor="ctr"/>
+          <a:lstStyle/>
+          <a:p>
+            <a:pPr algn="ctr"/>
+          </a:p>
+        </p:txBody>
+      </p:sp>
+      <p:sp>
+        <p:nvSpPr>
+          <p:cNvPr id="9" name="TextBox 8"/>
+          <p:cNvSpPr txBox="1"/>
+          <p:nvPr/>
+        </p:nvSpPr>
+        <p:spPr>
+          <a:xfrm>
+            <a:off x="768096" y="1426463"/>
+            <a:ext cx="384048" cy="347472"/>
+          </a:xfrm>
+          <a:prstGeom prst="rect">
+            <a:avLst/>
+          </a:prstGeom>
+          <a:noFill/>
+        </p:spPr>
+        <p:txBody>
+          <a:bodyPr wrap="square" lIns="45720" rIns="45720" tIns="36576" bIns="36576" anchor="t">
+            <a:spAutoFit/>
+          </a:bodyPr>
+          <a:lstStyle/>
+          <a:p>
+            <a:pPr algn="l">
+              <a:defRPr sz="1500" b="1">
+                <a:solidFill>
+                  <a:srgbClr val="CC4F3E"/>
+                </a:solidFill>
+                <a:latin typeface="Aptos"/>
+              </a:defRPr>
+            </a:pPr>
+            <a:r>
+              <a:t>01</a:t>
+            </a:r>
+          </a:p>
+        </p:txBody>
+      </p:sp>
+      <p:sp>
+        <p:nvSpPr>
+          <p:cNvPr id="10" name="TextBox 9"/>
+          <p:cNvSpPr txBox="1"/>
+          <p:nvPr/>
+        </p:nvSpPr>
+        <p:spPr>
+          <a:xfrm>
+            <a:off x="1225295" y="1426463"/>
+            <a:ext cx="4434840" cy="1961388"/>
+          </a:xfrm>
+          <a:prstGeom prst="rect">
+            <a:avLst/>
+          </a:prstGeom>
+          <a:noFill/>
+        </p:spPr>
+        <p:txBody>
+          <a:bodyPr wrap="square" lIns="45720" rIns="45720" tIns="36576" bIns="36576" anchor="t">
+            <a:spAutoFit/>
+          </a:bodyPr>
+          <a:lstStyle/>
+          <a:p>
+            <a:pPr algn="l">
+              <a:defRPr sz="1300" b="0">
+                <a:solidFill>
+                  <a:srgbClr val="1C2330"/>
+                </a:solidFill>
+                <a:latin typeface="Aptos"/>
+              </a:defRPr>
+            </a:pPr>
+            <a:r>
+              <a:t>exclusión sostenida, conflicto que impide aprender o trabajar con seguridad, incompatibilidad pedagógica relevante, necesidad de apoyo no cubierta, ausencia persistente que hace inviable el equipo;</a:t>
+            </a:r>
+          </a:p>
+        </p:txBody>
+      </p:sp>
+      <p:sp>
+        <p:nvSpPr>
+          <p:cNvPr id="11" name="Rounded Rectangle 10"/>
+          <p:cNvSpPr/>
+          <p:nvPr/>
+        </p:nvSpPr>
+        <p:spPr>
+          <a:xfrm>
+            <a:off x="6007608" y="1261872"/>
+            <a:ext cx="5212080" cy="2199132"/>
+          </a:xfrm>
+          <a:prstGeom prst="roundRect">
+            <a:avLst/>
+          </a:prstGeom>
+          <a:solidFill>
+            <a:srgbClr val="FFFFFF"/>
+          </a:solidFill>
+          <a:ln>
+            <a:solidFill>
+              <a:srgbClr val="E5E9EF"/>
+            </a:solidFill>
+          </a:ln>
+        </p:spPr>
+        <p:style>
+          <a:lnRef idx="1">
+            <a:schemeClr val="accent1"/>
+          </a:lnRef>
+          <a:fillRef idx="3">
+            <a:schemeClr val="accent1"/>
+          </a:fillRef>
+          <a:effectRef idx="2">
+            <a:schemeClr val="accent1"/>
+          </a:effectRef>
+          <a:fontRef idx="minor">
+            <a:schemeClr val="lt1"/>
+          </a:fontRef>
+        </p:style>
+        <p:txBody>
+          <a:bodyPr rtlCol="0" anchor="ctr"/>
+          <a:lstStyle/>
+          <a:p>
+            <a:pPr algn="ctr"/>
+          </a:p>
+        </p:txBody>
+      </p:sp>
+      <p:sp>
+        <p:nvSpPr>
+          <p:cNvPr id="12" name="TextBox 11"/>
+          <p:cNvSpPr txBox="1"/>
+          <p:nvPr/>
+        </p:nvSpPr>
+        <p:spPr>
+          <a:xfrm>
+            <a:off x="6208776" y="1426463"/>
+            <a:ext cx="384048" cy="347472"/>
+          </a:xfrm>
+          <a:prstGeom prst="rect">
+            <a:avLst/>
+          </a:prstGeom>
+          <a:noFill/>
+        </p:spPr>
+        <p:txBody>
+          <a:bodyPr wrap="square" lIns="45720" rIns="45720" tIns="36576" bIns="36576" anchor="t">
+            <a:spAutoFit/>
+          </a:bodyPr>
+          <a:lstStyle/>
+          <a:p>
+            <a:pPr algn="l">
+              <a:defRPr sz="1500" b="1">
+                <a:solidFill>
+                  <a:srgbClr val="CC4F3E"/>
+                </a:solidFill>
+                <a:latin typeface="Aptos"/>
+              </a:defRPr>
+            </a:pPr>
+            <a:r>
+              <a:t>02</a:t>
+            </a:r>
+          </a:p>
+        </p:txBody>
+      </p:sp>
+      <p:sp>
+        <p:nvSpPr>
+          <p:cNvPr id="13" name="TextBox 12"/>
+          <p:cNvSpPr txBox="1"/>
+          <p:nvPr/>
+        </p:nvSpPr>
+        <p:spPr>
+          <a:xfrm>
+            <a:off x="6665976" y="1426463"/>
+            <a:ext cx="4434840" cy="1961388"/>
+          </a:xfrm>
+          <a:prstGeom prst="rect">
+            <a:avLst/>
+          </a:prstGeom>
+          <a:noFill/>
+        </p:spPr>
+        <p:txBody>
+          <a:bodyPr wrap="square" lIns="45720" rIns="45720" tIns="36576" bIns="36576" anchor="t">
+            <a:spAutoFit/>
+          </a:bodyPr>
+          <a:lstStyle/>
+          <a:p>
+            <a:pPr algn="l">
+              <a:defRPr sz="1300" b="0">
+                <a:solidFill>
+                  <a:srgbClr val="1C2330"/>
+                </a:solidFill>
+                <a:latin typeface="Aptos"/>
+              </a:defRPr>
+            </a:pPr>
+            <a:r>
+              <a:t>desequilibrio que no puede compensarse razonablemente mediante funciones.</a:t>
+            </a:r>
+          </a:p>
+        </p:txBody>
+      </p:sp>
+      <p:sp>
+        <p:nvSpPr>
+          <p:cNvPr id="14" name="Rounded Rectangle 13"/>
+          <p:cNvSpPr/>
+          <p:nvPr/>
+        </p:nvSpPr>
+        <p:spPr>
+          <a:xfrm>
+            <a:off x="566928" y="3662172"/>
+            <a:ext cx="5212080" cy="2199132"/>
+          </a:xfrm>
+          <a:prstGeom prst="roundRect">
+            <a:avLst/>
+          </a:prstGeom>
+          <a:solidFill>
+            <a:srgbClr val="FFFFFF"/>
+          </a:solidFill>
+          <a:ln>
+            <a:solidFill>
+              <a:srgbClr val="E5E9EF"/>
+            </a:solidFill>
+          </a:ln>
+        </p:spPr>
+        <p:style>
+          <a:lnRef idx="1">
+            <a:schemeClr val="accent1"/>
+          </a:lnRef>
+          <a:fillRef idx="3">
+            <a:schemeClr val="accent1"/>
+          </a:fillRef>
+          <a:effectRef idx="2">
+            <a:schemeClr val="accent1"/>
+          </a:effectRef>
+          <a:fontRef idx="minor">
+            <a:schemeClr val="lt1"/>
+          </a:fontRef>
+        </p:style>
+        <p:txBody>
+          <a:bodyPr rtlCol="0" anchor="ctr"/>
+          <a:lstStyle/>
+          <a:p>
+            <a:pPr algn="ctr"/>
+          </a:p>
+        </p:txBody>
+      </p:sp>
+      <p:sp>
+        <p:nvSpPr>
+          <p:cNvPr id="15" name="TextBox 14"/>
+          <p:cNvSpPr txBox="1"/>
+          <p:nvPr/>
+        </p:nvSpPr>
+        <p:spPr>
+          <a:xfrm>
+            <a:off x="768096" y="3826763"/>
+            <a:ext cx="384048" cy="347472"/>
+          </a:xfrm>
+          <a:prstGeom prst="rect">
+            <a:avLst/>
+          </a:prstGeom>
+          <a:noFill/>
+        </p:spPr>
+        <p:txBody>
+          <a:bodyPr wrap="square" lIns="45720" rIns="45720" tIns="36576" bIns="36576" anchor="t">
+            <a:spAutoFit/>
+          </a:bodyPr>
+          <a:lstStyle/>
+          <a:p>
+            <a:pPr algn="l">
+              <a:defRPr sz="1500" b="1">
+                <a:solidFill>
+                  <a:srgbClr val="CC4F3E"/>
+                </a:solidFill>
+                <a:latin typeface="Aptos"/>
+              </a:defRPr>
+            </a:pPr>
+            <a:r>
+              <a:t>03</a:t>
+            </a:r>
+          </a:p>
+        </p:txBody>
+      </p:sp>
+      <p:sp>
+        <p:nvSpPr>
+          <p:cNvPr id="16" name="TextBox 15"/>
+          <p:cNvSpPr txBox="1"/>
+          <p:nvPr/>
+        </p:nvSpPr>
+        <p:spPr>
+          <a:xfrm>
+            <a:off x="1225295" y="3826763"/>
+            <a:ext cx="4434840" cy="1961388"/>
+          </a:xfrm>
+          <a:prstGeom prst="rect">
+            <a:avLst/>
+          </a:prstGeom>
+          <a:noFill/>
+        </p:spPr>
+        <p:txBody>
+          <a:bodyPr wrap="square" lIns="45720" rIns="45720" tIns="36576" bIns="36576" anchor="t">
+            <a:spAutoFit/>
+          </a:bodyPr>
+          <a:lstStyle/>
+          <a:p>
+            <a:pPr algn="l">
+              <a:defRPr sz="1300" b="0">
+                <a:solidFill>
+                  <a:srgbClr val="1C2330"/>
+                </a:solidFill>
+                <a:latin typeface="Aptos"/>
+              </a:defRPr>
+            </a:pPr>
+            <a:r>
+              <a:t>No se cambia un equipo solo porque: la torre cayó, no obtuvo gran altura, alguien prefiere trabajar con amistades, dos perfiles HADA coinciden, una persona obtuvo una puntuación menor en una columna.</a:t>
+            </a:r>
+          </a:p>
+        </p:txBody>
+      </p:sp>
+      <p:sp>
+        <p:nvSpPr>
+          <p:cNvPr id="17" name="Rounded Rectangle 16"/>
+          <p:cNvSpPr/>
+          <p:nvPr/>
+        </p:nvSpPr>
+        <p:spPr>
+          <a:xfrm>
+            <a:off x="6007608" y="3662172"/>
+            <a:ext cx="5212080" cy="2199132"/>
+          </a:xfrm>
+          <a:prstGeom prst="roundRect">
+            <a:avLst/>
+          </a:prstGeom>
+          <a:solidFill>
+            <a:srgbClr val="FFFFFF"/>
+          </a:solidFill>
+          <a:ln>
+            <a:solidFill>
+              <a:srgbClr val="E5E9EF"/>
+            </a:solidFill>
+          </a:ln>
+        </p:spPr>
+        <p:style>
+          <a:lnRef idx="1">
+            <a:schemeClr val="accent1"/>
+          </a:lnRef>
+          <a:fillRef idx="3">
+            <a:schemeClr val="accent1"/>
+          </a:fillRef>
+          <a:effectRef idx="2">
+            <a:schemeClr val="accent1"/>
+          </a:effectRef>
+          <a:fontRef idx="minor">
+            <a:schemeClr val="lt1"/>
+          </a:fontRef>
+        </p:style>
+        <p:txBody>
+          <a:bodyPr rtlCol="0" anchor="ctr"/>
+          <a:lstStyle/>
+          <a:p>
+            <a:pPr algn="ctr"/>
+          </a:p>
+        </p:txBody>
+      </p:sp>
+      <p:sp>
+        <p:nvSpPr>
+          <p:cNvPr id="18" name="TextBox 17"/>
+          <p:cNvSpPr txBox="1"/>
+          <p:nvPr/>
+        </p:nvSpPr>
+        <p:spPr>
+          <a:xfrm>
+            <a:off x="6208776" y="3826763"/>
+            <a:ext cx="384048" cy="347472"/>
+          </a:xfrm>
+          <a:prstGeom prst="rect">
+            <a:avLst/>
+          </a:prstGeom>
+          <a:noFill/>
+        </p:spPr>
+        <p:txBody>
+          <a:bodyPr wrap="square" lIns="45720" rIns="45720" tIns="36576" bIns="36576" anchor="t">
+            <a:spAutoFit/>
+          </a:bodyPr>
+          <a:lstStyle/>
+          <a:p>
+            <a:pPr algn="l">
+              <a:defRPr sz="1500" b="1">
+                <a:solidFill>
+                  <a:srgbClr val="CC4F3E"/>
+                </a:solidFill>
+                <a:latin typeface="Aptos"/>
+              </a:defRPr>
+            </a:pPr>
+            <a:r>
+              <a:t>04</a:t>
+            </a:r>
+          </a:p>
+        </p:txBody>
+      </p:sp>
+      <p:sp>
+        <p:nvSpPr>
+          <p:cNvPr id="19" name="TextBox 18"/>
+          <p:cNvSpPr txBox="1"/>
+          <p:nvPr/>
+        </p:nvSpPr>
+        <p:spPr>
+          <a:xfrm>
+            <a:off x="6665976" y="3826763"/>
+            <a:ext cx="4434840" cy="1961388"/>
+          </a:xfrm>
+          <a:prstGeom prst="rect">
+            <a:avLst/>
+          </a:prstGeom>
+          <a:noFill/>
+        </p:spPr>
+        <p:txBody>
+          <a:bodyPr wrap="square" lIns="45720" rIns="45720" tIns="36576" bIns="36576" anchor="t">
+            <a:spAutoFit/>
+          </a:bodyPr>
+          <a:lstStyle/>
+          <a:p>
+            <a:pPr algn="l">
+              <a:defRPr sz="1300" b="0">
+                <a:solidFill>
+                  <a:srgbClr val="1C2330"/>
+                </a:solidFill>
+                <a:latin typeface="Aptos"/>
+              </a:defRPr>
+            </a:pPr>
+            <a:r>
+              <a:t>La decisión final de cambio corresponde al profesorado después de escuchar individualmente cuando sea necesario. No obligues al equipo a debatir públicamente información confidencial.</a:t>
+            </a:r>
+          </a:p>
+        </p:txBody>
+      </p:sp>
+    </p:spTree>
+  </p:cSld>
+  <p:clrMapOvr>
+    <a:masterClrMapping/>
+  </p:clrMapOvr>
+</p:sld>
+</file>
+
+<file path=ppt/slides/slide7.xml><?xml version="1.0" encoding="utf-8"?>
+<p:sld xmlns:a="http://schemas.openxmlformats.org/drawingml/2006/main" xmlns:p="http://schemas.openxmlformats.org/presentationml/2006/main" xmlns:r="http://schemas.openxmlformats.org/officeDocument/2006/relationships">
+  <p:cSld>
+    <p:spTree>
+      <p:nvGrpSpPr>
+        <p:cNvPr id="1" name=""/>
+        <p:cNvGrpSpPr/>
+        <p:nvPr/>
+      </p:nvGrpSpPr>
+      <p:grpSpPr/>
+      <p:sp>
+        <p:nvSpPr>
+          <p:cNvPr id="2" name="Rectangle 1"/>
+          <p:cNvSpPr/>
+          <p:nvPr/>
+        </p:nvSpPr>
+        <p:spPr>
+          <a:xfrm>
+            <a:off x="0" y="0"/>
+            <a:ext cx="12191695" cy="6858000"/>
+          </a:xfrm>
+          <a:prstGeom prst="rect">
+            <a:avLst/>
+          </a:prstGeom>
+          <a:solidFill>
+            <a:srgbClr val="F9F7F2"/>
+          </a:solidFill>
+          <a:ln>
+            <a:noFill/>
+          </a:ln>
+        </p:spPr>
+        <p:style>
+          <a:lnRef idx="1">
+            <a:schemeClr val="accent1"/>
+          </a:lnRef>
+          <a:fillRef idx="3">
+            <a:schemeClr val="accent1"/>
+          </a:fillRef>
+          <a:effectRef idx="2">
+            <a:schemeClr val="accent1"/>
+          </a:effectRef>
+          <a:fontRef idx="minor">
+            <a:schemeClr val="lt1"/>
+          </a:fontRef>
+        </p:style>
+        <p:txBody>
+          <a:bodyPr rtlCol="0" anchor="ctr"/>
+          <a:lstStyle/>
+          <a:p>
+            <a:pPr algn="ctr"/>
+          </a:p>
+        </p:txBody>
+      </p:sp>
+      <p:sp>
+        <p:nvSpPr>
+          <p:cNvPr id="3" name="Rectangle 2"/>
+          <p:cNvSpPr/>
+          <p:nvPr/>
+        </p:nvSpPr>
+        <p:spPr>
+          <a:xfrm>
+            <a:off x="0" y="0"/>
+            <a:ext cx="164592" cy="6858000"/>
+          </a:xfrm>
+          <a:prstGeom prst="rect">
             <a:avLst/>
           </a:prstGeom>
           <a:solidFill>
@@ -5969,14 +8101,14 @@
       </p:sp>
       <p:sp>
         <p:nvSpPr>
-          <p:cNvPr id="9" name="TextBox 8"/>
+          <p:cNvPr id="4" name="TextBox 3"/>
           <p:cNvSpPr txBox="1"/>
           <p:nvPr/>
         </p:nvSpPr>
         <p:spPr>
           <a:xfrm>
-            <a:off x="960120" y="1618488"/>
-            <a:ext cx="10195560" cy="320040"/>
+            <a:off x="502920" y="274320"/>
+            <a:ext cx="5486400" cy="256032"/>
           </a:xfrm>
           <a:prstGeom prst="rect">
             <a:avLst/>
@@ -5984,13 +8116,128 @@
           <a:noFill/>
         </p:spPr>
         <p:txBody>
-          <a:bodyPr wrap="square" lIns="36576" rIns="36576" tIns="27432" bIns="27432">
+          <a:bodyPr wrap="square" lIns="45720" rIns="45720" tIns="36576" bIns="36576" anchor="t">
             <a:spAutoFit/>
           </a:bodyPr>
           <a:lstStyle/>
           <a:p>
             <a:pPr algn="l">
-              <a:defRPr sz="1400" b="1">
+              <a:defRPr sz="1000" b="1">
+                <a:solidFill>
+                  <a:srgbClr val="CC4F3E"/>
+                </a:solidFill>
+                <a:latin typeface="Aptos"/>
+              </a:defRPr>
+            </a:pPr>
+            <a:r>
+              <a:t>RELACIONAR SIN ENCASILLAR</a:t>
+            </a:r>
+          </a:p>
+        </p:txBody>
+      </p:sp>
+      <p:sp>
+        <p:nvSpPr>
+          <p:cNvPr id="5" name="TextBox 4"/>
+          <p:cNvSpPr txBox="1"/>
+          <p:nvPr/>
+        </p:nvSpPr>
+        <p:spPr>
+          <a:xfrm>
+            <a:off x="502920" y="603504"/>
+            <a:ext cx="11064240" cy="530352"/>
+          </a:xfrm>
+          <a:prstGeom prst="rect">
+            <a:avLst/>
+          </a:prstGeom>
+          <a:noFill/>
+        </p:spPr>
+        <p:txBody>
+          <a:bodyPr wrap="square" lIns="45720" rIns="45720" tIns="36576" bIns="36576" anchor="t">
+            <a:spAutoFit/>
+          </a:bodyPr>
+          <a:lstStyle/>
+          <a:p>
+            <a:pPr algn="l">
+              <a:defRPr sz="2800" b="1">
+                <a:solidFill>
+                  <a:srgbClr val="1C2330"/>
+                </a:solidFill>
+                <a:latin typeface="Aptos"/>
+              </a:defRPr>
+            </a:pPr>
+            <a:r>
+              <a:t>HADA orienta; las funciones se acuerdan</a:t>
+            </a:r>
+          </a:p>
+        </p:txBody>
+      </p:sp>
+      <p:sp>
+        <p:nvSpPr>
+          <p:cNvPr id="6" name="Rectangle 5"/>
+          <p:cNvSpPr/>
+          <p:nvPr/>
+        </p:nvSpPr>
+        <p:spPr>
+          <a:xfrm>
+            <a:off x="0" y="6601968"/>
+            <a:ext cx="12191695" cy="256032"/>
+          </a:xfrm>
+          <a:prstGeom prst="rect">
+            <a:avLst/>
+          </a:prstGeom>
+          <a:solidFill>
+            <a:srgbClr val="CC4F3E"/>
+          </a:solidFill>
+          <a:ln>
+            <a:noFill/>
+          </a:ln>
+        </p:spPr>
+        <p:style>
+          <a:lnRef idx="1">
+            <a:schemeClr val="accent1"/>
+          </a:lnRef>
+          <a:fillRef idx="3">
+            <a:schemeClr val="accent1"/>
+          </a:fillRef>
+          <a:effectRef idx="2">
+            <a:schemeClr val="accent1"/>
+          </a:effectRef>
+          <a:fontRef idx="minor">
+            <a:schemeClr val="lt1"/>
+          </a:fontRef>
+        </p:style>
+        <p:txBody>
+          <a:bodyPr rtlCol="0" anchor="ctr"/>
+          <a:lstStyle/>
+          <a:p>
+            <a:pPr algn="ctr"/>
+          </a:p>
+        </p:txBody>
+      </p:sp>
+      <p:sp>
+        <p:nvSpPr>
+          <p:cNvPr id="7" name="TextBox 6"/>
+          <p:cNvSpPr txBox="1"/>
+          <p:nvPr/>
+        </p:nvSpPr>
+        <p:spPr>
+          <a:xfrm>
+            <a:off x="411480" y="6629400"/>
+            <a:ext cx="11247120" cy="164592"/>
+          </a:xfrm>
+          <a:prstGeom prst="rect">
+            <a:avLst/>
+          </a:prstGeom>
+          <a:noFill/>
+        </p:spPr>
+        <p:txBody>
+          <a:bodyPr wrap="square" lIns="45720" rIns="45720" tIns="36576" bIns="36576" anchor="t">
+            <a:spAutoFit/>
+          </a:bodyPr>
+          <a:lstStyle/>
+          <a:p>
+            <a:pPr algn="l">
+              <a:defRPr sz="900" b="0">
                 <a:solidFill>
                   <a:srgbClr val="FFFFFF"/>
                 </a:solidFill>
@@ -5998,164 +8245,21 @@
               </a:defRPr>
             </a:pPr>
             <a:r>
-              <a:t>PREGUNTA DE SALIDA</a:t>
-            </a:r>
-          </a:p>
-        </p:txBody>
-      </p:sp>
-      <p:sp>
-        <p:nvSpPr>
-          <p:cNvPr id="10" name="TextBox 9"/>
-          <p:cNvSpPr txBox="1"/>
-          <p:nvPr/>
-        </p:nvSpPr>
-        <p:spPr>
-          <a:xfrm>
-            <a:off x="960120" y="2057400"/>
-            <a:ext cx="10058400" cy="822960"/>
-          </a:xfrm>
-          <a:prstGeom prst="rect">
-            <a:avLst/>
-          </a:prstGeom>
-          <a:noFill/>
-        </p:spPr>
-        <p:txBody>
-          <a:bodyPr wrap="square" lIns="36576" rIns="36576" tIns="27432" bIns="27432">
-            <a:spAutoFit/>
-          </a:bodyPr>
-          <a:lstStyle/>
-          <a:p>
-            <a:pPr algn="l">
-              <a:defRPr sz="2700" b="1">
-                <a:solidFill>
-                  <a:srgbClr val="FFFFFF"/>
-                </a:solidFill>
-                <a:latin typeface="Aptos"/>
-              </a:defRPr>
-            </a:pPr>
-            <a:r>
-              <a:t>¿Qué has hecho y cómo sabes que funciona?</a:t>
-            </a:r>
-          </a:p>
-        </p:txBody>
-      </p:sp>
-      <p:sp>
-        <p:nvSpPr>
-          <p:cNvPr id="11" name="TextBox 10"/>
-          <p:cNvSpPr txBox="1"/>
-          <p:nvPr/>
-        </p:nvSpPr>
-        <p:spPr>
-          <a:xfrm>
-            <a:off x="713232" y="3703320"/>
-            <a:ext cx="3749039" cy="320040"/>
-          </a:xfrm>
-          <a:prstGeom prst="rect">
-            <a:avLst/>
-          </a:prstGeom>
-          <a:noFill/>
-        </p:spPr>
-        <p:txBody>
-          <a:bodyPr wrap="square" lIns="36576" rIns="36576" tIns="27432" bIns="27432">
-            <a:spAutoFit/>
-          </a:bodyPr>
-          <a:lstStyle/>
-          <a:p>
-            <a:pPr algn="l">
-              <a:defRPr sz="1500" b="1">
-                <a:solidFill>
-                  <a:srgbClr val="CC4F3E"/>
-                </a:solidFill>
-                <a:latin typeface="Aptos"/>
-              </a:defRPr>
-            </a:pPr>
-            <a:r>
-              <a:t>RECUERDA</a:t>
-            </a:r>
-          </a:p>
-        </p:txBody>
-      </p:sp>
-      <p:sp>
-        <p:nvSpPr>
-          <p:cNvPr id="12" name="TextBox 11"/>
-          <p:cNvSpPr txBox="1"/>
-          <p:nvPr/>
-        </p:nvSpPr>
-        <p:spPr>
-          <a:xfrm>
-            <a:off x="713232" y="4114800"/>
-            <a:ext cx="6583680" cy="1691640"/>
-          </a:xfrm>
-          <a:prstGeom prst="rect">
-            <a:avLst/>
-          </a:prstGeom>
-          <a:noFill/>
-        </p:spPr>
-        <p:txBody>
-          <a:bodyPr wrap="square" lIns="73152" rIns="45720" tIns="36576">
-            <a:spAutoFit/>
-          </a:bodyPr>
-          <a:lstStyle/>
-          <a:p>
-            <a:pPr>
-              <a:spcAft>
-                <a:spcPts val="1000"/>
-              </a:spcAft>
-              <a:defRPr sz="1700">
-                <a:solidFill>
-                  <a:srgbClr val="1C2330"/>
-                </a:solidFill>
-                <a:latin typeface="Aptos"/>
-              </a:defRPr>
-            </a:pPr>
-            <a:r>
-              <a:t>•  Usa datos ficticios.</a:t>
-            </a:r>
-          </a:p>
-          <a:p>
-            <a:pPr>
-              <a:spcAft>
-                <a:spcPts val="1000"/>
-              </a:spcAft>
-              <a:defRPr sz="1700">
-                <a:solidFill>
-                  <a:srgbClr val="1C2330"/>
-                </a:solidFill>
-                <a:latin typeface="Aptos"/>
-              </a:defRPr>
-            </a:pPr>
-            <a:r>
-              <a:t>•  No compartas contraseñas ni claves.</a:t>
-            </a:r>
-          </a:p>
-          <a:p>
-            <a:pPr>
-              <a:spcAft>
-                <a:spcPts val="1000"/>
-              </a:spcAft>
-              <a:defRPr sz="1700">
-                <a:solidFill>
-                  <a:srgbClr val="1C2330"/>
-                </a:solidFill>
-                <a:latin typeface="Aptos"/>
-              </a:defRPr>
-            </a:pPr>
-            <a:r>
-              <a:t>•  Registra y valida cualquier uso de IA.</a:t>
-            </a:r>
-          </a:p>
-        </p:txBody>
-      </p:sp>
-      <p:sp>
-        <p:nvSpPr>
-          <p:cNvPr id="13" name="Rounded Rectangle 12"/>
+              <a:t>MiniJarvis · 1.º DAW · Sesión 205 · H0 — Formación y prueba de equipos Scrum mediante la torre de papel</a:t>
+            </a:r>
+          </a:p>
+        </p:txBody>
+      </p:sp>
+      <p:sp>
+        <p:nvSpPr>
+          <p:cNvPr id="8" name="Rounded Rectangle 7"/>
           <p:cNvSpPr/>
           <p:nvPr/>
         </p:nvSpPr>
         <p:spPr>
           <a:xfrm>
-            <a:off x="7726679" y="3794760"/>
-            <a:ext cx="3703320" cy="1600200"/>
+            <a:off x="621792" y="1298448"/>
+            <a:ext cx="5230368" cy="1700784"/>
           </a:xfrm>
           <a:prstGeom prst="roundRect">
             <a:avLst/>
@@ -6165,7 +8269,7 @@
           </a:solidFill>
           <a:ln>
             <a:solidFill>
-              <a:srgbClr val="EBEEF2"/>
+              <a:srgbClr val="E5E9EF"/>
             </a:solidFill>
           </a:ln>
         </p:spPr>
@@ -6193,14 +8297,14 @@
       </p:sp>
       <p:sp>
         <p:nvSpPr>
-          <p:cNvPr id="14" name="TextBox 13"/>
+          <p:cNvPr id="9" name="TextBox 8"/>
           <p:cNvSpPr txBox="1"/>
           <p:nvPr/>
         </p:nvSpPr>
         <p:spPr>
           <a:xfrm>
-            <a:off x="8028431" y="4087368"/>
-            <a:ext cx="3063240" cy="868680"/>
+            <a:off x="822960" y="1463039"/>
+            <a:ext cx="475488" cy="320040"/>
           </a:xfrm>
           <a:prstGeom prst="rect">
             <a:avLst/>
@@ -6208,21 +8312,2034 @@
           <a:noFill/>
         </p:spPr>
         <p:txBody>
-          <a:bodyPr wrap="square" lIns="36576" rIns="36576" tIns="27432" bIns="27432">
+          <a:bodyPr wrap="square" lIns="45720" rIns="45720" tIns="36576" bIns="36576" anchor="t">
             <a:spAutoFit/>
           </a:bodyPr>
           <a:lstStyle/>
           <a:p>
+            <a:pPr algn="l">
+              <a:defRPr sz="1400" b="1">
+                <a:solidFill>
+                  <a:srgbClr val="CC4F3E"/>
+                </a:solidFill>
+                <a:latin typeface="Aptos"/>
+              </a:defRPr>
+            </a:pPr>
+            <a:r>
+              <a:t>01</a:t>
+            </a:r>
+          </a:p>
+        </p:txBody>
+      </p:sp>
+      <p:sp>
+        <p:nvSpPr>
+          <p:cNvPr id="10" name="TextBox 9"/>
+          <p:cNvSpPr txBox="1"/>
+          <p:nvPr/>
+        </p:nvSpPr>
+        <p:spPr>
+          <a:xfrm>
+            <a:off x="1371600" y="1444751"/>
+            <a:ext cx="4224528" cy="1325880"/>
+          </a:xfrm>
+          <a:prstGeom prst="rect">
+            <a:avLst/>
+          </a:prstGeom>
+          <a:noFill/>
+        </p:spPr>
+        <p:txBody>
+          <a:bodyPr wrap="square" lIns="45720" rIns="45720" tIns="36576" bIns="36576" anchor="t">
+            <a:spAutoFit/>
+          </a:bodyPr>
+          <a:lstStyle/>
+          <a:p>
+            <a:pPr algn="l">
+              <a:defRPr sz="1600" b="0">
+                <a:solidFill>
+                  <a:srgbClr val="1C2330"/>
+                </a:solidFill>
+                <a:latin typeface="Aptos"/>
+              </a:defRPr>
+            </a:pPr>
+            <a:r>
+              <a:t>Gestor — natural: valor, backlog y tiempo · practicar: escucha y revisión</a:t>
+            </a:r>
+          </a:p>
+        </p:txBody>
+      </p:sp>
+      <p:sp>
+        <p:nvSpPr>
+          <p:cNvPr id="11" name="Rounded Rectangle 10"/>
+          <p:cNvSpPr/>
+          <p:nvPr/>
+        </p:nvSpPr>
+        <p:spPr>
+          <a:xfrm>
+            <a:off x="6144768" y="1298448"/>
+            <a:ext cx="5230368" cy="1700784"/>
+          </a:xfrm>
+          <a:prstGeom prst="roundRect">
+            <a:avLst/>
+          </a:prstGeom>
+          <a:solidFill>
+            <a:srgbClr val="FFFFFF"/>
+          </a:solidFill>
+          <a:ln>
+            <a:solidFill>
+              <a:srgbClr val="E5E9EF"/>
+            </a:solidFill>
+          </a:ln>
+        </p:spPr>
+        <p:style>
+          <a:lnRef idx="1">
+            <a:schemeClr val="accent1"/>
+          </a:lnRef>
+          <a:fillRef idx="3">
+            <a:schemeClr val="accent1"/>
+          </a:fillRef>
+          <a:effectRef idx="2">
+            <a:schemeClr val="accent1"/>
+          </a:effectRef>
+          <a:fontRef idx="minor">
+            <a:schemeClr val="lt1"/>
+          </a:fontRef>
+        </p:style>
+        <p:txBody>
+          <a:bodyPr rtlCol="0" anchor="ctr"/>
+          <a:lstStyle/>
+          <a:p>
+            <a:pPr algn="ctr"/>
+          </a:p>
+        </p:txBody>
+      </p:sp>
+      <p:sp>
+        <p:nvSpPr>
+          <p:cNvPr id="12" name="TextBox 11"/>
+          <p:cNvSpPr txBox="1"/>
+          <p:nvPr/>
+        </p:nvSpPr>
+        <p:spPr>
+          <a:xfrm>
+            <a:off x="6345936" y="1463039"/>
+            <a:ext cx="475488" cy="320040"/>
+          </a:xfrm>
+          <a:prstGeom prst="rect">
+            <a:avLst/>
+          </a:prstGeom>
+          <a:noFill/>
+        </p:spPr>
+        <p:txBody>
+          <a:bodyPr wrap="square" lIns="45720" rIns="45720" tIns="36576" bIns="36576" anchor="t">
+            <a:spAutoFit/>
+          </a:bodyPr>
+          <a:lstStyle/>
+          <a:p>
+            <a:pPr algn="l">
+              <a:defRPr sz="1400" b="1">
+                <a:solidFill>
+                  <a:srgbClr val="CC4F3E"/>
+                </a:solidFill>
+                <a:latin typeface="Aptos"/>
+              </a:defRPr>
+            </a:pPr>
+            <a:r>
+              <a:t>02</a:t>
+            </a:r>
+          </a:p>
+        </p:txBody>
+      </p:sp>
+      <p:sp>
+        <p:nvSpPr>
+          <p:cNvPr id="13" name="TextBox 12"/>
+          <p:cNvSpPr txBox="1"/>
+          <p:nvPr/>
+        </p:nvSpPr>
+        <p:spPr>
+          <a:xfrm>
+            <a:off x="6894576" y="1444751"/>
+            <a:ext cx="4224528" cy="1325880"/>
+          </a:xfrm>
+          <a:prstGeom prst="rect">
+            <a:avLst/>
+          </a:prstGeom>
+          <a:noFill/>
+        </p:spPr>
+        <p:txBody>
+          <a:bodyPr wrap="square" lIns="45720" rIns="45720" tIns="36576" bIns="36576" anchor="t">
+            <a:spAutoFit/>
+          </a:bodyPr>
+          <a:lstStyle/>
+          <a:p>
+            <a:pPr algn="l">
+              <a:defRPr sz="1600" b="0">
+                <a:solidFill>
+                  <a:srgbClr val="1C2330"/>
+                </a:solidFill>
+                <a:latin typeface="Aptos"/>
+              </a:defRPr>
+            </a:pPr>
+            <a:r>
+              <a:t>Colaborador — natural: facilitación y mediación · practicar: priorización y crítica</a:t>
+            </a:r>
+          </a:p>
+        </p:txBody>
+      </p:sp>
+      <p:sp>
+        <p:nvSpPr>
+          <p:cNvPr id="14" name="Rounded Rectangle 13"/>
+          <p:cNvSpPr/>
+          <p:nvPr/>
+        </p:nvSpPr>
+        <p:spPr>
+          <a:xfrm>
+            <a:off x="621792" y="3291840"/>
+            <a:ext cx="5230368" cy="1700784"/>
+          </a:xfrm>
+          <a:prstGeom prst="roundRect">
+            <a:avLst/>
+          </a:prstGeom>
+          <a:solidFill>
+            <a:srgbClr val="FFFFFF"/>
+          </a:solidFill>
+          <a:ln>
+            <a:solidFill>
+              <a:srgbClr val="E5E9EF"/>
+            </a:solidFill>
+          </a:ln>
+        </p:spPr>
+        <p:style>
+          <a:lnRef idx="1">
+            <a:schemeClr val="accent1"/>
+          </a:lnRef>
+          <a:fillRef idx="3">
+            <a:schemeClr val="accent1"/>
+          </a:fillRef>
+          <a:effectRef idx="2">
+            <a:schemeClr val="accent1"/>
+          </a:effectRef>
+          <a:fontRef idx="minor">
+            <a:schemeClr val="lt1"/>
+          </a:fontRef>
+        </p:style>
+        <p:txBody>
+          <a:bodyPr rtlCol="0" anchor="ctr"/>
+          <a:lstStyle/>
+          <a:p>
+            <a:pPr algn="ctr"/>
+          </a:p>
+        </p:txBody>
+      </p:sp>
+      <p:sp>
+        <p:nvSpPr>
+          <p:cNvPr id="15" name="TextBox 14"/>
+          <p:cNvSpPr txBox="1"/>
+          <p:nvPr/>
+        </p:nvSpPr>
+        <p:spPr>
+          <a:xfrm>
+            <a:off x="822960" y="3456432"/>
+            <a:ext cx="475488" cy="320040"/>
+          </a:xfrm>
+          <a:prstGeom prst="rect">
+            <a:avLst/>
+          </a:prstGeom>
+          <a:noFill/>
+        </p:spPr>
+        <p:txBody>
+          <a:bodyPr wrap="square" lIns="45720" rIns="45720" tIns="36576" bIns="36576" anchor="t">
+            <a:spAutoFit/>
+          </a:bodyPr>
+          <a:lstStyle/>
+          <a:p>
+            <a:pPr algn="l">
+              <a:defRPr sz="1400" b="1">
+                <a:solidFill>
+                  <a:srgbClr val="CC4F3E"/>
+                </a:solidFill>
+                <a:latin typeface="Aptos"/>
+              </a:defRPr>
+            </a:pPr>
+            <a:r>
+              <a:t>03</a:t>
+            </a:r>
+          </a:p>
+        </p:txBody>
+      </p:sp>
+      <p:sp>
+        <p:nvSpPr>
+          <p:cNvPr id="16" name="TextBox 15"/>
+          <p:cNvSpPr txBox="1"/>
+          <p:nvPr/>
+        </p:nvSpPr>
+        <p:spPr>
+          <a:xfrm>
+            <a:off x="1371600" y="3438144"/>
+            <a:ext cx="4224528" cy="1325880"/>
+          </a:xfrm>
+          <a:prstGeom prst="rect">
+            <a:avLst/>
+          </a:prstGeom>
+          <a:noFill/>
+        </p:spPr>
+        <p:txBody>
+          <a:bodyPr wrap="square" lIns="45720" rIns="45720" tIns="36576" bIns="36576" anchor="t">
+            <a:spAutoFit/>
+          </a:bodyPr>
+          <a:lstStyle/>
+          <a:p>
+            <a:pPr algn="l">
+              <a:defRPr sz="1600" b="0">
+                <a:solidFill>
+                  <a:srgbClr val="1C2330"/>
+                </a:solidFill>
+                <a:latin typeface="Aptos"/>
+              </a:defRPr>
+            </a:pPr>
+            <a:r>
+              <a:t>Desarrollador — natural: ideas y prototipado · practicar: cierre, prueba y documentación</a:t>
+            </a:r>
+          </a:p>
+        </p:txBody>
+      </p:sp>
+      <p:sp>
+        <p:nvSpPr>
+          <p:cNvPr id="17" name="Rounded Rectangle 16"/>
+          <p:cNvSpPr/>
+          <p:nvPr/>
+        </p:nvSpPr>
+        <p:spPr>
+          <a:xfrm>
+            <a:off x="6144768" y="3291840"/>
+            <a:ext cx="5230368" cy="1700784"/>
+          </a:xfrm>
+          <a:prstGeom prst="roundRect">
+            <a:avLst/>
+          </a:prstGeom>
+          <a:solidFill>
+            <a:srgbClr val="FFFFFF"/>
+          </a:solidFill>
+          <a:ln>
+            <a:solidFill>
+              <a:srgbClr val="E5E9EF"/>
+            </a:solidFill>
+          </a:ln>
+        </p:spPr>
+        <p:style>
+          <a:lnRef idx="1">
+            <a:schemeClr val="accent1"/>
+          </a:lnRef>
+          <a:fillRef idx="3">
+            <a:schemeClr val="accent1"/>
+          </a:fillRef>
+          <a:effectRef idx="2">
+            <a:schemeClr val="accent1"/>
+          </a:effectRef>
+          <a:fontRef idx="minor">
+            <a:schemeClr val="lt1"/>
+          </a:fontRef>
+        </p:style>
+        <p:txBody>
+          <a:bodyPr rtlCol="0" anchor="ctr"/>
+          <a:lstStyle/>
+          <a:p>
+            <a:pPr algn="ctr"/>
+          </a:p>
+        </p:txBody>
+      </p:sp>
+      <p:sp>
+        <p:nvSpPr>
+          <p:cNvPr id="18" name="TextBox 17"/>
+          <p:cNvSpPr txBox="1"/>
+          <p:nvPr/>
+        </p:nvSpPr>
+        <p:spPr>
+          <a:xfrm>
+            <a:off x="6345936" y="3456432"/>
+            <a:ext cx="475488" cy="320040"/>
+          </a:xfrm>
+          <a:prstGeom prst="rect">
+            <a:avLst/>
+          </a:prstGeom>
+          <a:noFill/>
+        </p:spPr>
+        <p:txBody>
+          <a:bodyPr wrap="square" lIns="45720" rIns="45720" tIns="36576" bIns="36576" anchor="t">
+            <a:spAutoFit/>
+          </a:bodyPr>
+          <a:lstStyle/>
+          <a:p>
+            <a:pPr algn="l">
+              <a:defRPr sz="1400" b="1">
+                <a:solidFill>
+                  <a:srgbClr val="CC4F3E"/>
+                </a:solidFill>
+                <a:latin typeface="Aptos"/>
+              </a:defRPr>
+            </a:pPr>
+            <a:r>
+              <a:t>04</a:t>
+            </a:r>
+          </a:p>
+        </p:txBody>
+      </p:sp>
+      <p:sp>
+        <p:nvSpPr>
+          <p:cNvPr id="19" name="TextBox 18"/>
+          <p:cNvSpPr txBox="1"/>
+          <p:nvPr/>
+        </p:nvSpPr>
+        <p:spPr>
+          <a:xfrm>
+            <a:off x="6894576" y="3438144"/>
+            <a:ext cx="4224528" cy="1325880"/>
+          </a:xfrm>
+          <a:prstGeom prst="rect">
+            <a:avLst/>
+          </a:prstGeom>
+          <a:noFill/>
+        </p:spPr>
+        <p:txBody>
+          <a:bodyPr wrap="square" lIns="45720" rIns="45720" tIns="36576" bIns="36576" anchor="t">
+            <a:spAutoFit/>
+          </a:bodyPr>
+          <a:lstStyle/>
+          <a:p>
+            <a:pPr algn="l">
+              <a:defRPr sz="1600" b="0">
+                <a:solidFill>
+                  <a:srgbClr val="1C2330"/>
+                </a:solidFill>
+                <a:latin typeface="Aptos"/>
+              </a:defRPr>
+            </a:pPr>
+            <a:r>
+              <a:t>Analista — natural: calidad y prueba · practicar: experimentación y comunicación</a:t>
+            </a:r>
+          </a:p>
+        </p:txBody>
+      </p:sp>
+      <p:sp>
+        <p:nvSpPr>
+          <p:cNvPr id="20" name="Rounded Rectangle 19"/>
+          <p:cNvSpPr/>
+          <p:nvPr/>
+        </p:nvSpPr>
+        <p:spPr>
+          <a:xfrm>
+            <a:off x="621792" y="5422392"/>
+            <a:ext cx="10927080" cy="758952"/>
+          </a:xfrm>
+          <a:prstGeom prst="roundRect">
+            <a:avLst/>
+          </a:prstGeom>
+          <a:solidFill>
+            <a:srgbClr val="CC4F3E"/>
+          </a:solidFill>
+          <a:ln>
+            <a:solidFill>
+              <a:srgbClr val="CC4F3E"/>
+            </a:solidFill>
+          </a:ln>
+        </p:spPr>
+        <p:style>
+          <a:lnRef idx="1">
+            <a:schemeClr val="accent1"/>
+          </a:lnRef>
+          <a:fillRef idx="3">
+            <a:schemeClr val="accent1"/>
+          </a:fillRef>
+          <a:effectRef idx="2">
+            <a:schemeClr val="accent1"/>
+          </a:effectRef>
+          <a:fontRef idx="minor">
+            <a:schemeClr val="lt1"/>
+          </a:fontRef>
+        </p:style>
+        <p:txBody>
+          <a:bodyPr rtlCol="0" anchor="ctr"/>
+          <a:lstStyle/>
+          <a:p>
+            <a:pPr algn="ctr"/>
+          </a:p>
+        </p:txBody>
+      </p:sp>
+      <p:sp>
+        <p:nvSpPr>
+          <p:cNvPr id="21" name="TextBox 20"/>
+          <p:cNvSpPr txBox="1"/>
+          <p:nvPr/>
+        </p:nvSpPr>
+        <p:spPr>
+          <a:xfrm>
+            <a:off x="877824" y="5596128"/>
+            <a:ext cx="10378440" cy="384048"/>
+          </a:xfrm>
+          <a:prstGeom prst="rect">
+            <a:avLst/>
+          </a:prstGeom>
+          <a:noFill/>
+        </p:spPr>
+        <p:txBody>
+          <a:bodyPr wrap="square" lIns="45720" rIns="45720" tIns="36576" bIns="36576" anchor="t">
+            <a:spAutoFit/>
+          </a:bodyPr>
+          <a:lstStyle/>
+          <a:p>
             <a:pPr algn="ctr">
-              <a:defRPr sz="1800" b="1">
-                <a:solidFill>
-                  <a:srgbClr val="247E5C"/>
+              <a:defRPr sz="1600" b="1">
+                <a:solidFill>
+                  <a:srgbClr val="FFFFFF"/>
                 </a:solidFill>
                 <a:latin typeface="Aptos"/>
               </a:defRPr>
             </a:pPr>
             <a:r>
-              <a:t>La sesión termina cuando la evidencia existe, está comprobada y puedes defenderla.</a:t>
+              <a:t>La tabla orienta una conversación; no asigna funciones automáticamente.</a:t>
+            </a:r>
+          </a:p>
+        </p:txBody>
+      </p:sp>
+    </p:spTree>
+  </p:cSld>
+  <p:clrMapOvr>
+    <a:masterClrMapping/>
+  </p:clrMapOvr>
+</p:sld>
+</file>
+
+<file path=ppt/slides/slide8.xml><?xml version="1.0" encoding="utf-8"?>
+<p:sld xmlns:a="http://schemas.openxmlformats.org/drawingml/2006/main" xmlns:p="http://schemas.openxmlformats.org/presentationml/2006/main" xmlns:r="http://schemas.openxmlformats.org/officeDocument/2006/relationships">
+  <p:cSld>
+    <p:spTree>
+      <p:nvGrpSpPr>
+        <p:cNvPr id="1" name=""/>
+        <p:cNvGrpSpPr/>
+        <p:nvPr/>
+      </p:nvGrpSpPr>
+      <p:grpSpPr/>
+      <p:sp>
+        <p:nvSpPr>
+          <p:cNvPr id="2" name="Rectangle 1"/>
+          <p:cNvSpPr/>
+          <p:nvPr/>
+        </p:nvSpPr>
+        <p:spPr>
+          <a:xfrm>
+            <a:off x="0" y="0"/>
+            <a:ext cx="12191695" cy="6858000"/>
+          </a:xfrm>
+          <a:prstGeom prst="rect">
+            <a:avLst/>
+          </a:prstGeom>
+          <a:solidFill>
+            <a:srgbClr val="F9F7F2"/>
+          </a:solidFill>
+          <a:ln>
+            <a:noFill/>
+          </a:ln>
+        </p:spPr>
+        <p:style>
+          <a:lnRef idx="1">
+            <a:schemeClr val="accent1"/>
+          </a:lnRef>
+          <a:fillRef idx="3">
+            <a:schemeClr val="accent1"/>
+          </a:fillRef>
+          <a:effectRef idx="2">
+            <a:schemeClr val="accent1"/>
+          </a:effectRef>
+          <a:fontRef idx="minor">
+            <a:schemeClr val="lt1"/>
+          </a:fontRef>
+        </p:style>
+        <p:txBody>
+          <a:bodyPr rtlCol="0" anchor="ctr"/>
+          <a:lstStyle/>
+          <a:p>
+            <a:pPr algn="ctr"/>
+          </a:p>
+        </p:txBody>
+      </p:sp>
+      <p:sp>
+        <p:nvSpPr>
+          <p:cNvPr id="3" name="Rectangle 2"/>
+          <p:cNvSpPr/>
+          <p:nvPr/>
+        </p:nvSpPr>
+        <p:spPr>
+          <a:xfrm>
+            <a:off x="0" y="0"/>
+            <a:ext cx="164592" cy="6858000"/>
+          </a:xfrm>
+          <a:prstGeom prst="rect">
+            <a:avLst/>
+          </a:prstGeom>
+          <a:solidFill>
+            <a:srgbClr val="CC4F3E"/>
+          </a:solidFill>
+          <a:ln>
+            <a:noFill/>
+          </a:ln>
+        </p:spPr>
+        <p:style>
+          <a:lnRef idx="1">
+            <a:schemeClr val="accent1"/>
+          </a:lnRef>
+          <a:fillRef idx="3">
+            <a:schemeClr val="accent1"/>
+          </a:fillRef>
+          <a:effectRef idx="2">
+            <a:schemeClr val="accent1"/>
+          </a:effectRef>
+          <a:fontRef idx="minor">
+            <a:schemeClr val="lt1"/>
+          </a:fontRef>
+        </p:style>
+        <p:txBody>
+          <a:bodyPr rtlCol="0" anchor="ctr"/>
+          <a:lstStyle/>
+          <a:p>
+            <a:pPr algn="ctr"/>
+          </a:p>
+        </p:txBody>
+      </p:sp>
+      <p:sp>
+        <p:nvSpPr>
+          <p:cNvPr id="4" name="TextBox 3"/>
+          <p:cNvSpPr txBox="1"/>
+          <p:nvPr/>
+        </p:nvSpPr>
+        <p:spPr>
+          <a:xfrm>
+            <a:off x="502920" y="274320"/>
+            <a:ext cx="5486400" cy="256032"/>
+          </a:xfrm>
+          <a:prstGeom prst="rect">
+            <a:avLst/>
+          </a:prstGeom>
+          <a:noFill/>
+        </p:spPr>
+        <p:txBody>
+          <a:bodyPr wrap="square" lIns="45720" rIns="45720" tIns="36576" bIns="36576" anchor="t">
+            <a:spAutoFit/>
+          </a:bodyPr>
+          <a:lstStyle/>
+          <a:p>
+            <a:pPr algn="l">
+              <a:defRPr sz="1000" b="1">
+                <a:solidFill>
+                  <a:srgbClr val="CC4F3E"/>
+                </a:solidFill>
+                <a:latin typeface="Aptos"/>
+              </a:defRPr>
+            </a:pPr>
+            <a:r>
+              <a:t>APLICAR Y DECIDIR</a:t>
+            </a:r>
+          </a:p>
+        </p:txBody>
+      </p:sp>
+      <p:sp>
+        <p:nvSpPr>
+          <p:cNvPr id="5" name="TextBox 4"/>
+          <p:cNvSpPr txBox="1"/>
+          <p:nvPr/>
+        </p:nvSpPr>
+        <p:spPr>
+          <a:xfrm>
+            <a:off x="502920" y="603504"/>
+            <a:ext cx="11064240" cy="530352"/>
+          </a:xfrm>
+          <a:prstGeom prst="rect">
+            <a:avLst/>
+          </a:prstGeom>
+          <a:noFill/>
+        </p:spPr>
+        <p:txBody>
+          <a:bodyPr wrap="square" lIns="45720" rIns="45720" tIns="36576" bIns="36576" anchor="t">
+            <a:spAutoFit/>
+          </a:bodyPr>
+          <a:lstStyle/>
+          <a:p>
+            <a:pPr algn="l">
+              <a:defRPr sz="2800" b="1">
+                <a:solidFill>
+                  <a:srgbClr val="1C2330"/>
+                </a:solidFill>
+                <a:latin typeface="Aptos"/>
+              </a:defRPr>
+            </a:pPr>
+            <a:r>
+              <a:t>Actividad central</a:t>
+            </a:r>
+          </a:p>
+        </p:txBody>
+      </p:sp>
+      <p:sp>
+        <p:nvSpPr>
+          <p:cNvPr id="6" name="Rectangle 5"/>
+          <p:cNvSpPr/>
+          <p:nvPr/>
+        </p:nvSpPr>
+        <p:spPr>
+          <a:xfrm>
+            <a:off x="0" y="6601968"/>
+            <a:ext cx="12191695" cy="256032"/>
+          </a:xfrm>
+          <a:prstGeom prst="rect">
+            <a:avLst/>
+          </a:prstGeom>
+          <a:solidFill>
+            <a:srgbClr val="CC4F3E"/>
+          </a:solidFill>
+          <a:ln>
+            <a:noFill/>
+          </a:ln>
+        </p:spPr>
+        <p:style>
+          <a:lnRef idx="1">
+            <a:schemeClr val="accent1"/>
+          </a:lnRef>
+          <a:fillRef idx="3">
+            <a:schemeClr val="accent1"/>
+          </a:fillRef>
+          <a:effectRef idx="2">
+            <a:schemeClr val="accent1"/>
+          </a:effectRef>
+          <a:fontRef idx="minor">
+            <a:schemeClr val="lt1"/>
+          </a:fontRef>
+        </p:style>
+        <p:txBody>
+          <a:bodyPr rtlCol="0" anchor="ctr"/>
+          <a:lstStyle/>
+          <a:p>
+            <a:pPr algn="ctr"/>
+          </a:p>
+        </p:txBody>
+      </p:sp>
+      <p:sp>
+        <p:nvSpPr>
+          <p:cNvPr id="7" name="TextBox 6"/>
+          <p:cNvSpPr txBox="1"/>
+          <p:nvPr/>
+        </p:nvSpPr>
+        <p:spPr>
+          <a:xfrm>
+            <a:off x="411480" y="6629400"/>
+            <a:ext cx="11247120" cy="164592"/>
+          </a:xfrm>
+          <a:prstGeom prst="rect">
+            <a:avLst/>
+          </a:prstGeom>
+          <a:noFill/>
+        </p:spPr>
+        <p:txBody>
+          <a:bodyPr wrap="square" lIns="45720" rIns="45720" tIns="36576" bIns="36576" anchor="t">
+            <a:spAutoFit/>
+          </a:bodyPr>
+          <a:lstStyle/>
+          <a:p>
+            <a:pPr algn="l">
+              <a:defRPr sz="900" b="0">
+                <a:solidFill>
+                  <a:srgbClr val="FFFFFF"/>
+                </a:solidFill>
+                <a:latin typeface="Aptos"/>
+              </a:defRPr>
+            </a:pPr>
+            <a:r>
+              <a:t>MiniJarvis · 1.º DAW · Sesión 205 · H0 — Formación y prueba de equipos Scrum mediante la torre de papel</a:t>
+            </a:r>
+          </a:p>
+        </p:txBody>
+      </p:sp>
+      <p:sp>
+        <p:nvSpPr>
+          <p:cNvPr id="8" name="Rounded Rectangle 7"/>
+          <p:cNvSpPr/>
+          <p:nvPr/>
+        </p:nvSpPr>
+        <p:spPr>
+          <a:xfrm>
+            <a:off x="658368" y="1307592"/>
+            <a:ext cx="10835640" cy="1049274"/>
+          </a:xfrm>
+          <a:prstGeom prst="roundRect">
+            <a:avLst/>
+          </a:prstGeom>
+          <a:solidFill>
+            <a:srgbClr val="FFFFFF"/>
+          </a:solidFill>
+          <a:ln>
+            <a:solidFill>
+              <a:srgbClr val="E5E9EF"/>
+            </a:solidFill>
+          </a:ln>
+        </p:spPr>
+        <p:style>
+          <a:lnRef idx="1">
+            <a:schemeClr val="accent1"/>
+          </a:lnRef>
+          <a:fillRef idx="3">
+            <a:schemeClr val="accent1"/>
+          </a:fillRef>
+          <a:effectRef idx="2">
+            <a:schemeClr val="accent1"/>
+          </a:effectRef>
+          <a:fontRef idx="minor">
+            <a:schemeClr val="lt1"/>
+          </a:fontRef>
+        </p:style>
+        <p:txBody>
+          <a:bodyPr rtlCol="0" anchor="ctr"/>
+          <a:lstStyle/>
+          <a:p>
+            <a:pPr algn="ctr"/>
+          </a:p>
+        </p:txBody>
+      </p:sp>
+      <p:sp>
+        <p:nvSpPr>
+          <p:cNvPr id="9" name="TextBox 8"/>
+          <p:cNvSpPr txBox="1"/>
+          <p:nvPr/>
+        </p:nvSpPr>
+        <p:spPr>
+          <a:xfrm>
+            <a:off x="850392" y="1453895"/>
+            <a:ext cx="685800" cy="384048"/>
+          </a:xfrm>
+          <a:prstGeom prst="rect">
+            <a:avLst/>
+          </a:prstGeom>
+          <a:noFill/>
+        </p:spPr>
+        <p:txBody>
+          <a:bodyPr wrap="square" lIns="45720" rIns="45720" tIns="36576" bIns="36576" anchor="t">
+            <a:spAutoFit/>
+          </a:bodyPr>
+          <a:lstStyle/>
+          <a:p>
+            <a:pPr algn="l">
+              <a:defRPr sz="1200" b="1">
+                <a:solidFill>
+                  <a:srgbClr val="CC4F3E"/>
+                </a:solidFill>
+                <a:latin typeface="Aptos"/>
+              </a:defRPr>
+            </a:pPr>
+            <a:r>
+              <a:t>PASO 1</a:t>
+            </a:r>
+          </a:p>
+        </p:txBody>
+      </p:sp>
+      <p:sp>
+        <p:nvSpPr>
+          <p:cNvPr id="10" name="TextBox 9"/>
+          <p:cNvSpPr txBox="1"/>
+          <p:nvPr/>
+        </p:nvSpPr>
+        <p:spPr>
+          <a:xfrm>
+            <a:off x="1664208" y="1417319"/>
+            <a:ext cx="9464040" cy="829818"/>
+          </a:xfrm>
+          <a:prstGeom prst="rect">
+            <a:avLst/>
+          </a:prstGeom>
+          <a:noFill/>
+        </p:spPr>
+        <p:txBody>
+          <a:bodyPr wrap="square" lIns="45720" rIns="45720" tIns="36576" bIns="36576" anchor="t">
+            <a:spAutoFit/>
+          </a:bodyPr>
+          <a:lstStyle/>
+          <a:p>
+            <a:pPr algn="l">
+              <a:defRPr sz="2000" b="0">
+                <a:solidFill>
+                  <a:srgbClr val="1C2330"/>
+                </a:solidFill>
+                <a:latin typeface="Aptos"/>
+              </a:defRPr>
+            </a:pPr>
+            <a:r>
+              <a:t>Conducta de la torre que quiero mantener:</a:t>
+            </a:r>
+          </a:p>
+        </p:txBody>
+      </p:sp>
+      <p:sp>
+        <p:nvSpPr>
+          <p:cNvPr id="11" name="Rounded Rectangle 10"/>
+          <p:cNvSpPr/>
+          <p:nvPr/>
+        </p:nvSpPr>
+        <p:spPr>
+          <a:xfrm>
+            <a:off x="658368" y="2542032"/>
+            <a:ext cx="10835640" cy="1049274"/>
+          </a:xfrm>
+          <a:prstGeom prst="roundRect">
+            <a:avLst/>
+          </a:prstGeom>
+          <a:solidFill>
+            <a:srgbClr val="FFFFFF"/>
+          </a:solidFill>
+          <a:ln>
+            <a:solidFill>
+              <a:srgbClr val="E5E9EF"/>
+            </a:solidFill>
+          </a:ln>
+        </p:spPr>
+        <p:style>
+          <a:lnRef idx="1">
+            <a:schemeClr val="accent1"/>
+          </a:lnRef>
+          <a:fillRef idx="3">
+            <a:schemeClr val="accent1"/>
+          </a:fillRef>
+          <a:effectRef idx="2">
+            <a:schemeClr val="accent1"/>
+          </a:effectRef>
+          <a:fontRef idx="minor">
+            <a:schemeClr val="lt1"/>
+          </a:fontRef>
+        </p:style>
+        <p:txBody>
+          <a:bodyPr rtlCol="0" anchor="ctr"/>
+          <a:lstStyle/>
+          <a:p>
+            <a:pPr algn="ctr"/>
+          </a:p>
+        </p:txBody>
+      </p:sp>
+      <p:sp>
+        <p:nvSpPr>
+          <p:cNvPr id="12" name="TextBox 11"/>
+          <p:cNvSpPr txBox="1"/>
+          <p:nvPr/>
+        </p:nvSpPr>
+        <p:spPr>
+          <a:xfrm>
+            <a:off x="850392" y="2688336"/>
+            <a:ext cx="685800" cy="384048"/>
+          </a:xfrm>
+          <a:prstGeom prst="rect">
+            <a:avLst/>
+          </a:prstGeom>
+          <a:noFill/>
+        </p:spPr>
+        <p:txBody>
+          <a:bodyPr wrap="square" lIns="45720" rIns="45720" tIns="36576" bIns="36576" anchor="t">
+            <a:spAutoFit/>
+          </a:bodyPr>
+          <a:lstStyle/>
+          <a:p>
+            <a:pPr algn="l">
+              <a:defRPr sz="1200" b="1">
+                <a:solidFill>
+                  <a:srgbClr val="CC4F3E"/>
+                </a:solidFill>
+                <a:latin typeface="Aptos"/>
+              </a:defRPr>
+            </a:pPr>
+            <a:r>
+              <a:t>PASO 2</a:t>
+            </a:r>
+          </a:p>
+        </p:txBody>
+      </p:sp>
+      <p:sp>
+        <p:nvSpPr>
+          <p:cNvPr id="13" name="TextBox 12"/>
+          <p:cNvSpPr txBox="1"/>
+          <p:nvPr/>
+        </p:nvSpPr>
+        <p:spPr>
+          <a:xfrm>
+            <a:off x="1664208" y="2651760"/>
+            <a:ext cx="9464040" cy="829818"/>
+          </a:xfrm>
+          <a:prstGeom prst="rect">
+            <a:avLst/>
+          </a:prstGeom>
+          <a:noFill/>
+        </p:spPr>
+        <p:txBody>
+          <a:bodyPr wrap="square" lIns="45720" rIns="45720" tIns="36576" bIns="36576" anchor="t">
+            <a:spAutoFit/>
+          </a:bodyPr>
+          <a:lstStyle/>
+          <a:p>
+            <a:pPr algn="l">
+              <a:defRPr sz="2000" b="0">
+                <a:solidFill>
+                  <a:srgbClr val="1C2330"/>
+                </a:solidFill>
+                <a:latin typeface="Aptos"/>
+              </a:defRPr>
+            </a:pPr>
+            <a:r>
+              <a:t>Función diferente que practicaré en MiniJarvis:</a:t>
+            </a:r>
+          </a:p>
+        </p:txBody>
+      </p:sp>
+      <p:sp>
+        <p:nvSpPr>
+          <p:cNvPr id="14" name="Rounded Rectangle 13"/>
+          <p:cNvSpPr/>
+          <p:nvPr/>
+        </p:nvSpPr>
+        <p:spPr>
+          <a:xfrm>
+            <a:off x="658368" y="3776472"/>
+            <a:ext cx="10835640" cy="1049274"/>
+          </a:xfrm>
+          <a:prstGeom prst="roundRect">
+            <a:avLst/>
+          </a:prstGeom>
+          <a:solidFill>
+            <a:srgbClr val="FFFFFF"/>
+          </a:solidFill>
+          <a:ln>
+            <a:solidFill>
+              <a:srgbClr val="E5E9EF"/>
+            </a:solidFill>
+          </a:ln>
+        </p:spPr>
+        <p:style>
+          <a:lnRef idx="1">
+            <a:schemeClr val="accent1"/>
+          </a:lnRef>
+          <a:fillRef idx="3">
+            <a:schemeClr val="accent1"/>
+          </a:fillRef>
+          <a:effectRef idx="2">
+            <a:schemeClr val="accent1"/>
+          </a:effectRef>
+          <a:fontRef idx="minor">
+            <a:schemeClr val="lt1"/>
+          </a:fontRef>
+        </p:style>
+        <p:txBody>
+          <a:bodyPr rtlCol="0" anchor="ctr"/>
+          <a:lstStyle/>
+          <a:p>
+            <a:pPr algn="ctr"/>
+          </a:p>
+        </p:txBody>
+      </p:sp>
+      <p:sp>
+        <p:nvSpPr>
+          <p:cNvPr id="15" name="TextBox 14"/>
+          <p:cNvSpPr txBox="1"/>
+          <p:nvPr/>
+        </p:nvSpPr>
+        <p:spPr>
+          <a:xfrm>
+            <a:off x="850392" y="3922776"/>
+            <a:ext cx="685800" cy="384048"/>
+          </a:xfrm>
+          <a:prstGeom prst="rect">
+            <a:avLst/>
+          </a:prstGeom>
+          <a:noFill/>
+        </p:spPr>
+        <p:txBody>
+          <a:bodyPr wrap="square" lIns="45720" rIns="45720" tIns="36576" bIns="36576" anchor="t">
+            <a:spAutoFit/>
+          </a:bodyPr>
+          <a:lstStyle/>
+          <a:p>
+            <a:pPr algn="l">
+              <a:defRPr sz="1200" b="1">
+                <a:solidFill>
+                  <a:srgbClr val="CC4F3E"/>
+                </a:solidFill>
+                <a:latin typeface="Aptos"/>
+              </a:defRPr>
+            </a:pPr>
+            <a:r>
+              <a:t>PASO 3</a:t>
+            </a:r>
+          </a:p>
+        </p:txBody>
+      </p:sp>
+      <p:sp>
+        <p:nvSpPr>
+          <p:cNvPr id="16" name="TextBox 15"/>
+          <p:cNvSpPr txBox="1"/>
+          <p:nvPr/>
+        </p:nvSpPr>
+        <p:spPr>
+          <a:xfrm>
+            <a:off x="1664208" y="3886200"/>
+            <a:ext cx="9464040" cy="829818"/>
+          </a:xfrm>
+          <a:prstGeom prst="rect">
+            <a:avLst/>
+          </a:prstGeom>
+          <a:noFill/>
+        </p:spPr>
+        <p:txBody>
+          <a:bodyPr wrap="square" lIns="45720" rIns="45720" tIns="36576" bIns="36576" anchor="t">
+            <a:spAutoFit/>
+          </a:bodyPr>
+          <a:lstStyle/>
+          <a:p>
+            <a:pPr algn="l">
+              <a:defRPr sz="2000" b="0">
+                <a:solidFill>
+                  <a:srgbClr val="1C2330"/>
+                </a:solidFill>
+                <a:latin typeface="Aptos"/>
+              </a:defRPr>
+            </a:pPr>
+            <a:r>
+              <a:t>Apoyo que puedo ofrecer a otra persona:</a:t>
+            </a:r>
+          </a:p>
+        </p:txBody>
+      </p:sp>
+      <p:sp>
+        <p:nvSpPr>
+          <p:cNvPr id="17" name="Rounded Rectangle 16"/>
+          <p:cNvSpPr/>
+          <p:nvPr/>
+        </p:nvSpPr>
+        <p:spPr>
+          <a:xfrm>
+            <a:off x="658368" y="5010912"/>
+            <a:ext cx="10835640" cy="1049274"/>
+          </a:xfrm>
+          <a:prstGeom prst="roundRect">
+            <a:avLst/>
+          </a:prstGeom>
+          <a:solidFill>
+            <a:srgbClr val="FFFFFF"/>
+          </a:solidFill>
+          <a:ln>
+            <a:solidFill>
+              <a:srgbClr val="E5E9EF"/>
+            </a:solidFill>
+          </a:ln>
+        </p:spPr>
+        <p:style>
+          <a:lnRef idx="1">
+            <a:schemeClr val="accent1"/>
+          </a:lnRef>
+          <a:fillRef idx="3">
+            <a:schemeClr val="accent1"/>
+          </a:fillRef>
+          <a:effectRef idx="2">
+            <a:schemeClr val="accent1"/>
+          </a:effectRef>
+          <a:fontRef idx="minor">
+            <a:schemeClr val="lt1"/>
+          </a:fontRef>
+        </p:style>
+        <p:txBody>
+          <a:bodyPr rtlCol="0" anchor="ctr"/>
+          <a:lstStyle/>
+          <a:p>
+            <a:pPr algn="ctr"/>
+          </a:p>
+        </p:txBody>
+      </p:sp>
+      <p:sp>
+        <p:nvSpPr>
+          <p:cNvPr id="18" name="TextBox 17"/>
+          <p:cNvSpPr txBox="1"/>
+          <p:nvPr/>
+        </p:nvSpPr>
+        <p:spPr>
+          <a:xfrm>
+            <a:off x="850392" y="5157216"/>
+            <a:ext cx="685800" cy="384048"/>
+          </a:xfrm>
+          <a:prstGeom prst="rect">
+            <a:avLst/>
+          </a:prstGeom>
+          <a:noFill/>
+        </p:spPr>
+        <p:txBody>
+          <a:bodyPr wrap="square" lIns="45720" rIns="45720" tIns="36576" bIns="36576" anchor="t">
+            <a:spAutoFit/>
+          </a:bodyPr>
+          <a:lstStyle/>
+          <a:p>
+            <a:pPr algn="l">
+              <a:defRPr sz="1200" b="1">
+                <a:solidFill>
+                  <a:srgbClr val="CC4F3E"/>
+                </a:solidFill>
+                <a:latin typeface="Aptos"/>
+              </a:defRPr>
+            </a:pPr>
+            <a:r>
+              <a:t>PASO 4</a:t>
+            </a:r>
+          </a:p>
+        </p:txBody>
+      </p:sp>
+      <p:sp>
+        <p:nvSpPr>
+          <p:cNvPr id="19" name="TextBox 18"/>
+          <p:cNvSpPr txBox="1"/>
+          <p:nvPr/>
+        </p:nvSpPr>
+        <p:spPr>
+          <a:xfrm>
+            <a:off x="1664208" y="5120640"/>
+            <a:ext cx="9464040" cy="829818"/>
+          </a:xfrm>
+          <a:prstGeom prst="rect">
+            <a:avLst/>
+          </a:prstGeom>
+          <a:noFill/>
+        </p:spPr>
+        <p:txBody>
+          <a:bodyPr wrap="square" lIns="45720" rIns="45720" tIns="36576" bIns="36576" anchor="t">
+            <a:spAutoFit/>
+          </a:bodyPr>
+          <a:lstStyle/>
+          <a:p>
+            <a:pPr algn="l">
+              <a:defRPr sz="2000" b="0">
+                <a:solidFill>
+                  <a:srgbClr val="1C2330"/>
+                </a:solidFill>
+                <a:latin typeface="Aptos"/>
+              </a:defRPr>
+            </a:pPr>
+            <a:r>
+              <a:t>Evidencia que permitirá revisar mi aprendizaje:</a:t>
+            </a:r>
+          </a:p>
+        </p:txBody>
+      </p:sp>
+    </p:spTree>
+  </p:cSld>
+  <p:clrMapOvr>
+    <a:masterClrMapping/>
+  </p:clrMapOvr>
+</p:sld>
+</file>
+
+<file path=ppt/slides/slide9.xml><?xml version="1.0" encoding="utf-8"?>
+<p:sld xmlns:a="http://schemas.openxmlformats.org/drawingml/2006/main" xmlns:p="http://schemas.openxmlformats.org/presentationml/2006/main" xmlns:r="http://schemas.openxmlformats.org/officeDocument/2006/relationships">
+  <p:cSld>
+    <p:spTree>
+      <p:nvGrpSpPr>
+        <p:cNvPr id="1" name=""/>
+        <p:cNvGrpSpPr/>
+        <p:nvPr/>
+      </p:nvGrpSpPr>
+      <p:grpSpPr/>
+      <p:sp>
+        <p:nvSpPr>
+          <p:cNvPr id="2" name="Rectangle 1"/>
+          <p:cNvSpPr/>
+          <p:nvPr/>
+        </p:nvSpPr>
+        <p:spPr>
+          <a:xfrm>
+            <a:off x="0" y="0"/>
+            <a:ext cx="12191695" cy="6858000"/>
+          </a:xfrm>
+          <a:prstGeom prst="rect">
+            <a:avLst/>
+          </a:prstGeom>
+          <a:solidFill>
+            <a:srgbClr val="F9F7F2"/>
+          </a:solidFill>
+          <a:ln>
+            <a:noFill/>
+          </a:ln>
+        </p:spPr>
+        <p:style>
+          <a:lnRef idx="1">
+            <a:schemeClr val="accent1"/>
+          </a:lnRef>
+          <a:fillRef idx="3">
+            <a:schemeClr val="accent1"/>
+          </a:fillRef>
+          <a:effectRef idx="2">
+            <a:schemeClr val="accent1"/>
+          </a:effectRef>
+          <a:fontRef idx="minor">
+            <a:schemeClr val="lt1"/>
+          </a:fontRef>
+        </p:style>
+        <p:txBody>
+          <a:bodyPr rtlCol="0" anchor="ctr"/>
+          <a:lstStyle/>
+          <a:p>
+            <a:pPr algn="ctr"/>
+          </a:p>
+        </p:txBody>
+      </p:sp>
+      <p:sp>
+        <p:nvSpPr>
+          <p:cNvPr id="3" name="Rectangle 2"/>
+          <p:cNvSpPr/>
+          <p:nvPr/>
+        </p:nvSpPr>
+        <p:spPr>
+          <a:xfrm>
+            <a:off x="0" y="0"/>
+            <a:ext cx="164592" cy="6858000"/>
+          </a:xfrm>
+          <a:prstGeom prst="rect">
+            <a:avLst/>
+          </a:prstGeom>
+          <a:solidFill>
+            <a:srgbClr val="CC4F3E"/>
+          </a:solidFill>
+          <a:ln>
+            <a:noFill/>
+          </a:ln>
+        </p:spPr>
+        <p:style>
+          <a:lnRef idx="1">
+            <a:schemeClr val="accent1"/>
+          </a:lnRef>
+          <a:fillRef idx="3">
+            <a:schemeClr val="accent1"/>
+          </a:fillRef>
+          <a:effectRef idx="2">
+            <a:schemeClr val="accent1"/>
+          </a:effectRef>
+          <a:fontRef idx="minor">
+            <a:schemeClr val="lt1"/>
+          </a:fontRef>
+        </p:style>
+        <p:txBody>
+          <a:bodyPr rtlCol="0" anchor="ctr"/>
+          <a:lstStyle/>
+          <a:p>
+            <a:pPr algn="ctr"/>
+          </a:p>
+        </p:txBody>
+      </p:sp>
+      <p:sp>
+        <p:nvSpPr>
+          <p:cNvPr id="4" name="TextBox 3"/>
+          <p:cNvSpPr txBox="1"/>
+          <p:nvPr/>
+        </p:nvSpPr>
+        <p:spPr>
+          <a:xfrm>
+            <a:off x="502920" y="274320"/>
+            <a:ext cx="5486400" cy="256032"/>
+          </a:xfrm>
+          <a:prstGeom prst="rect">
+            <a:avLst/>
+          </a:prstGeom>
+          <a:noFill/>
+        </p:spPr>
+        <p:txBody>
+          <a:bodyPr wrap="square" lIns="45720" rIns="45720" tIns="36576" bIns="36576" anchor="t">
+            <a:spAutoFit/>
+          </a:bodyPr>
+          <a:lstStyle/>
+          <a:p>
+            <a:pPr algn="l">
+              <a:defRPr sz="1000" b="1">
+                <a:solidFill>
+                  <a:srgbClr val="CC4F3E"/>
+                </a:solidFill>
+                <a:latin typeface="Aptos"/>
+              </a:defRPr>
+            </a:pPr>
+            <a:r>
+              <a:t>COMPROBAR</a:t>
+            </a:r>
+          </a:p>
+        </p:txBody>
+      </p:sp>
+      <p:sp>
+        <p:nvSpPr>
+          <p:cNvPr id="5" name="TextBox 4"/>
+          <p:cNvSpPr txBox="1"/>
+          <p:nvPr/>
+        </p:nvSpPr>
+        <p:spPr>
+          <a:xfrm>
+            <a:off x="502920" y="603504"/>
+            <a:ext cx="11064240" cy="530352"/>
+          </a:xfrm>
+          <a:prstGeom prst="rect">
+            <a:avLst/>
+          </a:prstGeom>
+          <a:noFill/>
+        </p:spPr>
+        <p:txBody>
+          <a:bodyPr wrap="square" lIns="45720" rIns="45720" tIns="36576" bIns="36576" anchor="t">
+            <a:spAutoFit/>
+          </a:bodyPr>
+          <a:lstStyle/>
+          <a:p>
+            <a:pPr algn="l">
+              <a:defRPr sz="2800" b="1">
+                <a:solidFill>
+                  <a:srgbClr val="1C2330"/>
+                </a:solidFill>
+                <a:latin typeface="Aptos"/>
+              </a:defRPr>
+            </a:pPr>
+            <a:r>
+              <a:t>Evidencia y comprobación · 1</a:t>
+            </a:r>
+          </a:p>
+        </p:txBody>
+      </p:sp>
+      <p:sp>
+        <p:nvSpPr>
+          <p:cNvPr id="6" name="Rectangle 5"/>
+          <p:cNvSpPr/>
+          <p:nvPr/>
+        </p:nvSpPr>
+        <p:spPr>
+          <a:xfrm>
+            <a:off x="0" y="6601968"/>
+            <a:ext cx="12191695" cy="256032"/>
+          </a:xfrm>
+          <a:prstGeom prst="rect">
+            <a:avLst/>
+          </a:prstGeom>
+          <a:solidFill>
+            <a:srgbClr val="CC4F3E"/>
+          </a:solidFill>
+          <a:ln>
+            <a:noFill/>
+          </a:ln>
+        </p:spPr>
+        <p:style>
+          <a:lnRef idx="1">
+            <a:schemeClr val="accent1"/>
+          </a:lnRef>
+          <a:fillRef idx="3">
+            <a:schemeClr val="accent1"/>
+          </a:fillRef>
+          <a:effectRef idx="2">
+            <a:schemeClr val="accent1"/>
+          </a:effectRef>
+          <a:fontRef idx="minor">
+            <a:schemeClr val="lt1"/>
+          </a:fontRef>
+        </p:style>
+        <p:txBody>
+          <a:bodyPr rtlCol="0" anchor="ctr"/>
+          <a:lstStyle/>
+          <a:p>
+            <a:pPr algn="ctr"/>
+          </a:p>
+        </p:txBody>
+      </p:sp>
+      <p:sp>
+        <p:nvSpPr>
+          <p:cNvPr id="7" name="TextBox 6"/>
+          <p:cNvSpPr txBox="1"/>
+          <p:nvPr/>
+        </p:nvSpPr>
+        <p:spPr>
+          <a:xfrm>
+            <a:off x="411480" y="6629400"/>
+            <a:ext cx="11247120" cy="164592"/>
+          </a:xfrm>
+          <a:prstGeom prst="rect">
+            <a:avLst/>
+          </a:prstGeom>
+          <a:noFill/>
+        </p:spPr>
+        <p:txBody>
+          <a:bodyPr wrap="square" lIns="45720" rIns="45720" tIns="36576" bIns="36576" anchor="t">
+            <a:spAutoFit/>
+          </a:bodyPr>
+          <a:lstStyle/>
+          <a:p>
+            <a:pPr algn="l">
+              <a:defRPr sz="900" b="0">
+                <a:solidFill>
+                  <a:srgbClr val="FFFFFF"/>
+                </a:solidFill>
+                <a:latin typeface="Aptos"/>
+              </a:defRPr>
+            </a:pPr>
+            <a:r>
+              <a:t>MiniJarvis · 1.º DAW · Sesión 205 · H0 — Formación y prueba de equipos Scrum mediante la torre de papel</a:t>
+            </a:r>
+          </a:p>
+        </p:txBody>
+      </p:sp>
+      <p:sp>
+        <p:nvSpPr>
+          <p:cNvPr id="8" name="Rounded Rectangle 7"/>
+          <p:cNvSpPr/>
+          <p:nvPr/>
+        </p:nvSpPr>
+        <p:spPr>
+          <a:xfrm>
+            <a:off x="713232" y="1298448"/>
+            <a:ext cx="420624" cy="420624"/>
+          </a:xfrm>
+          <a:prstGeom prst="roundRect">
+            <a:avLst/>
+          </a:prstGeom>
+          <a:solidFill>
+            <a:srgbClr val="FFFFFF"/>
+          </a:solidFill>
+          <a:ln>
+            <a:solidFill>
+              <a:srgbClr val="CC4F3E"/>
+            </a:solidFill>
+          </a:ln>
+        </p:spPr>
+        <p:style>
+          <a:lnRef idx="1">
+            <a:schemeClr val="accent1"/>
+          </a:lnRef>
+          <a:fillRef idx="3">
+            <a:schemeClr val="accent1"/>
+          </a:fillRef>
+          <a:effectRef idx="2">
+            <a:schemeClr val="accent1"/>
+          </a:effectRef>
+          <a:fontRef idx="minor">
+            <a:schemeClr val="lt1"/>
+          </a:fontRef>
+        </p:style>
+        <p:txBody>
+          <a:bodyPr rtlCol="0" anchor="ctr"/>
+          <a:lstStyle/>
+          <a:p>
+            <a:pPr algn="ctr"/>
+          </a:p>
+        </p:txBody>
+      </p:sp>
+      <p:sp>
+        <p:nvSpPr>
+          <p:cNvPr id="9" name="TextBox 8"/>
+          <p:cNvSpPr txBox="1"/>
+          <p:nvPr/>
+        </p:nvSpPr>
+        <p:spPr>
+          <a:xfrm>
+            <a:off x="1389888" y="1280160"/>
+            <a:ext cx="9829800" cy="675349"/>
+          </a:xfrm>
+          <a:prstGeom prst="rect">
+            <a:avLst/>
+          </a:prstGeom>
+          <a:noFill/>
+        </p:spPr>
+        <p:txBody>
+          <a:bodyPr wrap="square" lIns="45720" rIns="45720" tIns="36576" bIns="36576" anchor="t">
+            <a:spAutoFit/>
+          </a:bodyPr>
+          <a:lstStyle/>
+          <a:p>
+            <a:pPr algn="l">
+              <a:defRPr sz="1600" b="0">
+                <a:solidFill>
+                  <a:srgbClr val="1C2330"/>
+                </a:solidFill>
+                <a:latin typeface="Aptos"/>
+              </a:defRPr>
+            </a:pPr>
+            <a:r>
+              <a:t>el equipo ha usado HADA como hipótesis y no como etiqueta;</a:t>
+            </a:r>
+          </a:p>
+        </p:txBody>
+      </p:sp>
+      <p:sp>
+        <p:nvSpPr>
+          <p:cNvPr id="10" name="Rounded Rectangle 9"/>
+          <p:cNvSpPr/>
+          <p:nvPr/>
+        </p:nvSpPr>
+        <p:spPr>
+          <a:xfrm>
+            <a:off x="713232" y="2010373"/>
+            <a:ext cx="420624" cy="420624"/>
+          </a:xfrm>
+          <a:prstGeom prst="roundRect">
+            <a:avLst/>
+          </a:prstGeom>
+          <a:solidFill>
+            <a:srgbClr val="FFFFFF"/>
+          </a:solidFill>
+          <a:ln>
+            <a:solidFill>
+              <a:srgbClr val="CC4F3E"/>
+            </a:solidFill>
+          </a:ln>
+        </p:spPr>
+        <p:style>
+          <a:lnRef idx="1">
+            <a:schemeClr val="accent1"/>
+          </a:lnRef>
+          <a:fillRef idx="3">
+            <a:schemeClr val="accent1"/>
+          </a:fillRef>
+          <a:effectRef idx="2">
+            <a:schemeClr val="accent1"/>
+          </a:effectRef>
+          <a:fontRef idx="minor">
+            <a:schemeClr val="lt1"/>
+          </a:fontRef>
+        </p:style>
+        <p:txBody>
+          <a:bodyPr rtlCol="0" anchor="ctr"/>
+          <a:lstStyle/>
+          <a:p>
+            <a:pPr algn="ctr"/>
+          </a:p>
+        </p:txBody>
+      </p:sp>
+      <p:sp>
+        <p:nvSpPr>
+          <p:cNvPr id="11" name="TextBox 10"/>
+          <p:cNvSpPr txBox="1"/>
+          <p:nvPr/>
+        </p:nvSpPr>
+        <p:spPr>
+          <a:xfrm>
+            <a:off x="1389888" y="1992085"/>
+            <a:ext cx="9829800" cy="675349"/>
+          </a:xfrm>
+          <a:prstGeom prst="rect">
+            <a:avLst/>
+          </a:prstGeom>
+          <a:noFill/>
+        </p:spPr>
+        <p:txBody>
+          <a:bodyPr wrap="square" lIns="45720" rIns="45720" tIns="36576" bIns="36576" anchor="t">
+            <a:spAutoFit/>
+          </a:bodyPr>
+          <a:lstStyle/>
+          <a:p>
+            <a:pPr algn="l">
+              <a:defRPr sz="1600" b="0">
+                <a:solidFill>
+                  <a:srgbClr val="1C2330"/>
+                </a:solidFill>
+                <a:latin typeface="Aptos"/>
+              </a:defRPr>
+            </a:pPr>
+            <a:r>
+              <a:t>la torre ha generado evidencias de producto y proceso;</a:t>
+            </a:r>
+          </a:p>
+        </p:txBody>
+      </p:sp>
+      <p:sp>
+        <p:nvSpPr>
+          <p:cNvPr id="12" name="Rounded Rectangle 11"/>
+          <p:cNvSpPr/>
+          <p:nvPr/>
+        </p:nvSpPr>
+        <p:spPr>
+          <a:xfrm>
+            <a:off x="713232" y="2722299"/>
+            <a:ext cx="420624" cy="420624"/>
+          </a:xfrm>
+          <a:prstGeom prst="roundRect">
+            <a:avLst/>
+          </a:prstGeom>
+          <a:solidFill>
+            <a:srgbClr val="FFFFFF"/>
+          </a:solidFill>
+          <a:ln>
+            <a:solidFill>
+              <a:srgbClr val="CC4F3E"/>
+            </a:solidFill>
+          </a:ln>
+        </p:spPr>
+        <p:style>
+          <a:lnRef idx="1">
+            <a:schemeClr val="accent1"/>
+          </a:lnRef>
+          <a:fillRef idx="3">
+            <a:schemeClr val="accent1"/>
+          </a:fillRef>
+          <a:effectRef idx="2">
+            <a:schemeClr val="accent1"/>
+          </a:effectRef>
+          <a:fontRef idx="minor">
+            <a:schemeClr val="lt1"/>
+          </a:fontRef>
+        </p:style>
+        <p:txBody>
+          <a:bodyPr rtlCol="0" anchor="ctr"/>
+          <a:lstStyle/>
+          <a:p>
+            <a:pPr algn="ctr"/>
+          </a:p>
+        </p:txBody>
+      </p:sp>
+      <p:sp>
+        <p:nvSpPr>
+          <p:cNvPr id="13" name="TextBox 12"/>
+          <p:cNvSpPr txBox="1"/>
+          <p:nvPr/>
+        </p:nvSpPr>
+        <p:spPr>
+          <a:xfrm>
+            <a:off x="1389888" y="2704011"/>
+            <a:ext cx="9829800" cy="675349"/>
+          </a:xfrm>
+          <a:prstGeom prst="rect">
+            <a:avLst/>
+          </a:prstGeom>
+          <a:noFill/>
+        </p:spPr>
+        <p:txBody>
+          <a:bodyPr wrap="square" lIns="45720" rIns="45720" tIns="36576" bIns="36576" anchor="t">
+            <a:spAutoFit/>
+          </a:bodyPr>
+          <a:lstStyle/>
+          <a:p>
+            <a:pPr algn="l">
+              <a:defRPr sz="1600" b="0">
+                <a:solidFill>
+                  <a:srgbClr val="1C2330"/>
+                </a:solidFill>
+                <a:latin typeface="Aptos"/>
+              </a:defRPr>
+            </a:pPr>
+            <a:r>
+              <a:t>se ha distinguido review de retrospectiva;</a:t>
+            </a:r>
+          </a:p>
+        </p:txBody>
+      </p:sp>
+      <p:sp>
+        <p:nvSpPr>
+          <p:cNvPr id="14" name="Rounded Rectangle 13"/>
+          <p:cNvSpPr/>
+          <p:nvPr/>
+        </p:nvSpPr>
+        <p:spPr>
+          <a:xfrm>
+            <a:off x="713232" y="3434225"/>
+            <a:ext cx="420624" cy="420624"/>
+          </a:xfrm>
+          <a:prstGeom prst="roundRect">
+            <a:avLst/>
+          </a:prstGeom>
+          <a:solidFill>
+            <a:srgbClr val="FFFFFF"/>
+          </a:solidFill>
+          <a:ln>
+            <a:solidFill>
+              <a:srgbClr val="CC4F3E"/>
+            </a:solidFill>
+          </a:ln>
+        </p:spPr>
+        <p:style>
+          <a:lnRef idx="1">
+            <a:schemeClr val="accent1"/>
+          </a:lnRef>
+          <a:fillRef idx="3">
+            <a:schemeClr val="accent1"/>
+          </a:fillRef>
+          <a:effectRef idx="2">
+            <a:schemeClr val="accent1"/>
+          </a:effectRef>
+          <a:fontRef idx="minor">
+            <a:schemeClr val="lt1"/>
+          </a:fontRef>
+        </p:style>
+        <p:txBody>
+          <a:bodyPr rtlCol="0" anchor="ctr"/>
+          <a:lstStyle/>
+          <a:p>
+            <a:pPr algn="ctr"/>
+          </a:p>
+        </p:txBody>
+      </p:sp>
+      <p:sp>
+        <p:nvSpPr>
+          <p:cNvPr id="15" name="TextBox 14"/>
+          <p:cNvSpPr txBox="1"/>
+          <p:nvPr/>
+        </p:nvSpPr>
+        <p:spPr>
+          <a:xfrm>
+            <a:off x="1389888" y="3415937"/>
+            <a:ext cx="9829800" cy="675349"/>
+          </a:xfrm>
+          <a:prstGeom prst="rect">
+            <a:avLst/>
+          </a:prstGeom>
+          <a:noFill/>
+        </p:spPr>
+        <p:txBody>
+          <a:bodyPr wrap="square" lIns="45720" rIns="45720" tIns="36576" bIns="36576" anchor="t">
+            <a:spAutoFit/>
+          </a:bodyPr>
+          <a:lstStyle/>
+          <a:p>
+            <a:pPr algn="l">
+              <a:defRPr sz="1600" b="0">
+                <a:solidFill>
+                  <a:srgbClr val="1C2330"/>
+                </a:solidFill>
+                <a:latin typeface="Aptos"/>
+              </a:defRPr>
+            </a:pPr>
+            <a:r>
+              <a:t>existe una decisión argumentada sobre la composición;</a:t>
+            </a:r>
+          </a:p>
+        </p:txBody>
+      </p:sp>
+      <p:sp>
+        <p:nvSpPr>
+          <p:cNvPr id="16" name="Rounded Rectangle 15"/>
+          <p:cNvSpPr/>
+          <p:nvPr/>
+        </p:nvSpPr>
+        <p:spPr>
+          <a:xfrm>
+            <a:off x="713232" y="4146150"/>
+            <a:ext cx="420624" cy="420624"/>
+          </a:xfrm>
+          <a:prstGeom prst="roundRect">
+            <a:avLst/>
+          </a:prstGeom>
+          <a:solidFill>
+            <a:srgbClr val="FFFFFF"/>
+          </a:solidFill>
+          <a:ln>
+            <a:solidFill>
+              <a:srgbClr val="CC4F3E"/>
+            </a:solidFill>
+          </a:ln>
+        </p:spPr>
+        <p:style>
+          <a:lnRef idx="1">
+            <a:schemeClr val="accent1"/>
+          </a:lnRef>
+          <a:fillRef idx="3">
+            <a:schemeClr val="accent1"/>
+          </a:fillRef>
+          <a:effectRef idx="2">
+            <a:schemeClr val="accent1"/>
+          </a:effectRef>
+          <a:fontRef idx="minor">
+            <a:schemeClr val="lt1"/>
+          </a:fontRef>
+        </p:style>
+        <p:txBody>
+          <a:bodyPr rtlCol="0" anchor="ctr"/>
+          <a:lstStyle/>
+          <a:p>
+            <a:pPr algn="ctr"/>
+          </a:p>
+        </p:txBody>
+      </p:sp>
+      <p:sp>
+        <p:nvSpPr>
+          <p:cNvPr id="17" name="TextBox 16"/>
+          <p:cNvSpPr txBox="1"/>
+          <p:nvPr/>
+        </p:nvSpPr>
+        <p:spPr>
+          <a:xfrm>
+            <a:off x="1389888" y="4127862"/>
+            <a:ext cx="9829800" cy="675349"/>
+          </a:xfrm>
+          <a:prstGeom prst="rect">
+            <a:avLst/>
+          </a:prstGeom>
+          <a:noFill/>
+        </p:spPr>
+        <p:txBody>
+          <a:bodyPr wrap="square" lIns="45720" rIns="45720" tIns="36576" bIns="36576" anchor="t">
+            <a:spAutoFit/>
+          </a:bodyPr>
+          <a:lstStyle/>
+          <a:p>
+            <a:pPr algn="l">
+              <a:defRPr sz="1600" b="0">
+                <a:solidFill>
+                  <a:srgbClr val="1C2330"/>
+                </a:solidFill>
+                <a:latin typeface="Aptos"/>
+              </a:defRPr>
+            </a:pPr>
+            <a:r>
+              <a:t>las funciones están definidas y no son jerárquicas;</a:t>
+            </a:r>
+          </a:p>
+        </p:txBody>
+      </p:sp>
+      <p:sp>
+        <p:nvSpPr>
+          <p:cNvPr id="18" name="Rounded Rectangle 17"/>
+          <p:cNvSpPr/>
+          <p:nvPr/>
+        </p:nvSpPr>
+        <p:spPr>
+          <a:xfrm>
+            <a:off x="713232" y="4858076"/>
+            <a:ext cx="420624" cy="420624"/>
+          </a:xfrm>
+          <a:prstGeom prst="roundRect">
+            <a:avLst/>
+          </a:prstGeom>
+          <a:solidFill>
+            <a:srgbClr val="FFFFFF"/>
+          </a:solidFill>
+          <a:ln>
+            <a:solidFill>
+              <a:srgbClr val="CC4F3E"/>
+            </a:solidFill>
+          </a:ln>
+        </p:spPr>
+        <p:style>
+          <a:lnRef idx="1">
+            <a:schemeClr val="accent1"/>
+          </a:lnRef>
+          <a:fillRef idx="3">
+            <a:schemeClr val="accent1"/>
+          </a:fillRef>
+          <a:effectRef idx="2">
+            <a:schemeClr val="accent1"/>
+          </a:effectRef>
+          <a:fontRef idx="minor">
+            <a:schemeClr val="lt1"/>
+          </a:fontRef>
+        </p:style>
+        <p:txBody>
+          <a:bodyPr rtlCol="0" anchor="ctr"/>
+          <a:lstStyle/>
+          <a:p>
+            <a:pPr algn="ctr"/>
+          </a:p>
+        </p:txBody>
+      </p:sp>
+      <p:sp>
+        <p:nvSpPr>
+          <p:cNvPr id="19" name="TextBox 18"/>
+          <p:cNvSpPr txBox="1"/>
+          <p:nvPr/>
+        </p:nvSpPr>
+        <p:spPr>
+          <a:xfrm>
+            <a:off x="1389888" y="4839788"/>
+            <a:ext cx="9829800" cy="675349"/>
+          </a:xfrm>
+          <a:prstGeom prst="rect">
+            <a:avLst/>
+          </a:prstGeom>
+          <a:noFill/>
+        </p:spPr>
+        <p:txBody>
+          <a:bodyPr wrap="square" lIns="45720" rIns="45720" tIns="36576" bIns="36576" anchor="t">
+            <a:spAutoFit/>
+          </a:bodyPr>
+          <a:lstStyle/>
+          <a:p>
+            <a:pPr algn="l">
+              <a:defRPr sz="1600" b="0">
+                <a:solidFill>
+                  <a:srgbClr val="1C2330"/>
+                </a:solidFill>
+                <a:latin typeface="Aptos"/>
+              </a:defRPr>
+            </a:pPr>
+            <a:r>
+              <a:t>existe un compromiso concreto de rotación;</a:t>
+            </a:r>
+          </a:p>
+        </p:txBody>
+      </p:sp>
+      <p:sp>
+        <p:nvSpPr>
+          <p:cNvPr id="20" name="Rounded Rectangle 19"/>
+          <p:cNvSpPr/>
+          <p:nvPr/>
+        </p:nvSpPr>
+        <p:spPr>
+          <a:xfrm>
+            <a:off x="713232" y="5570002"/>
+            <a:ext cx="420624" cy="420624"/>
+          </a:xfrm>
+          <a:prstGeom prst="roundRect">
+            <a:avLst/>
+          </a:prstGeom>
+          <a:solidFill>
+            <a:srgbClr val="FFFFFF"/>
+          </a:solidFill>
+          <a:ln>
+            <a:solidFill>
+              <a:srgbClr val="CC4F3E"/>
+            </a:solidFill>
+          </a:ln>
+        </p:spPr>
+        <p:style>
+          <a:lnRef idx="1">
+            <a:schemeClr val="accent1"/>
+          </a:lnRef>
+          <a:fillRef idx="3">
+            <a:schemeClr val="accent1"/>
+          </a:fillRef>
+          <a:effectRef idx="2">
+            <a:schemeClr val="accent1"/>
+          </a:effectRef>
+          <a:fontRef idx="minor">
+            <a:schemeClr val="lt1"/>
+          </a:fontRef>
+        </p:style>
+        <p:txBody>
+          <a:bodyPr rtlCol="0" anchor="ctr"/>
+          <a:lstStyle/>
+          <a:p>
+            <a:pPr algn="ctr"/>
+          </a:p>
+        </p:txBody>
+      </p:sp>
+      <p:sp>
+        <p:nvSpPr>
+          <p:cNvPr id="21" name="TextBox 20"/>
+          <p:cNvSpPr txBox="1"/>
+          <p:nvPr/>
+        </p:nvSpPr>
+        <p:spPr>
+          <a:xfrm>
+            <a:off x="1389888" y="5551714"/>
+            <a:ext cx="9829800" cy="675349"/>
+          </a:xfrm>
+          <a:prstGeom prst="rect">
+            <a:avLst/>
+          </a:prstGeom>
+          <a:noFill/>
+        </p:spPr>
+        <p:txBody>
+          <a:bodyPr wrap="square" lIns="45720" rIns="45720" tIns="36576" bIns="36576" anchor="t">
+            <a:spAutoFit/>
+          </a:bodyPr>
+          <a:lstStyle/>
+          <a:p>
+            <a:pPr algn="l">
+              <a:defRPr sz="1600" b="0">
+                <a:solidFill>
+                  <a:srgbClr val="1C2330"/>
+                </a:solidFill>
+                <a:latin typeface="Aptos"/>
+              </a:defRPr>
+            </a:pPr>
+            <a:r>
+              <a:t>el contrato contiene reglas observables;</a:t>
             </a:r>
           </a:p>
         </p:txBody>

--- a/02-PROFESORADO/03-PRESENTACIONES/POR-SESION/h0/S205-transferencia-a-minijarvis-y-contrato-de-equipo-presentacion.pptx
+++ b/02-PROFESORADO/03-PRESENTACIONES/POR-SESION/h0/S205-transferencia-a-minijarvis-y-contrato-de-equipo-presentacion.pptx
@@ -3404,7 +3404,7 @@
               </a:defRPr>
             </a:pPr>
             <a:r>
-              <a:t>Equipos provisionales de la torre, con cierre individual</a:t>
+              <a:t>Individual → puesta en común en equipo</a:t>
             </a:r>
           </a:p>
         </p:txBody>
@@ -3440,7 +3440,7 @@
               </a:defRPr>
             </a:pPr>
             <a:r>
-              <a:t>MINIJARVIS · PROGRAMACIÓN + ENTORNOS DE DESARROLLO</a:t>
+              <a:t>MINIJARVIS · PROGRAMACIÓN</a:t>
             </a:r>
           </a:p>
         </p:txBody>

--- a/02-PROFESORADO/03-PRESENTACIONES/POR-SESION/h0/S205-transferencia-a-minijarvis-y-contrato-de-equipo-presentacion.pptx
+++ b/02-PROFESORADO/03-PRESENTACIONES/POR-SESION/h0/S205-transferencia-a-minijarvis-y-contrato-de-equipo-presentacion.pptx
@@ -115,6 +115,1082 @@
     </a:lvl9pPr>
   </p:defaultTextStyle>
 </p:presentation>
+</file>
+
+<file path=ppt/notesMasters/notesMaster1.xml><?xml version="1.0" encoding="utf-8"?>
+<p:notesMaster xmlns:a="http://schemas.openxmlformats.org/drawingml/2006/main" xmlns:p="http://schemas.openxmlformats.org/presentationml/2006/main" xmlns:r="http://schemas.openxmlformats.org/officeDocument/2006/relationships">
+  <p:cSld>
+    <p:bg>
+      <p:bgRef idx="1001">
+        <a:schemeClr val="bg1"/>
+      </p:bgRef>
+    </p:bg>
+    <p:spTree>
+      <p:nvGrpSpPr>
+        <p:cNvPr id="1" name=""/>
+        <p:cNvGrpSpPr/>
+        <p:nvPr/>
+      </p:nvGrpSpPr>
+      <p:grpSpPr>
+        <a:xfrm>
+          <a:off x="0" y="0"/>
+          <a:ext cx="0" cy="0"/>
+          <a:chOff x="0" y="0"/>
+          <a:chExt cx="0" cy="0"/>
+        </a:xfrm>
+      </p:grpSpPr>
+      <p:sp>
+        <p:nvSpPr>
+          <p:cNvPr id="2" name="Header Placeholder 1"/>
+          <p:cNvSpPr>
+            <a:spLocks noGrp="1"/>
+          </p:cNvSpPr>
+          <p:nvPr>
+            <p:ph type="hdr" sz="quarter"/>
+          </p:nvPr>
+        </p:nvSpPr>
+        <p:spPr>
+          <a:xfrm>
+            <a:off x="0" y="0"/>
+            <a:ext cx="2971800" cy="457200"/>
+          </a:xfrm>
+          <a:prstGeom prst="rect">
+            <a:avLst/>
+          </a:prstGeom>
+        </p:spPr>
+        <p:txBody>
+          <a:bodyPr vert="horz" lIns="91440" tIns="45720" rIns="91440" bIns="45720" rtlCol="0"/>
+          <a:lstStyle>
+            <a:lvl1pPr algn="l">
+              <a:defRPr sz="1200"/>
+            </a:lvl1pPr>
+          </a:lstStyle>
+          <a:p>
+            <a:endParaRPr lang="en-US"/>
+          </a:p>
+        </p:txBody>
+      </p:sp>
+      <p:sp>
+        <p:nvSpPr>
+          <p:cNvPr id="3" name="Date Placeholder 2"/>
+          <p:cNvSpPr>
+            <a:spLocks noGrp="1"/>
+          </p:cNvSpPr>
+          <p:nvPr>
+            <p:ph type="dt" idx="1"/>
+          </p:nvPr>
+        </p:nvSpPr>
+        <p:spPr>
+          <a:xfrm>
+            <a:off x="3884613" y="0"/>
+            <a:ext cx="2971800" cy="457200"/>
+          </a:xfrm>
+          <a:prstGeom prst="rect">
+            <a:avLst/>
+          </a:prstGeom>
+        </p:spPr>
+        <p:txBody>
+          <a:bodyPr vert="horz" lIns="91440" tIns="45720" rIns="91440" bIns="45720" rtlCol="0"/>
+          <a:lstStyle>
+            <a:lvl1pPr algn="r">
+              <a:defRPr sz="1200"/>
+            </a:lvl1pPr>
+          </a:lstStyle>
+          <a:p>
+            <a:fld id="{0F89C1C7-3DCD-1040-A9CF-14679D8B5DDD}" type="datetimeFigureOut">
+              <a:rPr lang="en-US" smtClean="0"/>
+              <a:t>10/17/16</a:t>
+            </a:fld>
+            <a:endParaRPr lang="en-US"/>
+          </a:p>
+        </p:txBody>
+      </p:sp>
+      <p:sp>
+        <p:nvSpPr>
+          <p:cNvPr id="4" name="Slide Image Placeholder 3"/>
+          <p:cNvSpPr>
+            <a:spLocks noGrp="1" noRot="1" noChangeAspect="1"/>
+          </p:cNvSpPr>
+          <p:nvPr>
+            <p:ph type="sldImg" idx="2"/>
+          </p:nvPr>
+        </p:nvSpPr>
+        <p:spPr>
+          <a:xfrm>
+            <a:off x="1143000" y="685800"/>
+            <a:ext cx="4572000" cy="3429000"/>
+          </a:xfrm>
+          <a:prstGeom prst="rect">
+            <a:avLst/>
+          </a:prstGeom>
+          <a:noFill/>
+          <a:ln w="12700">
+            <a:solidFill>
+              <a:prstClr val="black"/>
+            </a:solidFill>
+          </a:ln>
+        </p:spPr>
+        <p:txBody>
+          <a:bodyPr vert="horz" lIns="91440" tIns="45720" rIns="91440" bIns="45720" rtlCol="0" anchor="ctr"/>
+          <a:lstStyle/>
+          <a:p>
+            <a:endParaRPr lang="en-US"/>
+          </a:p>
+        </p:txBody>
+      </p:sp>
+      <p:sp>
+        <p:nvSpPr>
+          <p:cNvPr id="5" name="Notes Placeholder 4"/>
+          <p:cNvSpPr>
+            <a:spLocks noGrp="1"/>
+          </p:cNvSpPr>
+          <p:nvPr>
+            <p:ph type="body" sz="quarter" idx="3"/>
+          </p:nvPr>
+        </p:nvSpPr>
+        <p:spPr>
+          <a:xfrm>
+            <a:off x="685800" y="4343400"/>
+            <a:ext cx="5486400" cy="4114800"/>
+          </a:xfrm>
+          <a:prstGeom prst="rect">
+            <a:avLst/>
+          </a:prstGeom>
+        </p:spPr>
+        <p:txBody>
+          <a:bodyPr vert="horz" lIns="91440" tIns="45720" rIns="91440" bIns="45720" rtlCol="0"/>
+          <a:lstStyle/>
+          <a:p>
+            <a:pPr lvl="0"/>
+            <a:r>
+              <a:rPr lang="en-US" smtClean="0"/>
+              <a:t>Click to edit Master text styles</a:t>
+            </a:r>
+          </a:p>
+          <a:p>
+            <a:pPr lvl="1"/>
+            <a:r>
+              <a:rPr lang="en-US" smtClean="0"/>
+              <a:t>Second level</a:t>
+            </a:r>
+          </a:p>
+          <a:p>
+            <a:pPr lvl="2"/>
+            <a:r>
+              <a:rPr lang="en-US" smtClean="0"/>
+              <a:t>Third level</a:t>
+            </a:r>
+          </a:p>
+          <a:p>
+            <a:pPr lvl="3"/>
+            <a:r>
+              <a:rPr lang="en-US" smtClean="0"/>
+              <a:t>Fourth level</a:t>
+            </a:r>
+          </a:p>
+          <a:p>
+            <a:pPr lvl="4"/>
+            <a:r>
+              <a:rPr lang="en-US" smtClean="0"/>
+              <a:t>Fifth level</a:t>
+            </a:r>
+            <a:endParaRPr lang="en-US"/>
+          </a:p>
+        </p:txBody>
+      </p:sp>
+      <p:sp>
+        <p:nvSpPr>
+          <p:cNvPr id="6" name="Footer Placeholder 5"/>
+          <p:cNvSpPr>
+            <a:spLocks noGrp="1"/>
+          </p:cNvSpPr>
+          <p:nvPr>
+            <p:ph type="ftr" sz="quarter" idx="4"/>
+          </p:nvPr>
+        </p:nvSpPr>
+        <p:spPr>
+          <a:xfrm>
+            <a:off x="0" y="8685213"/>
+            <a:ext cx="2971800" cy="457200"/>
+          </a:xfrm>
+          <a:prstGeom prst="rect">
+            <a:avLst/>
+          </a:prstGeom>
+        </p:spPr>
+        <p:txBody>
+          <a:bodyPr vert="horz" lIns="91440" tIns="45720" rIns="91440" bIns="45720" rtlCol="0" anchor="b"/>
+          <a:lstStyle>
+            <a:lvl1pPr algn="l">
+              <a:defRPr sz="1200"/>
+            </a:lvl1pPr>
+          </a:lstStyle>
+          <a:p>
+            <a:endParaRPr lang="en-US"/>
+          </a:p>
+        </p:txBody>
+      </p:sp>
+      <p:sp>
+        <p:nvSpPr>
+          <p:cNvPr id="7" name="Slide Number Placeholder 6"/>
+          <p:cNvSpPr>
+            <a:spLocks noGrp="1"/>
+          </p:cNvSpPr>
+          <p:nvPr>
+            <p:ph type="sldNum" sz="quarter" idx="5"/>
+          </p:nvPr>
+        </p:nvSpPr>
+        <p:spPr>
+          <a:xfrm>
+            <a:off x="3884613" y="8685213"/>
+            <a:ext cx="2971800" cy="457200"/>
+          </a:xfrm>
+          <a:prstGeom prst="rect">
+            <a:avLst/>
+          </a:prstGeom>
+        </p:spPr>
+        <p:txBody>
+          <a:bodyPr vert="horz" lIns="91440" tIns="45720" rIns="91440" bIns="45720" rtlCol="0" anchor="b"/>
+          <a:lstStyle>
+            <a:lvl1pPr algn="r">
+              <a:defRPr sz="1200"/>
+            </a:lvl1pPr>
+          </a:lstStyle>
+          <a:p>
+            <a:fld id="{BB5E49A5-4136-284D-997B-48E1D791AD67}" type="slidenum">
+              <a:rPr lang="en-US" smtClean="0"/>
+              <a:t>‹#›</a:t>
+            </a:fld>
+            <a:endParaRPr lang="en-US"/>
+          </a:p>
+        </p:txBody>
+      </p:sp>
+    </p:spTree>
+    <p:extLst>
+      <p:ext uri="{BB962C8B-B14F-4D97-AF65-F5344CB8AC3E}">
+        <p14:creationId xmlns:p14="http://schemas.microsoft.com/office/powerpoint/2010/main" val="2623252185"/>
+      </p:ext>
+    </p:extLst>
+  </p:cSld>
+  <p:clrMap bg1="lt1" tx1="dk1" bg2="lt2" tx2="dk2" accent1="accent1" accent2="accent2" accent3="accent3" accent4="accent4" accent5="accent5" accent6="accent6" hlink="hlink" folHlink="folHlink"/>
+  <p:notesStyle>
+    <a:lvl1pPr marL="0" algn="l" defTabSz="457200" rtl="0" eaLnBrk="1" latinLnBrk="0" hangingPunct="1">
+      <a:defRPr sz="1200" kern="1200">
+        <a:solidFill>
+          <a:schemeClr val="tx1"/>
+        </a:solidFill>
+        <a:latin typeface="+mn-lt"/>
+        <a:ea typeface="+mn-ea"/>
+        <a:cs typeface="+mn-cs"/>
+      </a:defRPr>
+    </a:lvl1pPr>
+    <a:lvl2pPr marL="457200" algn="l" defTabSz="457200" rtl="0" eaLnBrk="1" latinLnBrk="0" hangingPunct="1">
+      <a:defRPr sz="1200" kern="1200">
+        <a:solidFill>
+          <a:schemeClr val="tx1"/>
+        </a:solidFill>
+        <a:latin typeface="+mn-lt"/>
+        <a:ea typeface="+mn-ea"/>
+        <a:cs typeface="+mn-cs"/>
+      </a:defRPr>
+    </a:lvl2pPr>
+    <a:lvl3pPr marL="914400" algn="l" defTabSz="457200" rtl="0" eaLnBrk="1" latinLnBrk="0" hangingPunct="1">
+      <a:defRPr sz="1200" kern="1200">
+        <a:solidFill>
+          <a:schemeClr val="tx1"/>
+        </a:solidFill>
+        <a:latin typeface="+mn-lt"/>
+        <a:ea typeface="+mn-ea"/>
+        <a:cs typeface="+mn-cs"/>
+      </a:defRPr>
+    </a:lvl3pPr>
+    <a:lvl4pPr marL="1371600" algn="l" defTabSz="457200" rtl="0" eaLnBrk="1" latinLnBrk="0" hangingPunct="1">
+      <a:defRPr sz="1200" kern="1200">
+        <a:solidFill>
+          <a:schemeClr val="tx1"/>
+        </a:solidFill>
+        <a:latin typeface="+mn-lt"/>
+        <a:ea typeface="+mn-ea"/>
+        <a:cs typeface="+mn-cs"/>
+      </a:defRPr>
+    </a:lvl4pPr>
+    <a:lvl5pPr marL="1828800" algn="l" defTabSz="457200" rtl="0" eaLnBrk="1" latinLnBrk="0" hangingPunct="1">
+      <a:defRPr sz="1200" kern="1200">
+        <a:solidFill>
+          <a:schemeClr val="tx1"/>
+        </a:solidFill>
+        <a:latin typeface="+mn-lt"/>
+        <a:ea typeface="+mn-ea"/>
+        <a:cs typeface="+mn-cs"/>
+      </a:defRPr>
+    </a:lvl5pPr>
+    <a:lvl6pPr marL="2286000" algn="l" defTabSz="457200" rtl="0" eaLnBrk="1" latinLnBrk="0" hangingPunct="1">
+      <a:defRPr sz="1200" kern="1200">
+        <a:solidFill>
+          <a:schemeClr val="tx1"/>
+        </a:solidFill>
+        <a:latin typeface="+mn-lt"/>
+        <a:ea typeface="+mn-ea"/>
+        <a:cs typeface="+mn-cs"/>
+      </a:defRPr>
+    </a:lvl6pPr>
+    <a:lvl7pPr marL="2743200" algn="l" defTabSz="457200" rtl="0" eaLnBrk="1" latinLnBrk="0" hangingPunct="1">
+      <a:defRPr sz="1200" kern="1200">
+        <a:solidFill>
+          <a:schemeClr val="tx1"/>
+        </a:solidFill>
+        <a:latin typeface="+mn-lt"/>
+        <a:ea typeface="+mn-ea"/>
+        <a:cs typeface="+mn-cs"/>
+      </a:defRPr>
+    </a:lvl7pPr>
+    <a:lvl8pPr marL="3200400" algn="l" defTabSz="457200" rtl="0" eaLnBrk="1" latinLnBrk="0" hangingPunct="1">
+      <a:defRPr sz="1200" kern="1200">
+        <a:solidFill>
+          <a:schemeClr val="tx1"/>
+        </a:solidFill>
+        <a:latin typeface="+mn-lt"/>
+        <a:ea typeface="+mn-ea"/>
+        <a:cs typeface="+mn-cs"/>
+      </a:defRPr>
+    </a:lvl8pPr>
+    <a:lvl9pPr marL="3657600" algn="l" defTabSz="457200" rtl="0" eaLnBrk="1" latinLnBrk="0" hangingPunct="1">
+      <a:defRPr sz="1200" kern="1200">
+        <a:solidFill>
+          <a:schemeClr val="tx1"/>
+        </a:solidFill>
+        <a:latin typeface="+mn-lt"/>
+        <a:ea typeface="+mn-ea"/>
+        <a:cs typeface="+mn-cs"/>
+      </a:defRPr>
+    </a:lvl9pPr>
+  </p:notesStyle>
+</p:notesMaster>
+</file>
+
+<file path=ppt/notesSlides/notesSlide1.xml><?xml version="1.0" encoding="utf-8"?>
+<p:notes xmlns:a="http://schemas.openxmlformats.org/drawingml/2006/main" xmlns:p="http://schemas.openxmlformats.org/presentationml/2006/main" xmlns:r="http://schemas.openxmlformats.org/officeDocument/2006/relationships">
+  <p:cSld>
+    <p:spTree>
+      <p:nvGrpSpPr>
+        <p:cNvPr id="1" name=""/>
+        <p:cNvGrpSpPr/>
+        <p:nvPr/>
+      </p:nvGrpSpPr>
+      <p:grpSpPr>
+        <a:xfrm>
+          <a:off x="0" y="0"/>
+          <a:ext cx="0" cy="0"/>
+          <a:chOff x="0" y="0"/>
+          <a:chExt cx="0" cy="0"/>
+        </a:xfrm>
+      </p:grpSpPr>
+      <p:sp>
+        <p:nvSpPr>
+          <p:cNvPr id="2" name="Slide Image Placeholder 1"/>
+          <p:cNvSpPr>
+            <a:spLocks noGrp="1"/>
+          </p:cNvSpPr>
+          <p:nvPr>
+            <p:ph type="sldImg" idx="2"/>
+          </p:nvPr>
+        </p:nvSpPr>
+        <p:spPr/>
+      </p:sp>
+      <p:sp>
+        <p:nvSpPr>
+          <p:cNvPr id="3" name="Notes Placeholder 2"/>
+          <p:cNvSpPr>
+            <a:spLocks noGrp="1"/>
+          </p:cNvSpPr>
+          <p:nvPr>
+            <p:ph type="body" idx="3" sz="quarter"/>
+          </p:nvPr>
+        </p:nvSpPr>
+        <p:spPr/>
+        <p:txBody>
+          <a:bodyPr/>
+          <a:lstStyle/>
+          <a:p/>
+        </p:txBody>
+      </p:sp>
+      <p:sp>
+        <p:nvSpPr>
+          <p:cNvPr id="4" name="Slide Number Placeholder 3"/>
+          <p:cNvSpPr>
+            <a:spLocks noGrp="1"/>
+          </p:cNvSpPr>
+          <p:nvPr>
+            <p:ph type="sldNum" idx="5" sz="quarter"/>
+          </p:nvPr>
+        </p:nvSpPr>
+        <p:spPr/>
+      </p:sp>
+    </p:spTree>
+  </p:cSld>
+  <p:clrMapOvr>
+    <a:masterClrMapping/>
+  </p:clrMapOvr>
+</p:notes>
+</file>
+
+<file path=ppt/notesSlides/notesSlide10.xml><?xml version="1.0" encoding="utf-8"?>
+<p:notes xmlns:a="http://schemas.openxmlformats.org/drawingml/2006/main" xmlns:p="http://schemas.openxmlformats.org/presentationml/2006/main" xmlns:r="http://schemas.openxmlformats.org/officeDocument/2006/relationships">
+  <p:cSld>
+    <p:spTree>
+      <p:nvGrpSpPr>
+        <p:cNvPr id="1" name=""/>
+        <p:cNvGrpSpPr/>
+        <p:nvPr/>
+      </p:nvGrpSpPr>
+      <p:grpSpPr>
+        <a:xfrm>
+          <a:off x="0" y="0"/>
+          <a:ext cx="0" cy="0"/>
+          <a:chOff x="0" y="0"/>
+          <a:chExt cx="0" cy="0"/>
+        </a:xfrm>
+      </p:grpSpPr>
+      <p:sp>
+        <p:nvSpPr>
+          <p:cNvPr id="2" name="Slide Image Placeholder 1"/>
+          <p:cNvSpPr>
+            <a:spLocks noGrp="1"/>
+          </p:cNvSpPr>
+          <p:nvPr>
+            <p:ph type="sldImg" idx="2"/>
+          </p:nvPr>
+        </p:nvSpPr>
+        <p:spPr/>
+      </p:sp>
+      <p:sp>
+        <p:nvSpPr>
+          <p:cNvPr id="3" name="Notes Placeholder 2"/>
+          <p:cNvSpPr>
+            <a:spLocks noGrp="1"/>
+          </p:cNvSpPr>
+          <p:nvPr>
+            <p:ph type="body" idx="3" sz="quarter"/>
+          </p:nvPr>
+        </p:nvSpPr>
+        <p:spPr/>
+        <p:txBody>
+          <a:bodyPr/>
+          <a:lstStyle/>
+          <a:p/>
+        </p:txBody>
+      </p:sp>
+      <p:sp>
+        <p:nvSpPr>
+          <p:cNvPr id="4" name="Slide Number Placeholder 3"/>
+          <p:cNvSpPr>
+            <a:spLocks noGrp="1"/>
+          </p:cNvSpPr>
+          <p:nvPr>
+            <p:ph type="sldNum" idx="5" sz="quarter"/>
+          </p:nvPr>
+        </p:nvSpPr>
+        <p:spPr/>
+      </p:sp>
+    </p:spTree>
+  </p:cSld>
+  <p:clrMapOvr>
+    <a:masterClrMapping/>
+  </p:clrMapOvr>
+</p:notes>
+</file>
+
+<file path=ppt/notesSlides/notesSlide11.xml><?xml version="1.0" encoding="utf-8"?>
+<p:notes xmlns:a="http://schemas.openxmlformats.org/drawingml/2006/main" xmlns:p="http://schemas.openxmlformats.org/presentationml/2006/main" xmlns:r="http://schemas.openxmlformats.org/officeDocument/2006/relationships">
+  <p:cSld>
+    <p:spTree>
+      <p:nvGrpSpPr>
+        <p:cNvPr id="1" name=""/>
+        <p:cNvGrpSpPr/>
+        <p:nvPr/>
+      </p:nvGrpSpPr>
+      <p:grpSpPr>
+        <a:xfrm>
+          <a:off x="0" y="0"/>
+          <a:ext cx="0" cy="0"/>
+          <a:chOff x="0" y="0"/>
+          <a:chExt cx="0" cy="0"/>
+        </a:xfrm>
+      </p:grpSpPr>
+      <p:sp>
+        <p:nvSpPr>
+          <p:cNvPr id="2" name="Slide Image Placeholder 1"/>
+          <p:cNvSpPr>
+            <a:spLocks noGrp="1"/>
+          </p:cNvSpPr>
+          <p:nvPr>
+            <p:ph type="sldImg" idx="2"/>
+          </p:nvPr>
+        </p:nvSpPr>
+        <p:spPr/>
+      </p:sp>
+      <p:sp>
+        <p:nvSpPr>
+          <p:cNvPr id="3" name="Notes Placeholder 2"/>
+          <p:cNvSpPr>
+            <a:spLocks noGrp="1"/>
+          </p:cNvSpPr>
+          <p:nvPr>
+            <p:ph type="body" idx="3" sz="quarter"/>
+          </p:nvPr>
+        </p:nvSpPr>
+        <p:spPr/>
+        <p:txBody>
+          <a:bodyPr/>
+          <a:lstStyle/>
+          <a:p/>
+        </p:txBody>
+      </p:sp>
+      <p:sp>
+        <p:nvSpPr>
+          <p:cNvPr id="4" name="Slide Number Placeholder 3"/>
+          <p:cNvSpPr>
+            <a:spLocks noGrp="1"/>
+          </p:cNvSpPr>
+          <p:nvPr>
+            <p:ph type="sldNum" idx="5" sz="quarter"/>
+          </p:nvPr>
+        </p:nvSpPr>
+        <p:spPr/>
+      </p:sp>
+    </p:spTree>
+  </p:cSld>
+  <p:clrMapOvr>
+    <a:masterClrMapping/>
+  </p:clrMapOvr>
+</p:notes>
+</file>
+
+<file path=ppt/notesSlides/notesSlide2.xml><?xml version="1.0" encoding="utf-8"?>
+<p:notes xmlns:a="http://schemas.openxmlformats.org/drawingml/2006/main" xmlns:p="http://schemas.openxmlformats.org/presentationml/2006/main" xmlns:r="http://schemas.openxmlformats.org/officeDocument/2006/relationships">
+  <p:cSld>
+    <p:spTree>
+      <p:nvGrpSpPr>
+        <p:cNvPr id="1" name=""/>
+        <p:cNvGrpSpPr/>
+        <p:nvPr/>
+      </p:nvGrpSpPr>
+      <p:grpSpPr>
+        <a:xfrm>
+          <a:off x="0" y="0"/>
+          <a:ext cx="0" cy="0"/>
+          <a:chOff x="0" y="0"/>
+          <a:chExt cx="0" cy="0"/>
+        </a:xfrm>
+      </p:grpSpPr>
+      <p:sp>
+        <p:nvSpPr>
+          <p:cNvPr id="2" name="Slide Image Placeholder 1"/>
+          <p:cNvSpPr>
+            <a:spLocks noGrp="1"/>
+          </p:cNvSpPr>
+          <p:nvPr>
+            <p:ph type="sldImg" idx="2"/>
+          </p:nvPr>
+        </p:nvSpPr>
+        <p:spPr/>
+      </p:sp>
+      <p:sp>
+        <p:nvSpPr>
+          <p:cNvPr id="3" name="Notes Placeholder 2"/>
+          <p:cNvSpPr>
+            <a:spLocks noGrp="1"/>
+          </p:cNvSpPr>
+          <p:nvPr>
+            <p:ph type="body" idx="3" sz="quarter"/>
+          </p:nvPr>
+        </p:nvSpPr>
+        <p:spPr/>
+        <p:txBody>
+          <a:bodyPr/>
+          <a:lstStyle/>
+          <a:p/>
+        </p:txBody>
+      </p:sp>
+      <p:sp>
+        <p:nvSpPr>
+          <p:cNvPr id="4" name="Slide Number Placeholder 3"/>
+          <p:cNvSpPr>
+            <a:spLocks noGrp="1"/>
+          </p:cNvSpPr>
+          <p:nvPr>
+            <p:ph type="sldNum" idx="5" sz="quarter"/>
+          </p:nvPr>
+        </p:nvSpPr>
+        <p:spPr/>
+      </p:sp>
+    </p:spTree>
+  </p:cSld>
+  <p:clrMapOvr>
+    <a:masterClrMapping/>
+  </p:clrMapOvr>
+</p:notes>
+</file>
+
+<file path=ppt/notesSlides/notesSlide3.xml><?xml version="1.0" encoding="utf-8"?>
+<p:notes xmlns:a="http://schemas.openxmlformats.org/drawingml/2006/main" xmlns:p="http://schemas.openxmlformats.org/presentationml/2006/main" xmlns:r="http://schemas.openxmlformats.org/officeDocument/2006/relationships">
+  <p:cSld>
+    <p:spTree>
+      <p:nvGrpSpPr>
+        <p:cNvPr id="1" name=""/>
+        <p:cNvGrpSpPr/>
+        <p:nvPr/>
+      </p:nvGrpSpPr>
+      <p:grpSpPr>
+        <a:xfrm>
+          <a:off x="0" y="0"/>
+          <a:ext cx="0" cy="0"/>
+          <a:chOff x="0" y="0"/>
+          <a:chExt cx="0" cy="0"/>
+        </a:xfrm>
+      </p:grpSpPr>
+      <p:sp>
+        <p:nvSpPr>
+          <p:cNvPr id="2" name="Slide Image Placeholder 1"/>
+          <p:cNvSpPr>
+            <a:spLocks noGrp="1"/>
+          </p:cNvSpPr>
+          <p:nvPr>
+            <p:ph type="sldImg" idx="2"/>
+          </p:nvPr>
+        </p:nvSpPr>
+        <p:spPr/>
+      </p:sp>
+      <p:sp>
+        <p:nvSpPr>
+          <p:cNvPr id="3" name="Notes Placeholder 2"/>
+          <p:cNvSpPr>
+            <a:spLocks noGrp="1"/>
+          </p:cNvSpPr>
+          <p:nvPr>
+            <p:ph type="body" idx="3" sz="quarter"/>
+          </p:nvPr>
+        </p:nvSpPr>
+        <p:spPr/>
+        <p:txBody>
+          <a:bodyPr/>
+          <a:lstStyle/>
+          <a:p/>
+        </p:txBody>
+      </p:sp>
+      <p:sp>
+        <p:nvSpPr>
+          <p:cNvPr id="4" name="Slide Number Placeholder 3"/>
+          <p:cNvSpPr>
+            <a:spLocks noGrp="1"/>
+          </p:cNvSpPr>
+          <p:nvPr>
+            <p:ph type="sldNum" idx="5" sz="quarter"/>
+          </p:nvPr>
+        </p:nvSpPr>
+        <p:spPr/>
+      </p:sp>
+    </p:spTree>
+  </p:cSld>
+  <p:clrMapOvr>
+    <a:masterClrMapping/>
+  </p:clrMapOvr>
+</p:notes>
+</file>
+
+<file path=ppt/notesSlides/notesSlide4.xml><?xml version="1.0" encoding="utf-8"?>
+<p:notes xmlns:a="http://schemas.openxmlformats.org/drawingml/2006/main" xmlns:p="http://schemas.openxmlformats.org/presentationml/2006/main" xmlns:r="http://schemas.openxmlformats.org/officeDocument/2006/relationships">
+  <p:cSld>
+    <p:spTree>
+      <p:nvGrpSpPr>
+        <p:cNvPr id="1" name=""/>
+        <p:cNvGrpSpPr/>
+        <p:nvPr/>
+      </p:nvGrpSpPr>
+      <p:grpSpPr>
+        <a:xfrm>
+          <a:off x="0" y="0"/>
+          <a:ext cx="0" cy="0"/>
+          <a:chOff x="0" y="0"/>
+          <a:chExt cx="0" cy="0"/>
+        </a:xfrm>
+      </p:grpSpPr>
+      <p:sp>
+        <p:nvSpPr>
+          <p:cNvPr id="2" name="Slide Image Placeholder 1"/>
+          <p:cNvSpPr>
+            <a:spLocks noGrp="1"/>
+          </p:cNvSpPr>
+          <p:nvPr>
+            <p:ph type="sldImg" idx="2"/>
+          </p:nvPr>
+        </p:nvSpPr>
+        <p:spPr/>
+      </p:sp>
+      <p:sp>
+        <p:nvSpPr>
+          <p:cNvPr id="3" name="Notes Placeholder 2"/>
+          <p:cNvSpPr>
+            <a:spLocks noGrp="1"/>
+          </p:cNvSpPr>
+          <p:nvPr>
+            <p:ph type="body" idx="3" sz="quarter"/>
+          </p:nvPr>
+        </p:nvSpPr>
+        <p:spPr/>
+        <p:txBody>
+          <a:bodyPr/>
+          <a:lstStyle/>
+          <a:p/>
+        </p:txBody>
+      </p:sp>
+      <p:sp>
+        <p:nvSpPr>
+          <p:cNvPr id="4" name="Slide Number Placeholder 3"/>
+          <p:cNvSpPr>
+            <a:spLocks noGrp="1"/>
+          </p:cNvSpPr>
+          <p:nvPr>
+            <p:ph type="sldNum" idx="5" sz="quarter"/>
+          </p:nvPr>
+        </p:nvSpPr>
+        <p:spPr/>
+      </p:sp>
+    </p:spTree>
+  </p:cSld>
+  <p:clrMapOvr>
+    <a:masterClrMapping/>
+  </p:clrMapOvr>
+</p:notes>
+</file>
+
+<file path=ppt/notesSlides/notesSlide5.xml><?xml version="1.0" encoding="utf-8"?>
+<p:notes xmlns:a="http://schemas.openxmlformats.org/drawingml/2006/main" xmlns:p="http://schemas.openxmlformats.org/presentationml/2006/main" xmlns:r="http://schemas.openxmlformats.org/officeDocument/2006/relationships">
+  <p:cSld>
+    <p:spTree>
+      <p:nvGrpSpPr>
+        <p:cNvPr id="1" name=""/>
+        <p:cNvGrpSpPr/>
+        <p:nvPr/>
+      </p:nvGrpSpPr>
+      <p:grpSpPr>
+        <a:xfrm>
+          <a:off x="0" y="0"/>
+          <a:ext cx="0" cy="0"/>
+          <a:chOff x="0" y="0"/>
+          <a:chExt cx="0" cy="0"/>
+        </a:xfrm>
+      </p:grpSpPr>
+      <p:sp>
+        <p:nvSpPr>
+          <p:cNvPr id="2" name="Slide Image Placeholder 1"/>
+          <p:cNvSpPr>
+            <a:spLocks noGrp="1"/>
+          </p:cNvSpPr>
+          <p:nvPr>
+            <p:ph type="sldImg" idx="2"/>
+          </p:nvPr>
+        </p:nvSpPr>
+        <p:spPr/>
+      </p:sp>
+      <p:sp>
+        <p:nvSpPr>
+          <p:cNvPr id="3" name="Notes Placeholder 2"/>
+          <p:cNvSpPr>
+            <a:spLocks noGrp="1"/>
+          </p:cNvSpPr>
+          <p:nvPr>
+            <p:ph type="body" idx="3" sz="quarter"/>
+          </p:nvPr>
+        </p:nvSpPr>
+        <p:spPr/>
+        <p:txBody>
+          <a:bodyPr/>
+          <a:lstStyle/>
+          <a:p/>
+        </p:txBody>
+      </p:sp>
+      <p:sp>
+        <p:nvSpPr>
+          <p:cNvPr id="4" name="Slide Number Placeholder 3"/>
+          <p:cNvSpPr>
+            <a:spLocks noGrp="1"/>
+          </p:cNvSpPr>
+          <p:nvPr>
+            <p:ph type="sldNum" idx="5" sz="quarter"/>
+          </p:nvPr>
+        </p:nvSpPr>
+        <p:spPr/>
+      </p:sp>
+    </p:spTree>
+  </p:cSld>
+  <p:clrMapOvr>
+    <a:masterClrMapping/>
+  </p:clrMapOvr>
+</p:notes>
+</file>
+
+<file path=ppt/notesSlides/notesSlide6.xml><?xml version="1.0" encoding="utf-8"?>
+<p:notes xmlns:a="http://schemas.openxmlformats.org/drawingml/2006/main" xmlns:p="http://schemas.openxmlformats.org/presentationml/2006/main" xmlns:r="http://schemas.openxmlformats.org/officeDocument/2006/relationships">
+  <p:cSld>
+    <p:spTree>
+      <p:nvGrpSpPr>
+        <p:cNvPr id="1" name=""/>
+        <p:cNvGrpSpPr/>
+        <p:nvPr/>
+      </p:nvGrpSpPr>
+      <p:grpSpPr>
+        <a:xfrm>
+          <a:off x="0" y="0"/>
+          <a:ext cx="0" cy="0"/>
+          <a:chOff x="0" y="0"/>
+          <a:chExt cx="0" cy="0"/>
+        </a:xfrm>
+      </p:grpSpPr>
+      <p:sp>
+        <p:nvSpPr>
+          <p:cNvPr id="2" name="Slide Image Placeholder 1"/>
+          <p:cNvSpPr>
+            <a:spLocks noGrp="1"/>
+          </p:cNvSpPr>
+          <p:nvPr>
+            <p:ph type="sldImg" idx="2"/>
+          </p:nvPr>
+        </p:nvSpPr>
+        <p:spPr/>
+      </p:sp>
+      <p:sp>
+        <p:nvSpPr>
+          <p:cNvPr id="3" name="Notes Placeholder 2"/>
+          <p:cNvSpPr>
+            <a:spLocks noGrp="1"/>
+          </p:cNvSpPr>
+          <p:nvPr>
+            <p:ph type="body" idx="3" sz="quarter"/>
+          </p:nvPr>
+        </p:nvSpPr>
+        <p:spPr/>
+        <p:txBody>
+          <a:bodyPr/>
+          <a:lstStyle/>
+          <a:p/>
+        </p:txBody>
+      </p:sp>
+      <p:sp>
+        <p:nvSpPr>
+          <p:cNvPr id="4" name="Slide Number Placeholder 3"/>
+          <p:cNvSpPr>
+            <a:spLocks noGrp="1"/>
+          </p:cNvSpPr>
+          <p:nvPr>
+            <p:ph type="sldNum" idx="5" sz="quarter"/>
+          </p:nvPr>
+        </p:nvSpPr>
+        <p:spPr/>
+      </p:sp>
+    </p:spTree>
+  </p:cSld>
+  <p:clrMapOvr>
+    <a:masterClrMapping/>
+  </p:clrMapOvr>
+</p:notes>
+</file>
+
+<file path=ppt/notesSlides/notesSlide7.xml><?xml version="1.0" encoding="utf-8"?>
+<p:notes xmlns:a="http://schemas.openxmlformats.org/drawingml/2006/main" xmlns:p="http://schemas.openxmlformats.org/presentationml/2006/main" xmlns:r="http://schemas.openxmlformats.org/officeDocument/2006/relationships">
+  <p:cSld>
+    <p:spTree>
+      <p:nvGrpSpPr>
+        <p:cNvPr id="1" name=""/>
+        <p:cNvGrpSpPr/>
+        <p:nvPr/>
+      </p:nvGrpSpPr>
+      <p:grpSpPr>
+        <a:xfrm>
+          <a:off x="0" y="0"/>
+          <a:ext cx="0" cy="0"/>
+          <a:chOff x="0" y="0"/>
+          <a:chExt cx="0" cy="0"/>
+        </a:xfrm>
+      </p:grpSpPr>
+      <p:sp>
+        <p:nvSpPr>
+          <p:cNvPr id="2" name="Slide Image Placeholder 1"/>
+          <p:cNvSpPr>
+            <a:spLocks noGrp="1"/>
+          </p:cNvSpPr>
+          <p:nvPr>
+            <p:ph type="sldImg" idx="2"/>
+          </p:nvPr>
+        </p:nvSpPr>
+        <p:spPr/>
+      </p:sp>
+      <p:sp>
+        <p:nvSpPr>
+          <p:cNvPr id="3" name="Notes Placeholder 2"/>
+          <p:cNvSpPr>
+            <a:spLocks noGrp="1"/>
+          </p:cNvSpPr>
+          <p:nvPr>
+            <p:ph type="body" idx="3" sz="quarter"/>
+          </p:nvPr>
+        </p:nvSpPr>
+        <p:spPr/>
+        <p:txBody>
+          <a:bodyPr/>
+          <a:lstStyle/>
+          <a:p/>
+        </p:txBody>
+      </p:sp>
+      <p:sp>
+        <p:nvSpPr>
+          <p:cNvPr id="4" name="Slide Number Placeholder 3"/>
+          <p:cNvSpPr>
+            <a:spLocks noGrp="1"/>
+          </p:cNvSpPr>
+          <p:nvPr>
+            <p:ph type="sldNum" idx="5" sz="quarter"/>
+          </p:nvPr>
+        </p:nvSpPr>
+        <p:spPr/>
+      </p:sp>
+    </p:spTree>
+  </p:cSld>
+  <p:clrMapOvr>
+    <a:masterClrMapping/>
+  </p:clrMapOvr>
+</p:notes>
+</file>
+
+<file path=ppt/notesSlides/notesSlide8.xml><?xml version="1.0" encoding="utf-8"?>
+<p:notes xmlns:a="http://schemas.openxmlformats.org/drawingml/2006/main" xmlns:p="http://schemas.openxmlformats.org/presentationml/2006/main" xmlns:r="http://schemas.openxmlformats.org/officeDocument/2006/relationships">
+  <p:cSld>
+    <p:spTree>
+      <p:nvGrpSpPr>
+        <p:cNvPr id="1" name=""/>
+        <p:cNvGrpSpPr/>
+        <p:nvPr/>
+      </p:nvGrpSpPr>
+      <p:grpSpPr>
+        <a:xfrm>
+          <a:off x="0" y="0"/>
+          <a:ext cx="0" cy="0"/>
+          <a:chOff x="0" y="0"/>
+          <a:chExt cx="0" cy="0"/>
+        </a:xfrm>
+      </p:grpSpPr>
+      <p:sp>
+        <p:nvSpPr>
+          <p:cNvPr id="2" name="Slide Image Placeholder 1"/>
+          <p:cNvSpPr>
+            <a:spLocks noGrp="1"/>
+          </p:cNvSpPr>
+          <p:nvPr>
+            <p:ph type="sldImg" idx="2"/>
+          </p:nvPr>
+        </p:nvSpPr>
+        <p:spPr/>
+      </p:sp>
+      <p:sp>
+        <p:nvSpPr>
+          <p:cNvPr id="3" name="Notes Placeholder 2"/>
+          <p:cNvSpPr>
+            <a:spLocks noGrp="1"/>
+          </p:cNvSpPr>
+          <p:nvPr>
+            <p:ph type="body" idx="3" sz="quarter"/>
+          </p:nvPr>
+        </p:nvSpPr>
+        <p:spPr/>
+        <p:txBody>
+          <a:bodyPr/>
+          <a:lstStyle/>
+          <a:p/>
+        </p:txBody>
+      </p:sp>
+      <p:sp>
+        <p:nvSpPr>
+          <p:cNvPr id="4" name="Slide Number Placeholder 3"/>
+          <p:cNvSpPr>
+            <a:spLocks noGrp="1"/>
+          </p:cNvSpPr>
+          <p:nvPr>
+            <p:ph type="sldNum" idx="5" sz="quarter"/>
+          </p:nvPr>
+        </p:nvSpPr>
+        <p:spPr/>
+      </p:sp>
+    </p:spTree>
+  </p:cSld>
+  <p:clrMapOvr>
+    <a:masterClrMapping/>
+  </p:clrMapOvr>
+</p:notes>
+</file>
+
+<file path=ppt/notesSlides/notesSlide9.xml><?xml version="1.0" encoding="utf-8"?>
+<p:notes xmlns:a="http://schemas.openxmlformats.org/drawingml/2006/main" xmlns:p="http://schemas.openxmlformats.org/presentationml/2006/main" xmlns:r="http://schemas.openxmlformats.org/officeDocument/2006/relationships">
+  <p:cSld>
+    <p:spTree>
+      <p:nvGrpSpPr>
+        <p:cNvPr id="1" name=""/>
+        <p:cNvGrpSpPr/>
+        <p:nvPr/>
+      </p:nvGrpSpPr>
+      <p:grpSpPr>
+        <a:xfrm>
+          <a:off x="0" y="0"/>
+          <a:ext cx="0" cy="0"/>
+          <a:chOff x="0" y="0"/>
+          <a:chExt cx="0" cy="0"/>
+        </a:xfrm>
+      </p:grpSpPr>
+      <p:sp>
+        <p:nvSpPr>
+          <p:cNvPr id="2" name="Slide Image Placeholder 1"/>
+          <p:cNvSpPr>
+            <a:spLocks noGrp="1"/>
+          </p:cNvSpPr>
+          <p:nvPr>
+            <p:ph type="sldImg" idx="2"/>
+          </p:nvPr>
+        </p:nvSpPr>
+        <p:spPr/>
+      </p:sp>
+      <p:sp>
+        <p:nvSpPr>
+          <p:cNvPr id="3" name="Notes Placeholder 2"/>
+          <p:cNvSpPr>
+            <a:spLocks noGrp="1"/>
+          </p:cNvSpPr>
+          <p:nvPr>
+            <p:ph type="body" idx="3" sz="quarter"/>
+          </p:nvPr>
+        </p:nvSpPr>
+        <p:spPr/>
+        <p:txBody>
+          <a:bodyPr/>
+          <a:lstStyle/>
+          <a:p/>
+        </p:txBody>
+      </p:sp>
+      <p:sp>
+        <p:nvSpPr>
+          <p:cNvPr id="4" name="Slide Number Placeholder 3"/>
+          <p:cNvSpPr>
+            <a:spLocks noGrp="1"/>
+          </p:cNvSpPr>
+          <p:nvPr>
+            <p:ph type="sldNum" idx="5" sz="quarter"/>
+          </p:nvPr>
+        </p:nvSpPr>
+        <p:spPr/>
+      </p:sp>
+    </p:spTree>
+  </p:cSld>
+  <p:clrMapOvr>
+    <a:masterClrMapping/>
+  </p:clrMapOvr>
+</p:notes>
 </file>
 
 <file path=ppt/slideLayouts/slideLayout1.xml><?xml version="1.0" encoding="utf-8"?>
@@ -3260,7 +4336,7 @@
               </a:defRPr>
             </a:pPr>
             <a:r>
-              <a:t>SESIÓN 205</a:t>
+              <a:t>H0.5</a:t>
             </a:r>
           </a:p>
         </p:txBody>
@@ -3695,7 +4771,7 @@
               </a:defRPr>
             </a:pPr>
             <a:r>
-              <a:t>MiniJarvis · 1.º DAW · Sesión 205 · H0 — Formación y prueba de equipos Scrum mediante la torre de papel</a:t>
+              <a:t>MiniJarvis · 1.º DAW · H0.5 · H0 — Formación y prueba de equipos Scrum mediante la torre de papel</a:t>
             </a:r>
           </a:p>
         </p:txBody>
@@ -4193,7 +5269,7 @@
               </a:defRPr>
             </a:pPr>
             <a:r>
-              <a:t>MiniJarvis · 1.º DAW · Sesión 205 · H0 — Formación y prueba de equipos Scrum mediante la torre de papel</a:t>
+              <a:t>MiniJarvis · 1.º DAW · H0.5 · H0 — Formación y prueba de equipos Scrum mediante la torre de papel</a:t>
             </a:r>
           </a:p>
         </p:txBody>
@@ -4601,7 +5677,7 @@
               </a:defRPr>
             </a:pPr>
             <a:r>
-              <a:t>MiniJarvis · 1.º DAW · Sesión 205 · H0 — Formación y prueba de equipos Scrum mediante la torre de papel</a:t>
+              <a:t>MiniJarvis · 1.º DAW · H0.5 · H0 — Formación y prueba de equipos Scrum mediante la torre de papel</a:t>
             </a:r>
           </a:p>
         </p:txBody>
@@ -5018,7 +6094,7 @@
               </a:defRPr>
             </a:pPr>
             <a:r>
-              <a:t>MiniJarvis · 1.º DAW · Sesión 205 · H0 — Formación y prueba de equipos Scrum mediante la torre de papel</a:t>
+              <a:t>MiniJarvis · 1.º DAW · H0.5 · H0 — Formación y prueba de equipos Scrum mediante la torre de papel</a:t>
             </a:r>
           </a:p>
         </p:txBody>
@@ -5133,7 +6209,7 @@
               </a:defRPr>
             </a:pPr>
             <a:r>
-              <a:t>0–5 min — Recuperar evidencias: Entrega o pide abrir las evidencias de S202–S204.</a:t>
+              <a:t>0–5 min — Recuperar evidencias: Entrega o pide abrir las evidencias de H0.2–H0.4.</a:t>
             </a:r>
           </a:p>
         </p:txBody>
@@ -5963,7 +7039,7 @@
               </a:defRPr>
             </a:pPr>
             <a:r>
-              <a:t>MiniJarvis · 1.º DAW · Sesión 205 · H0 — Formación y prueba de equipos Scrum mediante la torre de papel</a:t>
+              <a:t>MiniJarvis · 1.º DAW · H0.5 · H0 — Formación y prueba de equipos Scrum mediante la torre de papel</a:t>
             </a:r>
           </a:p>
         </p:txBody>
@@ -6448,7 +7524,7 @@
               </a:defRPr>
             </a:pPr>
             <a:r>
-              <a:t>MiniJarvis · 1.º DAW · Sesión 205 · H0 — Formación y prueba de equipos Scrum mediante la torre de papel</a:t>
+              <a:t>MiniJarvis · 1.º DAW · H0.5 · H0 — Formación y prueba de equipos Scrum mediante la torre de papel</a:t>
             </a:r>
           </a:p>
         </p:txBody>
@@ -7522,7 +8598,7 @@
               </a:defRPr>
             </a:pPr>
             <a:r>
-              <a:t>MiniJarvis · 1.º DAW · Sesión 205 · H0 — Formación y prueba de equipos Scrum mediante la torre de papel</a:t>
+              <a:t>MiniJarvis · 1.º DAW · H0.5 · H0 — Formación y prueba de equipos Scrum mediante la torre de papel</a:t>
             </a:r>
           </a:p>
         </p:txBody>
@@ -8245,7 +9321,7 @@
               </a:defRPr>
             </a:pPr>
             <a:r>
-              <a:t>MiniJarvis · 1.º DAW · Sesión 205 · H0 — Formación y prueba de equipos Scrum mediante la torre de papel</a:t>
+              <a:t>MiniJarvis · 1.º DAW · H0.5 · H0 — Formación y prueba de equipos Scrum mediante la torre de papel</a:t>
             </a:r>
           </a:p>
         </p:txBody>
@@ -9049,7 +10125,7 @@
               </a:defRPr>
             </a:pPr>
             <a:r>
-              <a:t>MiniJarvis · 1.º DAW · Sesión 205 · H0 — Formación y prueba de equipos Scrum mediante la torre de papel</a:t>
+              <a:t>MiniJarvis · 1.º DAW · H0.5 · H0 — Formación y prueba de equipos Scrum mediante la torre de papel</a:t>
             </a:r>
           </a:p>
         </p:txBody>
@@ -9772,7 +10848,7 @@
               </a:defRPr>
             </a:pPr>
             <a:r>
-              <a:t>MiniJarvis · 1.º DAW · Sesión 205 · H0 — Formación y prueba de equipos Scrum mediante la torre de papel</a:t>
+              <a:t>MiniJarvis · 1.º DAW · H0.5 · H0 — Formación y prueba de equipos Scrum mediante la torre de papel</a:t>
             </a:r>
           </a:p>
         </p:txBody>
@@ -10670,4 +11746,324 @@
   </a:objectDefaults>
   <a:extraClrSchemeLst/>
 </a:theme>
+</file>
+
+<file path=ppt/theme/theme2.xml><?xml version="1.0" encoding="utf-8"?>
+<a:theme xmlns:a="http://schemas.openxmlformats.org/drawingml/2006/main" name="Office Theme">
+  <a:themeElements>
+    <a:clrScheme name="Office">
+      <a:dk1>
+        <a:sysClr val="windowText" lastClr="000000"/>
+      </a:dk1>
+      <a:lt1>
+        <a:sysClr val="window" lastClr="FFFFFF"/>
+      </a:lt1>
+      <a:dk2>
+        <a:srgbClr val="1F497D"/>
+      </a:dk2>
+      <a:lt2>
+        <a:srgbClr val="EEECE1"/>
+      </a:lt2>
+      <a:accent1>
+        <a:srgbClr val="4F81BD"/>
+      </a:accent1>
+      <a:accent2>
+        <a:srgbClr val="C0504D"/>
+      </a:accent2>
+      <a:accent3>
+        <a:srgbClr val="9BBB59"/>
+      </a:accent3>
+      <a:accent4>
+        <a:srgbClr val="8064A2"/>
+      </a:accent4>
+      <a:accent5>
+        <a:srgbClr val="4BACC6"/>
+      </a:accent5>
+      <a:accent6>
+        <a:srgbClr val="F79646"/>
+      </a:accent6>
+      <a:hlink>
+        <a:srgbClr val="0000FF"/>
+      </a:hlink>
+      <a:folHlink>
+        <a:srgbClr val="800080"/>
+      </a:folHlink>
+    </a:clrScheme>
+    <a:fontScheme name="Office">
+      <a:majorFont>
+        <a:latin typeface="Calibri"/>
+        <a:ea typeface=""/>
+        <a:cs typeface=""/>
+        <a:font script="Jpan" typeface="ＭＳ Ｐゴシック"/>
+        <a:font script="Hang" typeface="맑은 고딕"/>
+        <a:font script="Hans" typeface="宋体"/>
+        <a:font script="Hant" typeface="新細明體"/>
+        <a:font script="Arab" typeface="Times New Roman"/>
+        <a:font script="Hebr" typeface="Times New Roman"/>
+        <a:font script="Thai" typeface="Angsana New"/>
+        <a:font script="Ethi" typeface="Nyala"/>
+        <a:font script="Beng" typeface="Vrinda"/>
+        <a:font script="Gujr" typeface="Shruti"/>
+        <a:font script="Khmr" typeface="MoolBoran"/>
+        <a:font script="Knda" typeface="Tunga"/>
+        <a:font script="Guru" typeface="Raavi"/>
+        <a:font script="Cans" typeface="Euphemia"/>
+        <a:font script="Cher" typeface="Plantagenet Cherokee"/>
+        <a:font script="Yiii" typeface="Microsoft Yi Baiti"/>
+        <a:font script="Tibt" typeface="Microsoft Himalaya"/>
+        <a:font script="Thaa" typeface="MV Boli"/>
+        <a:font script="Deva" typeface="Mangal"/>
+        <a:font script="Telu" typeface="Gautami"/>
+        <a:font script="Taml" typeface="Latha"/>
+        <a:font script="Syrc" typeface="Estrangelo Edessa"/>
+        <a:font script="Orya" typeface="Kalinga"/>
+        <a:font script="Mlym" typeface="Kartika"/>
+        <a:font script="Laoo" typeface="DokChampa"/>
+        <a:font script="Sinh" typeface="Iskoola Pota"/>
+        <a:font script="Mong" typeface="Mongolian Baiti"/>
+        <a:font script="Viet" typeface="Times New Roman"/>
+        <a:font script="Uigh" typeface="Microsoft Uighur"/>
+        <a:font script="Geor" typeface="Sylfaen"/>
+      </a:majorFont>
+      <a:minorFont>
+        <a:latin typeface="Calibri"/>
+        <a:ea typeface=""/>
+        <a:cs typeface=""/>
+        <a:font script="Jpan" typeface="ＭＳ Ｐゴシック"/>
+        <a:font script="Hang" typeface="맑은 고딕"/>
+        <a:font script="Hans" typeface="宋体"/>
+        <a:font script="Hant" typeface="新細明體"/>
+        <a:font script="Arab" typeface="Arial"/>
+        <a:font script="Hebr" typeface="Arial"/>
+        <a:font script="Thai" typeface="Cordia New"/>
+        <a:font script="Ethi" typeface="Nyala"/>
+        <a:font script="Beng" typeface="Vrinda"/>
+        <a:font script="Gujr" typeface="Shruti"/>
+        <a:font script="Khmr" typeface="DaunPenh"/>
+        <a:font script="Knda" typeface="Tunga"/>
+        <a:font script="Guru" typeface="Raavi"/>
+        <a:font script="Cans" typeface="Euphemia"/>
+        <a:font script="Cher" typeface="Plantagenet Cherokee"/>
+        <a:font script="Yiii" typeface="Microsoft Yi Baiti"/>
+        <a:font script="Tibt" typeface="Microsoft Himalaya"/>
+        <a:font script="Thaa" typeface="MV Boli"/>
+        <a:font script="Deva" typeface="Mangal"/>
+        <a:font script="Telu" typeface="Gautami"/>
+        <a:font script="Taml" typeface="Latha"/>
+        <a:font script="Syrc" typeface="Estrangelo Edessa"/>
+        <a:font script="Orya" typeface="Kalinga"/>
+        <a:font script="Mlym" typeface="Kartika"/>
+        <a:font script="Laoo" typeface="DokChampa"/>
+        <a:font script="Sinh" typeface="Iskoola Pota"/>
+        <a:font script="Mong" typeface="Mongolian Baiti"/>
+        <a:font script="Viet" typeface="Arial"/>
+        <a:font script="Uigh" typeface="Microsoft Uighur"/>
+        <a:font script="Geor" typeface="Sylfaen"/>
+      </a:minorFont>
+    </a:fontScheme>
+    <a:fmtScheme name="Office">
+      <a:fillStyleLst>
+        <a:solidFill>
+          <a:schemeClr val="phClr"/>
+        </a:solidFill>
+        <a:gradFill rotWithShape="1">
+          <a:gsLst>
+            <a:gs pos="0">
+              <a:schemeClr val="phClr">
+                <a:tint val="50000"/>
+                <a:satMod val="300000"/>
+              </a:schemeClr>
+            </a:gs>
+            <a:gs pos="35000">
+              <a:schemeClr val="phClr">
+                <a:tint val="37000"/>
+                <a:satMod val="300000"/>
+              </a:schemeClr>
+            </a:gs>
+            <a:gs pos="100000">
+              <a:schemeClr val="phClr">
+                <a:tint val="15000"/>
+                <a:satMod val="350000"/>
+              </a:schemeClr>
+            </a:gs>
+          </a:gsLst>
+          <a:lin ang="16200000" scaled="1"/>
+        </a:gradFill>
+        <a:gradFill rotWithShape="1">
+          <a:gsLst>
+            <a:gs pos="0">
+              <a:schemeClr val="phClr">
+                <a:tint val="100000"/>
+                <a:shade val="100000"/>
+                <a:satMod val="130000"/>
+              </a:schemeClr>
+            </a:gs>
+            <a:gs pos="100000">
+              <a:schemeClr val="phClr">
+                <a:tint val="50000"/>
+                <a:shade val="100000"/>
+                <a:satMod val="350000"/>
+              </a:schemeClr>
+            </a:gs>
+          </a:gsLst>
+          <a:lin ang="16200000" scaled="0"/>
+        </a:gradFill>
+      </a:fillStyleLst>
+      <a:lnStyleLst>
+        <a:ln w="9525" cap="flat" cmpd="sng" algn="ctr">
+          <a:solidFill>
+            <a:schemeClr val="phClr">
+              <a:shade val="95000"/>
+              <a:satMod val="105000"/>
+            </a:schemeClr>
+          </a:solidFill>
+          <a:prstDash val="solid"/>
+        </a:ln>
+        <a:ln w="25400" cap="flat" cmpd="sng" algn="ctr">
+          <a:solidFill>
+            <a:schemeClr val="phClr"/>
+          </a:solidFill>
+          <a:prstDash val="solid"/>
+        </a:ln>
+        <a:ln w="38100" cap="flat" cmpd="sng" algn="ctr">
+          <a:solidFill>
+            <a:schemeClr val="phClr"/>
+          </a:solidFill>
+          <a:prstDash val="solid"/>
+        </a:ln>
+      </a:lnStyleLst>
+      <a:effectStyleLst>
+        <a:effectStyle>
+          <a:effectLst>
+            <a:outerShdw blurRad="40000" dist="20000" dir="5400000" rotWithShape="0">
+              <a:srgbClr val="000000">
+                <a:alpha val="38000"/>
+              </a:srgbClr>
+            </a:outerShdw>
+          </a:effectLst>
+        </a:effectStyle>
+        <a:effectStyle>
+          <a:effectLst>
+            <a:outerShdw blurRad="40000" dist="23000" dir="5400000" rotWithShape="0">
+              <a:srgbClr val="000000">
+                <a:alpha val="35000"/>
+              </a:srgbClr>
+            </a:outerShdw>
+          </a:effectLst>
+        </a:effectStyle>
+        <a:effectStyle>
+          <a:effectLst>
+            <a:outerShdw blurRad="40000" dist="23000" dir="5400000" rotWithShape="0">
+              <a:srgbClr val="000000">
+                <a:alpha val="35000"/>
+              </a:srgbClr>
+            </a:outerShdw>
+          </a:effectLst>
+          <a:scene3d>
+            <a:camera prst="orthographicFront">
+              <a:rot lat="0" lon="0" rev="0"/>
+            </a:camera>
+            <a:lightRig rig="threePt" dir="t">
+              <a:rot lat="0" lon="0" rev="1200000"/>
+            </a:lightRig>
+          </a:scene3d>
+          <a:sp3d>
+            <a:bevelT w="63500" h="25400"/>
+          </a:sp3d>
+        </a:effectStyle>
+      </a:effectStyleLst>
+      <a:bgFillStyleLst>
+        <a:solidFill>
+          <a:schemeClr val="phClr"/>
+        </a:solidFill>
+        <a:gradFill rotWithShape="1">
+          <a:gsLst>
+            <a:gs pos="0">
+              <a:schemeClr val="phClr">
+                <a:tint val="40000"/>
+                <a:satMod val="350000"/>
+              </a:schemeClr>
+            </a:gs>
+            <a:gs pos="40000">
+              <a:schemeClr val="phClr">
+                <a:tint val="45000"/>
+                <a:shade val="99000"/>
+                <a:satMod val="350000"/>
+              </a:schemeClr>
+            </a:gs>
+            <a:gs pos="100000">
+              <a:schemeClr val="phClr">
+                <a:shade val="20000"/>
+                <a:satMod val="255000"/>
+              </a:schemeClr>
+            </a:gs>
+          </a:gsLst>
+          <a:path path="circle">
+            <a:fillToRect l="50000" t="-80000" r="50000" b="180000"/>
+          </a:path>
+        </a:gradFill>
+        <a:gradFill rotWithShape="1">
+          <a:gsLst>
+            <a:gs pos="0">
+              <a:schemeClr val="phClr">
+                <a:tint val="80000"/>
+                <a:satMod val="300000"/>
+              </a:schemeClr>
+            </a:gs>
+            <a:gs pos="100000">
+              <a:schemeClr val="phClr">
+                <a:shade val="30000"/>
+                <a:satMod val="200000"/>
+              </a:schemeClr>
+            </a:gs>
+          </a:gsLst>
+          <a:path path="circle">
+            <a:fillToRect l="50000" t="50000" r="50000" b="50000"/>
+          </a:path>
+        </a:gradFill>
+      </a:bgFillStyleLst>
+    </a:fmtScheme>
+  </a:themeElements>
+  <a:objectDefaults>
+    <a:spDef>
+      <a:spPr/>
+      <a:bodyPr/>
+      <a:lstStyle/>
+      <a:style>
+        <a:lnRef idx="1">
+          <a:schemeClr val="accent1"/>
+        </a:lnRef>
+        <a:fillRef idx="3">
+          <a:schemeClr val="accent1"/>
+        </a:fillRef>
+        <a:effectRef idx="2">
+          <a:schemeClr val="accent1"/>
+        </a:effectRef>
+        <a:fontRef idx="minor">
+          <a:schemeClr val="lt1"/>
+        </a:fontRef>
+      </a:style>
+    </a:spDef>
+    <a:lnDef>
+      <a:spPr/>
+      <a:bodyPr/>
+      <a:lstStyle/>
+      <a:style>
+        <a:lnRef idx="2">
+          <a:schemeClr val="accent1"/>
+        </a:lnRef>
+        <a:fillRef idx="0">
+          <a:schemeClr val="accent1"/>
+        </a:fillRef>
+        <a:effectRef idx="1">
+          <a:schemeClr val="accent1"/>
+        </a:effectRef>
+        <a:fontRef idx="minor">
+          <a:schemeClr val="tx1"/>
+        </a:fontRef>
+      </a:style>
+    </a:lnDef>
+  </a:objectDefaults>
+  <a:extraClrSchemeLst/>
+</a:theme>
 </file>